--- a/RISCVstage2.pptx
+++ b/RISCVstage2.pptx
@@ -112,6 +112,339 @@
 </p:presentation>
 </file>
 
+<file path=ppt/revisionInfo.xml><?xml version="1.0" encoding="utf-8"?>
+<p1510:revInfo xmlns:a="http://schemas.openxmlformats.org/drawingml/2006/main" xmlns:r="http://schemas.openxmlformats.org/officeDocument/2006/relationships" xmlns:p1510="http://schemas.microsoft.com/office/powerpoint/2015/10/main">
+  <p1510:revLst>
+    <p1510:client id="{38F3156C-1A0B-40A4-B506-136BA873DFD3}" v="6" dt="2026-03-05T22:38:07.501"/>
+  </p1510:revLst>
+</p1510:revInfo>
+</file>
+
+<file path=ppt/changesInfos/changesInfo1.xml><?xml version="1.0" encoding="utf-8"?>
+<pc:chgInfo xmlns:a="http://schemas.openxmlformats.org/drawingml/2006/main" xmlns:r="http://schemas.openxmlformats.org/officeDocument/2006/relationships" xmlns:ac="http://schemas.microsoft.com/office/drawing/2013/main/command" xmlns:pc="http://schemas.microsoft.com/office/powerpoint/2013/main/command">
+  <pc:docChgLst>
+    <pc:chgData name="York, George W CIV USAF USAFA DF/DFEC" userId="1fb5875a-4594-4db2-80fb-f0db3de11280" providerId="ADAL" clId="{09330963-85FD-4C99-A81B-94D0EE5CFFEB}"/>
+    <pc:docChg chg="custSel modSld">
+      <pc:chgData name="York, George W CIV USAF USAFA DF/DFEC" userId="1fb5875a-4594-4db2-80fb-f0db3de11280" providerId="ADAL" clId="{09330963-85FD-4C99-A81B-94D0EE5CFFEB}" dt="2026-03-05T22:38:07.500" v="11"/>
+      <pc:docMkLst>
+        <pc:docMk/>
+      </pc:docMkLst>
+      <pc:sldChg chg="addSp delSp modSp mod">
+        <pc:chgData name="York, George W CIV USAF USAFA DF/DFEC" userId="1fb5875a-4594-4db2-80fb-f0db3de11280" providerId="ADAL" clId="{09330963-85FD-4C99-A81B-94D0EE5CFFEB}" dt="2026-03-05T22:38:07.500" v="11"/>
+        <pc:sldMkLst>
+          <pc:docMk/>
+          <pc:sldMk cId="1501170907" sldId="256"/>
+        </pc:sldMkLst>
+        <pc:spChg chg="add mod">
+          <ac:chgData name="York, George W CIV USAF USAFA DF/DFEC" userId="1fb5875a-4594-4db2-80fb-f0db3de11280" providerId="ADAL" clId="{09330963-85FD-4C99-A81B-94D0EE5CFFEB}" dt="2026-03-05T22:27:36.393" v="10"/>
+          <ac:spMkLst>
+            <pc:docMk/>
+            <pc:sldMk cId="1501170907" sldId="256"/>
+            <ac:spMk id="54" creationId="{7C5CCBD1-0844-480F-8141-9A9CAA44FF50}"/>
+          </ac:spMkLst>
+        </pc:spChg>
+        <pc:spChg chg="add mod">
+          <ac:chgData name="York, George W CIV USAF USAFA DF/DFEC" userId="1fb5875a-4594-4db2-80fb-f0db3de11280" providerId="ADAL" clId="{09330963-85FD-4C99-A81B-94D0EE5CFFEB}" dt="2026-03-05T22:27:36.393" v="10"/>
+          <ac:spMkLst>
+            <pc:docMk/>
+            <pc:sldMk cId="1501170907" sldId="256"/>
+            <ac:spMk id="57" creationId="{BE8947B1-691B-936E-60AD-9FDFE4A4EA75}"/>
+          </ac:spMkLst>
+        </pc:spChg>
+        <pc:spChg chg="add mod">
+          <ac:chgData name="York, George W CIV USAF USAFA DF/DFEC" userId="1fb5875a-4594-4db2-80fb-f0db3de11280" providerId="ADAL" clId="{09330963-85FD-4C99-A81B-94D0EE5CFFEB}" dt="2026-03-05T22:27:36.393" v="10"/>
+          <ac:spMkLst>
+            <pc:docMk/>
+            <pc:sldMk cId="1501170907" sldId="256"/>
+            <ac:spMk id="59" creationId="{62908768-78CB-6AA2-9F8F-560147BBA50C}"/>
+          </ac:spMkLst>
+        </pc:spChg>
+        <pc:spChg chg="add mod">
+          <ac:chgData name="York, George W CIV USAF USAFA DF/DFEC" userId="1fb5875a-4594-4db2-80fb-f0db3de11280" providerId="ADAL" clId="{09330963-85FD-4C99-A81B-94D0EE5CFFEB}" dt="2026-03-05T22:27:36.393" v="10"/>
+          <ac:spMkLst>
+            <pc:docMk/>
+            <pc:sldMk cId="1501170907" sldId="256"/>
+            <ac:spMk id="80" creationId="{55A3E227-0BF3-A73B-3BC7-43B3ED0C951A}"/>
+          </ac:spMkLst>
+        </pc:spChg>
+        <pc:spChg chg="add mod">
+          <ac:chgData name="York, George W CIV USAF USAFA DF/DFEC" userId="1fb5875a-4594-4db2-80fb-f0db3de11280" providerId="ADAL" clId="{09330963-85FD-4C99-A81B-94D0EE5CFFEB}" dt="2026-03-05T22:27:36.393" v="10"/>
+          <ac:spMkLst>
+            <pc:docMk/>
+            <pc:sldMk cId="1501170907" sldId="256"/>
+            <ac:spMk id="84" creationId="{D1142331-E346-04E4-CE7D-40DA0254B7E8}"/>
+          </ac:spMkLst>
+        </pc:spChg>
+        <pc:spChg chg="add mod">
+          <ac:chgData name="York, George W CIV USAF USAFA DF/DFEC" userId="1fb5875a-4594-4db2-80fb-f0db3de11280" providerId="ADAL" clId="{09330963-85FD-4C99-A81B-94D0EE5CFFEB}" dt="2026-03-05T22:38:07.500" v="11"/>
+          <ac:spMkLst>
+            <pc:docMk/>
+            <pc:sldMk cId="1501170907" sldId="256"/>
+            <ac:spMk id="105" creationId="{0DEEFEFE-6A7C-4AE5-CCC3-83F00563D393}"/>
+          </ac:spMkLst>
+        </pc:spChg>
+        <pc:spChg chg="del">
+          <ac:chgData name="York, George W CIV USAF USAFA DF/DFEC" userId="1fb5875a-4594-4db2-80fb-f0db3de11280" providerId="ADAL" clId="{09330963-85FD-4C99-A81B-94D0EE5CFFEB}" dt="2026-03-05T22:27:24.978" v="9" actId="478"/>
+          <ac:spMkLst>
+            <pc:docMk/>
+            <pc:sldMk cId="1501170907" sldId="256"/>
+            <ac:spMk id="145" creationId="{D48BF948-61BF-AC37-8597-388094170D18}"/>
+          </ac:spMkLst>
+        </pc:spChg>
+        <pc:spChg chg="del">
+          <ac:chgData name="York, George W CIV USAF USAFA DF/DFEC" userId="1fb5875a-4594-4db2-80fb-f0db3de11280" providerId="ADAL" clId="{09330963-85FD-4C99-A81B-94D0EE5CFFEB}" dt="2026-03-05T22:27:24.978" v="9" actId="478"/>
+          <ac:spMkLst>
+            <pc:docMk/>
+            <pc:sldMk cId="1501170907" sldId="256"/>
+            <ac:spMk id="146" creationId="{69719632-7E59-F7B2-AEF4-E4C30AA0AEF2}"/>
+          </ac:spMkLst>
+        </pc:spChg>
+        <pc:spChg chg="del">
+          <ac:chgData name="York, George W CIV USAF USAFA DF/DFEC" userId="1fb5875a-4594-4db2-80fb-f0db3de11280" providerId="ADAL" clId="{09330963-85FD-4C99-A81B-94D0EE5CFFEB}" dt="2026-03-05T22:27:24.978" v="9" actId="478"/>
+          <ac:spMkLst>
+            <pc:docMk/>
+            <pc:sldMk cId="1501170907" sldId="256"/>
+            <ac:spMk id="148" creationId="{6432B689-7D1C-F807-6B45-D8272427DA3A}"/>
+          </ac:spMkLst>
+        </pc:spChg>
+        <pc:spChg chg="del">
+          <ac:chgData name="York, George W CIV USAF USAFA DF/DFEC" userId="1fb5875a-4594-4db2-80fb-f0db3de11280" providerId="ADAL" clId="{09330963-85FD-4C99-A81B-94D0EE5CFFEB}" dt="2026-03-05T22:27:24.978" v="9" actId="478"/>
+          <ac:spMkLst>
+            <pc:docMk/>
+            <pc:sldMk cId="1501170907" sldId="256"/>
+            <ac:spMk id="149" creationId="{831B5896-D57B-4667-02CD-6AAF11DEE5E2}"/>
+          </ac:spMkLst>
+        </pc:spChg>
+        <pc:spChg chg="del">
+          <ac:chgData name="York, George W CIV USAF USAFA DF/DFEC" userId="1fb5875a-4594-4db2-80fb-f0db3de11280" providerId="ADAL" clId="{09330963-85FD-4C99-A81B-94D0EE5CFFEB}" dt="2026-03-05T22:27:24.978" v="9" actId="478"/>
+          <ac:spMkLst>
+            <pc:docMk/>
+            <pc:sldMk cId="1501170907" sldId="256"/>
+            <ac:spMk id="151" creationId="{BC6DDD09-EA41-1470-2429-DBE27164913F}"/>
+          </ac:spMkLst>
+        </pc:spChg>
+        <pc:spChg chg="del">
+          <ac:chgData name="York, George W CIV USAF USAFA DF/DFEC" userId="1fb5875a-4594-4db2-80fb-f0db3de11280" providerId="ADAL" clId="{09330963-85FD-4C99-A81B-94D0EE5CFFEB}" dt="2026-03-05T22:27:24.978" v="9" actId="478"/>
+          <ac:spMkLst>
+            <pc:docMk/>
+            <pc:sldMk cId="1501170907" sldId="256"/>
+            <ac:spMk id="155" creationId="{75FA3F6B-D94A-A494-28FD-7D4F921979A2}"/>
+          </ac:spMkLst>
+        </pc:spChg>
+        <pc:spChg chg="del">
+          <ac:chgData name="York, George W CIV USAF USAFA DF/DFEC" userId="1fb5875a-4594-4db2-80fb-f0db3de11280" providerId="ADAL" clId="{09330963-85FD-4C99-A81B-94D0EE5CFFEB}" dt="2026-03-05T22:27:24.978" v="9" actId="478"/>
+          <ac:spMkLst>
+            <pc:docMk/>
+            <pc:sldMk cId="1501170907" sldId="256"/>
+            <ac:spMk id="160" creationId="{3BF5B236-4D8B-849D-0CDF-2CB1B5EE7284}"/>
+          </ac:spMkLst>
+        </pc:spChg>
+        <pc:spChg chg="del">
+          <ac:chgData name="York, George W CIV USAF USAFA DF/DFEC" userId="1fb5875a-4594-4db2-80fb-f0db3de11280" providerId="ADAL" clId="{09330963-85FD-4C99-A81B-94D0EE5CFFEB}" dt="2026-03-05T22:27:24.978" v="9" actId="478"/>
+          <ac:spMkLst>
+            <pc:docMk/>
+            <pc:sldMk cId="1501170907" sldId="256"/>
+            <ac:spMk id="161" creationId="{0E9784F2-B3AB-C0FA-FDFE-48C83AB9B12E}"/>
+          </ac:spMkLst>
+        </pc:spChg>
+        <pc:spChg chg="del">
+          <ac:chgData name="York, George W CIV USAF USAFA DF/DFEC" userId="1fb5875a-4594-4db2-80fb-f0db3de11280" providerId="ADAL" clId="{09330963-85FD-4C99-A81B-94D0EE5CFFEB}" dt="2026-03-05T22:27:24.978" v="9" actId="478"/>
+          <ac:spMkLst>
+            <pc:docMk/>
+            <pc:sldMk cId="1501170907" sldId="256"/>
+            <ac:spMk id="270" creationId="{E335D321-53C8-872A-430E-7732E67F0A79}"/>
+          </ac:spMkLst>
+        </pc:spChg>
+        <pc:grpChg chg="add mod">
+          <ac:chgData name="York, George W CIV USAF USAFA DF/DFEC" userId="1fb5875a-4594-4db2-80fb-f0db3de11280" providerId="ADAL" clId="{09330963-85FD-4C99-A81B-94D0EE5CFFEB}" dt="2026-03-05T22:26:17.388" v="3"/>
+          <ac:grpSpMkLst>
+            <pc:docMk/>
+            <pc:sldMk cId="1501170907" sldId="256"/>
+            <ac:grpSpMk id="30" creationId="{F29CD4F1-4D65-2071-CB5D-56C21B0A8ADD}"/>
+          </ac:grpSpMkLst>
+        </pc:grpChg>
+        <pc:grpChg chg="add mod">
+          <ac:chgData name="York, George W CIV USAF USAFA DF/DFEC" userId="1fb5875a-4594-4db2-80fb-f0db3de11280" providerId="ADAL" clId="{09330963-85FD-4C99-A81B-94D0EE5CFFEB}" dt="2026-03-05T22:27:36.393" v="10"/>
+          <ac:grpSpMkLst>
+            <pc:docMk/>
+            <pc:sldMk cId="1501170907" sldId="256"/>
+            <ac:grpSpMk id="61" creationId="{16FC76F5-1B0B-DFD2-2DFE-467D7246D31F}"/>
+          </ac:grpSpMkLst>
+        </pc:grpChg>
+        <pc:picChg chg="mod">
+          <ac:chgData name="York, George W CIV USAF USAFA DF/DFEC" userId="1fb5875a-4594-4db2-80fb-f0db3de11280" providerId="ADAL" clId="{09330963-85FD-4C99-A81B-94D0EE5CFFEB}" dt="2026-03-05T22:26:17.388" v="3"/>
+          <ac:picMkLst>
+            <pc:docMk/>
+            <pc:sldMk cId="1501170907" sldId="256"/>
+            <ac:picMk id="32" creationId="{08E484B5-905D-B38D-3D91-241CE1719D6C}"/>
+          </ac:picMkLst>
+        </pc:picChg>
+        <pc:picChg chg="add mod ord">
+          <ac:chgData name="York, George W CIV USAF USAFA DF/DFEC" userId="1fb5875a-4594-4db2-80fb-f0db3de11280" providerId="ADAL" clId="{09330963-85FD-4C99-A81B-94D0EE5CFFEB}" dt="2026-03-05T22:26:44.928" v="6" actId="167"/>
+          <ac:picMkLst>
+            <pc:docMk/>
+            <pc:sldMk cId="1501170907" sldId="256"/>
+            <ac:picMk id="36" creationId="{7D1B8B85-7F90-6201-21E9-F6ABDFFBBFF8}"/>
+          </ac:picMkLst>
+        </pc:picChg>
+        <pc:cxnChg chg="add mod">
+          <ac:chgData name="York, George W CIV USAF USAFA DF/DFEC" userId="1fb5875a-4594-4db2-80fb-f0db3de11280" providerId="ADAL" clId="{09330963-85FD-4C99-A81B-94D0EE5CFFEB}" dt="2026-03-05T22:26:00.956" v="1"/>
+          <ac:cxnSpMkLst>
+            <pc:docMk/>
+            <pc:sldMk cId="1501170907" sldId="256"/>
+            <ac:cxnSpMk id="17" creationId="{D24E488E-A173-AFA0-3F6A-78FF8CC6952B}"/>
+          </ac:cxnSpMkLst>
+        </pc:cxnChg>
+        <pc:cxnChg chg="add mod">
+          <ac:chgData name="York, George W CIV USAF USAFA DF/DFEC" userId="1fb5875a-4594-4db2-80fb-f0db3de11280" providerId="ADAL" clId="{09330963-85FD-4C99-A81B-94D0EE5CFFEB}" dt="2026-03-05T22:26:00.956" v="1"/>
+          <ac:cxnSpMkLst>
+            <pc:docMk/>
+            <pc:sldMk cId="1501170907" sldId="256"/>
+            <ac:cxnSpMk id="26" creationId="{EFC7A41C-61ED-49E4-BA0B-27EC82F62902}"/>
+          </ac:cxnSpMkLst>
+        </pc:cxnChg>
+        <pc:cxnChg chg="add mod">
+          <ac:chgData name="York, George W CIV USAF USAFA DF/DFEC" userId="1fb5875a-4594-4db2-80fb-f0db3de11280" providerId="ADAL" clId="{09330963-85FD-4C99-A81B-94D0EE5CFFEB}" dt="2026-03-05T22:26:00.956" v="1"/>
+          <ac:cxnSpMkLst>
+            <pc:docMk/>
+            <pc:sldMk cId="1501170907" sldId="256"/>
+            <ac:cxnSpMk id="28" creationId="{EE79F449-2B1D-87A9-9E7B-9DD8C11C7B9B}"/>
+          </ac:cxnSpMkLst>
+        </pc:cxnChg>
+        <pc:cxnChg chg="mod">
+          <ac:chgData name="York, George W CIV USAF USAFA DF/DFEC" userId="1fb5875a-4594-4db2-80fb-f0db3de11280" providerId="ADAL" clId="{09330963-85FD-4C99-A81B-94D0EE5CFFEB}" dt="2026-03-05T22:26:17.388" v="3"/>
+          <ac:cxnSpMkLst>
+            <pc:docMk/>
+            <pc:sldMk cId="1501170907" sldId="256"/>
+            <ac:cxnSpMk id="34" creationId="{72BE6CC3-2C59-A24A-5E92-68A707F8638E}"/>
+          </ac:cxnSpMkLst>
+        </pc:cxnChg>
+        <pc:cxnChg chg="mod">
+          <ac:chgData name="York, George W CIV USAF USAFA DF/DFEC" userId="1fb5875a-4594-4db2-80fb-f0db3de11280" providerId="ADAL" clId="{09330963-85FD-4C99-A81B-94D0EE5CFFEB}" dt="2026-03-05T22:26:17.388" v="3"/>
+          <ac:cxnSpMkLst>
+            <pc:docMk/>
+            <pc:sldMk cId="1501170907" sldId="256"/>
+            <ac:cxnSpMk id="35" creationId="{8AB80F94-094C-4CE9-C275-29945A350AA8}"/>
+          </ac:cxnSpMkLst>
+        </pc:cxnChg>
+        <pc:cxnChg chg="add mod">
+          <ac:chgData name="York, George W CIV USAF USAFA DF/DFEC" userId="1fb5875a-4594-4db2-80fb-f0db3de11280" providerId="ADAL" clId="{09330963-85FD-4C99-A81B-94D0EE5CFFEB}" dt="2026-03-05T22:26:35.967" v="5"/>
+          <ac:cxnSpMkLst>
+            <pc:docMk/>
+            <pc:sldMk cId="1501170907" sldId="256"/>
+            <ac:cxnSpMk id="37" creationId="{A09C37C1-E5D0-9FBA-A932-2F98BACEC0B2}"/>
+          </ac:cxnSpMkLst>
+        </pc:cxnChg>
+        <pc:cxnChg chg="add mod">
+          <ac:chgData name="York, George W CIV USAF USAFA DF/DFEC" userId="1fb5875a-4594-4db2-80fb-f0db3de11280" providerId="ADAL" clId="{09330963-85FD-4C99-A81B-94D0EE5CFFEB}" dt="2026-03-05T22:26:35.967" v="5"/>
+          <ac:cxnSpMkLst>
+            <pc:docMk/>
+            <pc:sldMk cId="1501170907" sldId="256"/>
+            <ac:cxnSpMk id="38" creationId="{4D9B3B66-045C-4BC7-2F4D-857D0D686CD3}"/>
+          </ac:cxnSpMkLst>
+        </pc:cxnChg>
+        <pc:cxnChg chg="add mod">
+          <ac:chgData name="York, George W CIV USAF USAFA DF/DFEC" userId="1fb5875a-4594-4db2-80fb-f0db3de11280" providerId="ADAL" clId="{09330963-85FD-4C99-A81B-94D0EE5CFFEB}" dt="2026-03-05T22:27:08.932" v="8"/>
+          <ac:cxnSpMkLst>
+            <pc:docMk/>
+            <pc:sldMk cId="1501170907" sldId="256"/>
+            <ac:cxnSpMk id="39" creationId="{119991E4-90E6-F0D1-11C3-602FF77B7F79}"/>
+          </ac:cxnSpMkLst>
+        </pc:cxnChg>
+        <pc:cxnChg chg="add mod">
+          <ac:chgData name="York, George W CIV USAF USAFA DF/DFEC" userId="1fb5875a-4594-4db2-80fb-f0db3de11280" providerId="ADAL" clId="{09330963-85FD-4C99-A81B-94D0EE5CFFEB}" dt="2026-03-05T22:27:08.932" v="8"/>
+          <ac:cxnSpMkLst>
+            <pc:docMk/>
+            <pc:sldMk cId="1501170907" sldId="256"/>
+            <ac:cxnSpMk id="47" creationId="{8A262BB7-393A-3D10-4768-BA19460EE16D}"/>
+          </ac:cxnSpMkLst>
+        </pc:cxnChg>
+        <pc:cxnChg chg="add mod">
+          <ac:chgData name="York, George W CIV USAF USAFA DF/DFEC" userId="1fb5875a-4594-4db2-80fb-f0db3de11280" providerId="ADAL" clId="{09330963-85FD-4C99-A81B-94D0EE5CFFEB}" dt="2026-03-05T22:27:08.932" v="8"/>
+          <ac:cxnSpMkLst>
+            <pc:docMk/>
+            <pc:sldMk cId="1501170907" sldId="256"/>
+            <ac:cxnSpMk id="52" creationId="{2AC5E79F-36BB-C55A-DF2D-C7C8E0255836}"/>
+          </ac:cxnSpMkLst>
+        </pc:cxnChg>
+        <pc:cxnChg chg="add mod">
+          <ac:chgData name="York, George W CIV USAF USAFA DF/DFEC" userId="1fb5875a-4594-4db2-80fb-f0db3de11280" providerId="ADAL" clId="{09330963-85FD-4C99-A81B-94D0EE5CFFEB}" dt="2026-03-05T22:27:36.393" v="10"/>
+          <ac:cxnSpMkLst>
+            <pc:docMk/>
+            <pc:sldMk cId="1501170907" sldId="256"/>
+            <ac:cxnSpMk id="58" creationId="{37D73938-CD18-95EE-AF99-64BFF08C2E0D}"/>
+          </ac:cxnSpMkLst>
+        </pc:cxnChg>
+        <pc:cxnChg chg="mod">
+          <ac:chgData name="York, George W CIV USAF USAFA DF/DFEC" userId="1fb5875a-4594-4db2-80fb-f0db3de11280" providerId="ADAL" clId="{09330963-85FD-4C99-A81B-94D0EE5CFFEB}" dt="2026-03-05T22:27:36.393" v="10"/>
+          <ac:cxnSpMkLst>
+            <pc:docMk/>
+            <pc:sldMk cId="1501170907" sldId="256"/>
+            <ac:cxnSpMk id="76" creationId="{10A822E0-4EAA-5FC7-F211-354CF1DD8C97}"/>
+          </ac:cxnSpMkLst>
+        </pc:cxnChg>
+        <pc:cxnChg chg="mod">
+          <ac:chgData name="York, George W CIV USAF USAFA DF/DFEC" userId="1fb5875a-4594-4db2-80fb-f0db3de11280" providerId="ADAL" clId="{09330963-85FD-4C99-A81B-94D0EE5CFFEB}" dt="2026-03-05T22:27:36.393" v="10"/>
+          <ac:cxnSpMkLst>
+            <pc:docMk/>
+            <pc:sldMk cId="1501170907" sldId="256"/>
+            <ac:cxnSpMk id="77" creationId="{05428BE6-A028-2505-F585-6481D0268AE8}"/>
+          </ac:cxnSpMkLst>
+        </pc:cxnChg>
+        <pc:cxnChg chg="add mod">
+          <ac:chgData name="York, George W CIV USAF USAFA DF/DFEC" userId="1fb5875a-4594-4db2-80fb-f0db3de11280" providerId="ADAL" clId="{09330963-85FD-4C99-A81B-94D0EE5CFFEB}" dt="2026-03-05T22:27:36.393" v="10"/>
+          <ac:cxnSpMkLst>
+            <pc:docMk/>
+            <pc:sldMk cId="1501170907" sldId="256"/>
+            <ac:cxnSpMk id="92" creationId="{A258B8B8-0DCC-7046-F080-D64CBE4BD6A0}"/>
+          </ac:cxnSpMkLst>
+        </pc:cxnChg>
+        <pc:cxnChg chg="del">
+          <ac:chgData name="York, George W CIV USAF USAFA DF/DFEC" userId="1fb5875a-4594-4db2-80fb-f0db3de11280" providerId="ADAL" clId="{09330963-85FD-4C99-A81B-94D0EE5CFFEB}" dt="2026-03-05T22:26:34.461" v="4" actId="478"/>
+          <ac:cxnSpMkLst>
+            <pc:docMk/>
+            <pc:sldMk cId="1501170907" sldId="256"/>
+            <ac:cxnSpMk id="105" creationId="{96194351-1F6F-6ECD-551A-2B077972FE1F}"/>
+          </ac:cxnSpMkLst>
+        </pc:cxnChg>
+        <pc:cxnChg chg="del">
+          <ac:chgData name="York, George W CIV USAF USAFA DF/DFEC" userId="1fb5875a-4594-4db2-80fb-f0db3de11280" providerId="ADAL" clId="{09330963-85FD-4C99-A81B-94D0EE5CFFEB}" dt="2026-03-05T22:27:24.978" v="9" actId="478"/>
+          <ac:cxnSpMkLst>
+            <pc:docMk/>
+            <pc:sldMk cId="1501170907" sldId="256"/>
+            <ac:cxnSpMk id="152" creationId="{0B969FF2-6DAD-23DC-28B8-ACF737E02DB2}"/>
+          </ac:cxnSpMkLst>
+        </pc:cxnChg>
+        <pc:cxnChg chg="del">
+          <ac:chgData name="York, George W CIV USAF USAFA DF/DFEC" userId="1fb5875a-4594-4db2-80fb-f0db3de11280" providerId="ADAL" clId="{09330963-85FD-4C99-A81B-94D0EE5CFFEB}" dt="2026-03-05T22:26:15.926" v="2" actId="478"/>
+          <ac:cxnSpMkLst>
+            <pc:docMk/>
+            <pc:sldMk cId="1501170907" sldId="256"/>
+            <ac:cxnSpMk id="245" creationId="{44285445-3673-F463-34B1-B7F351676027}"/>
+          </ac:cxnSpMkLst>
+        </pc:cxnChg>
+        <pc:cxnChg chg="del">
+          <ac:chgData name="York, George W CIV USAF USAFA DF/DFEC" userId="1fb5875a-4594-4db2-80fb-f0db3de11280" providerId="ADAL" clId="{09330963-85FD-4C99-A81B-94D0EE5CFFEB}" dt="2026-03-05T22:27:07.655" v="7" actId="478"/>
+          <ac:cxnSpMkLst>
+            <pc:docMk/>
+            <pc:sldMk cId="1501170907" sldId="256"/>
+            <ac:cxnSpMk id="275" creationId="{FF5E826E-C5DA-266A-3DEA-9D97594449EE}"/>
+          </ac:cxnSpMkLst>
+        </pc:cxnChg>
+        <pc:cxnChg chg="del">
+          <ac:chgData name="York, George W CIV USAF USAFA DF/DFEC" userId="1fb5875a-4594-4db2-80fb-f0db3de11280" providerId="ADAL" clId="{09330963-85FD-4C99-A81B-94D0EE5CFFEB}" dt="2026-03-05T22:25:59.379" v="0" actId="478"/>
+          <ac:cxnSpMkLst>
+            <pc:docMk/>
+            <pc:sldMk cId="1501170907" sldId="256"/>
+            <ac:cxnSpMk id="315" creationId="{CC2E6CF6-7F9B-DF2E-8401-A11C6FFE7D1D}"/>
+          </ac:cxnSpMkLst>
+        </pc:cxnChg>
+      </pc:sldChg>
+    </pc:docChg>
+  </pc:docChgLst>
+</pc:chgInfo>
+</file>
+
 <file path=ppt/slideLayouts/slideLayout1.xml><?xml version="1.0" encoding="utf-8"?>
 <p:sldLayout xmlns:a="http://schemas.openxmlformats.org/drawingml/2006/main" xmlns:r="http://schemas.openxmlformats.org/officeDocument/2006/relationships" xmlns:p="http://schemas.openxmlformats.org/presentationml/2006/main" type="title" preserve="1">
   <p:cSld name="Title Slide">
@@ -259,7 +592,7 @@
           <a:p>
             <a:fld id="{51AFF834-1BEC-4F95-9622-28B5DCC1FE16}" type="datetimeFigureOut">
               <a:rPr lang="en-US" smtClean="0"/>
-              <a:t>7/1/2025</a:t>
+              <a:t>3/5/2026</a:t>
             </a:fld>
             <a:endParaRPr lang="en-US"/>
           </a:p>
@@ -457,7 +790,7 @@
           <a:p>
             <a:fld id="{51AFF834-1BEC-4F95-9622-28B5DCC1FE16}" type="datetimeFigureOut">
               <a:rPr lang="en-US" smtClean="0"/>
-              <a:t>7/1/2025</a:t>
+              <a:t>3/5/2026</a:t>
             </a:fld>
             <a:endParaRPr lang="en-US"/>
           </a:p>
@@ -665,7 +998,7 @@
           <a:p>
             <a:fld id="{51AFF834-1BEC-4F95-9622-28B5DCC1FE16}" type="datetimeFigureOut">
               <a:rPr lang="en-US" smtClean="0"/>
-              <a:t>7/1/2025</a:t>
+              <a:t>3/5/2026</a:t>
             </a:fld>
             <a:endParaRPr lang="en-US"/>
           </a:p>
@@ -863,7 +1196,7 @@
           <a:p>
             <a:fld id="{51AFF834-1BEC-4F95-9622-28B5DCC1FE16}" type="datetimeFigureOut">
               <a:rPr lang="en-US" smtClean="0"/>
-              <a:t>7/1/2025</a:t>
+              <a:t>3/5/2026</a:t>
             </a:fld>
             <a:endParaRPr lang="en-US"/>
           </a:p>
@@ -1138,7 +1471,7 @@
           <a:p>
             <a:fld id="{51AFF834-1BEC-4F95-9622-28B5DCC1FE16}" type="datetimeFigureOut">
               <a:rPr lang="en-US" smtClean="0"/>
-              <a:t>7/1/2025</a:t>
+              <a:t>3/5/2026</a:t>
             </a:fld>
             <a:endParaRPr lang="en-US"/>
           </a:p>
@@ -1403,7 +1736,7 @@
           <a:p>
             <a:fld id="{51AFF834-1BEC-4F95-9622-28B5DCC1FE16}" type="datetimeFigureOut">
               <a:rPr lang="en-US" smtClean="0"/>
-              <a:t>7/1/2025</a:t>
+              <a:t>3/5/2026</a:t>
             </a:fld>
             <a:endParaRPr lang="en-US"/>
           </a:p>
@@ -1815,7 +2148,7 @@
           <a:p>
             <a:fld id="{51AFF834-1BEC-4F95-9622-28B5DCC1FE16}" type="datetimeFigureOut">
               <a:rPr lang="en-US" smtClean="0"/>
-              <a:t>7/1/2025</a:t>
+              <a:t>3/5/2026</a:t>
             </a:fld>
             <a:endParaRPr lang="en-US"/>
           </a:p>
@@ -1956,7 +2289,7 @@
           <a:p>
             <a:fld id="{51AFF834-1BEC-4F95-9622-28B5DCC1FE16}" type="datetimeFigureOut">
               <a:rPr lang="en-US" smtClean="0"/>
-              <a:t>7/1/2025</a:t>
+              <a:t>3/5/2026</a:t>
             </a:fld>
             <a:endParaRPr lang="en-US"/>
           </a:p>
@@ -2069,7 +2402,7 @@
           <a:p>
             <a:fld id="{51AFF834-1BEC-4F95-9622-28B5DCC1FE16}" type="datetimeFigureOut">
               <a:rPr lang="en-US" smtClean="0"/>
-              <a:t>7/1/2025</a:t>
+              <a:t>3/5/2026</a:t>
             </a:fld>
             <a:endParaRPr lang="en-US"/>
           </a:p>
@@ -2380,7 +2713,7 @@
           <a:p>
             <a:fld id="{51AFF834-1BEC-4F95-9622-28B5DCC1FE16}" type="datetimeFigureOut">
               <a:rPr lang="en-US" smtClean="0"/>
-              <a:t>7/1/2025</a:t>
+              <a:t>3/5/2026</a:t>
             </a:fld>
             <a:endParaRPr lang="en-US"/>
           </a:p>
@@ -2668,7 +3001,7 @@
           <a:p>
             <a:fld id="{51AFF834-1BEC-4F95-9622-28B5DCC1FE16}" type="datetimeFigureOut">
               <a:rPr lang="en-US" smtClean="0"/>
-              <a:t>7/1/2025</a:t>
+              <a:t>3/5/2026</a:t>
             </a:fld>
             <a:endParaRPr lang="en-US"/>
           </a:p>
@@ -2909,7 +3242,7 @@
           <a:p>
             <a:fld id="{51AFF834-1BEC-4F95-9622-28B5DCC1FE16}" type="datetimeFigureOut">
               <a:rPr lang="en-US" smtClean="0"/>
-              <a:t>7/1/2025</a:t>
+              <a:t>3/5/2026</a:t>
             </a:fld>
             <a:endParaRPr lang="en-US"/>
           </a:p>
@@ -3326,6 +3659,36 @@
           <a:chExt cx="0" cy="0"/>
         </a:xfrm>
       </p:grpSpPr>
+      <p:pic>
+        <p:nvPicPr>
+          <p:cNvPr id="36" name="Picture 35">
+            <a:extLst>
+              <a:ext uri="{FF2B5EF4-FFF2-40B4-BE49-F238E27FC236}">
+                <a16:creationId xmlns:a16="http://schemas.microsoft.com/office/drawing/2014/main" id="{7D1B8B85-7F90-6201-21E9-F6ABDFFBBFF8}"/>
+              </a:ext>
+            </a:extLst>
+          </p:cNvPr>
+          <p:cNvPicPr>
+            <a:picLocks noChangeAspect="1"/>
+          </p:cNvPicPr>
+          <p:nvPr/>
+        </p:nvPicPr>
+        <p:blipFill>
+          <a:blip r:embed="rId2"/>
+          <a:stretch>
+            <a:fillRect/>
+          </a:stretch>
+        </p:blipFill>
+        <p:spPr>
+          <a:xfrm>
+            <a:off x="2899612" y="3237305"/>
+            <a:ext cx="503999" cy="267608"/>
+          </a:xfrm>
+          <a:prstGeom prst="rect">
+            <a:avLst/>
+          </a:prstGeom>
+        </p:spPr>
+      </p:pic>
       <p:sp>
         <p:nvSpPr>
           <p:cNvPr id="4" name="TextBox 3">
@@ -5788,48 +6151,6 @@
           </a:fontRef>
         </p:style>
       </p:cxnSp>
-      <p:cxnSp>
-        <p:nvCxnSpPr>
-          <p:cNvPr id="105" name="Straight Arrow Connector 104">
-            <a:extLst>
-              <a:ext uri="{FF2B5EF4-FFF2-40B4-BE49-F238E27FC236}">
-                <a16:creationId xmlns:a16="http://schemas.microsoft.com/office/drawing/2014/main" id="{96194351-1F6F-6ECD-551A-2B077972FE1F}"/>
-              </a:ext>
-            </a:extLst>
-          </p:cNvPr>
-          <p:cNvCxnSpPr/>
-          <p:nvPr/>
-        </p:nvCxnSpPr>
-        <p:spPr>
-          <a:xfrm>
-            <a:off x="3216369" y="3387564"/>
-            <a:ext cx="177808" cy="0"/>
-          </a:xfrm>
-          <a:prstGeom prst="straightConnector1">
-            <a:avLst/>
-          </a:prstGeom>
-          <a:ln>
-            <a:solidFill>
-              <a:srgbClr val="FF0000"/>
-            </a:solidFill>
-            <a:tailEnd type="triangle"/>
-          </a:ln>
-        </p:spPr>
-        <p:style>
-          <a:lnRef idx="2">
-            <a:schemeClr val="accent1"/>
-          </a:lnRef>
-          <a:fillRef idx="0">
-            <a:schemeClr val="accent1"/>
-          </a:fillRef>
-          <a:effectRef idx="1">
-            <a:schemeClr val="accent1"/>
-          </a:effectRef>
-          <a:fontRef idx="minor">
-            <a:schemeClr val="tx1"/>
-          </a:fontRef>
-        </p:style>
-      </p:cxnSp>
       <p:sp>
         <p:nvSpPr>
           <p:cNvPr id="111" name="Rectangle 110">
@@ -6367,213 +6688,12 @@
           </a:fontRef>
         </p:style>
       </p:cxnSp>
-      <p:sp>
-        <p:nvSpPr>
-          <p:cNvPr id="145" name="Rectangle 144">
-            <a:extLst>
-              <a:ext uri="{FF2B5EF4-FFF2-40B4-BE49-F238E27FC236}">
-                <a16:creationId xmlns:a16="http://schemas.microsoft.com/office/drawing/2014/main" id="{D48BF948-61BF-AC37-8597-388094170D18}"/>
-              </a:ext>
-            </a:extLst>
-          </p:cNvPr>
-          <p:cNvSpPr/>
-          <p:nvPr/>
-        </p:nvSpPr>
-        <p:spPr>
-          <a:xfrm>
-            <a:off x="8073953" y="3976514"/>
-            <a:ext cx="865785" cy="1056594"/>
-          </a:xfrm>
-          <a:prstGeom prst="rect">
-            <a:avLst/>
-          </a:prstGeom>
-          <a:solidFill>
-            <a:schemeClr val="bg1"/>
-          </a:solidFill>
-        </p:spPr>
-        <p:style>
-          <a:lnRef idx="2">
-            <a:schemeClr val="accent1">
-              <a:shade val="15000"/>
-            </a:schemeClr>
-          </a:lnRef>
-          <a:fillRef idx="1">
-            <a:schemeClr val="accent1"/>
-          </a:fillRef>
-          <a:effectRef idx="0">
-            <a:schemeClr val="accent1"/>
-          </a:effectRef>
-          <a:fontRef idx="minor">
-            <a:schemeClr val="lt1"/>
-          </a:fontRef>
-        </p:style>
-        <p:txBody>
-          <a:bodyPr rtlCol="0" anchor="ctr"/>
-          <a:lstStyle/>
-          <a:p>
-            <a:pPr algn="ctr"/>
-            <a:r>
-              <a:rPr lang="en-US" dirty="0"/>
-              <a:t>PC</a:t>
-            </a:r>
-          </a:p>
-        </p:txBody>
-      </p:sp>
-      <p:sp>
-        <p:nvSpPr>
-          <p:cNvPr id="146" name="TextBox 145">
-            <a:extLst>
-              <a:ext uri="{FF2B5EF4-FFF2-40B4-BE49-F238E27FC236}">
-                <a16:creationId xmlns:a16="http://schemas.microsoft.com/office/drawing/2014/main" id="{69719632-7E59-F7B2-AEF4-E4C30AA0AEF2}"/>
-              </a:ext>
-            </a:extLst>
-          </p:cNvPr>
-          <p:cNvSpPr txBox="1"/>
-          <p:nvPr/>
-        </p:nvSpPr>
-        <p:spPr>
-          <a:xfrm>
-            <a:off x="8252423" y="3945511"/>
-            <a:ext cx="527709" cy="400110"/>
-          </a:xfrm>
-          <a:prstGeom prst="rect">
-            <a:avLst/>
-          </a:prstGeom>
-          <a:noFill/>
-        </p:spPr>
-        <p:txBody>
-          <a:bodyPr wrap="none" rtlCol="0">
-            <a:spAutoFit/>
-          </a:bodyPr>
-          <a:lstStyle/>
-          <a:p>
-            <a:pPr algn="ctr"/>
-            <a:r>
-              <a:rPr lang="en-US" sz="1000" dirty="0"/>
-              <a:t>Offset</a:t>
-            </a:r>
-          </a:p>
-          <a:p>
-            <a:pPr algn="ctr"/>
-            <a:endParaRPr lang="en-US" sz="1000" dirty="0"/>
-          </a:p>
-        </p:txBody>
-      </p:sp>
-      <p:sp>
-        <p:nvSpPr>
-          <p:cNvPr id="148" name="TextBox 147">
-            <a:extLst>
-              <a:ext uri="{FF2B5EF4-FFF2-40B4-BE49-F238E27FC236}">
-                <a16:creationId xmlns:a16="http://schemas.microsoft.com/office/drawing/2014/main" id="{6432B689-7D1C-F807-6B45-D8272427DA3A}"/>
-              </a:ext>
-            </a:extLst>
-          </p:cNvPr>
-          <p:cNvSpPr txBox="1"/>
-          <p:nvPr/>
-        </p:nvSpPr>
-        <p:spPr>
-          <a:xfrm>
-            <a:off x="8023507" y="4194029"/>
-            <a:ext cx="413896" cy="230832"/>
-          </a:xfrm>
-          <a:prstGeom prst="rect">
-            <a:avLst/>
-          </a:prstGeom>
-          <a:noFill/>
-        </p:spPr>
-        <p:txBody>
-          <a:bodyPr wrap="none" rtlCol="0">
-            <a:spAutoFit/>
-          </a:bodyPr>
-          <a:lstStyle/>
-          <a:p>
-            <a:pPr algn="ctr"/>
-            <a:r>
-              <a:rPr lang="en-US" sz="900" dirty="0"/>
-              <a:t>NPC</a:t>
-            </a:r>
-          </a:p>
-        </p:txBody>
-      </p:sp>
-      <p:sp>
-        <p:nvSpPr>
-          <p:cNvPr id="149" name="TextBox 148">
-            <a:extLst>
-              <a:ext uri="{FF2B5EF4-FFF2-40B4-BE49-F238E27FC236}">
-                <a16:creationId xmlns:a16="http://schemas.microsoft.com/office/drawing/2014/main" id="{831B5896-D57B-4667-02CD-6AAF11DEE5E2}"/>
-              </a:ext>
-            </a:extLst>
-          </p:cNvPr>
-          <p:cNvSpPr txBox="1"/>
-          <p:nvPr/>
-        </p:nvSpPr>
-        <p:spPr>
-          <a:xfrm>
-            <a:off x="8037782" y="4384148"/>
-            <a:ext cx="407484" cy="230832"/>
-          </a:xfrm>
-          <a:prstGeom prst="rect">
-            <a:avLst/>
-          </a:prstGeom>
-          <a:noFill/>
-        </p:spPr>
-        <p:txBody>
-          <a:bodyPr wrap="none" rtlCol="0">
-            <a:spAutoFit/>
-          </a:bodyPr>
-          <a:lstStyle/>
-          <a:p>
-            <a:pPr algn="ctr"/>
-            <a:r>
-              <a:rPr lang="en-US" sz="900" dirty="0" err="1"/>
-              <a:t>imm</a:t>
-            </a:r>
-            <a:endParaRPr lang="en-US" sz="900" dirty="0"/>
-          </a:p>
-        </p:txBody>
-      </p:sp>
-      <p:sp>
-        <p:nvSpPr>
-          <p:cNvPr id="151" name="TextBox 150">
-            <a:extLst>
-              <a:ext uri="{FF2B5EF4-FFF2-40B4-BE49-F238E27FC236}">
-                <a16:creationId xmlns:a16="http://schemas.microsoft.com/office/drawing/2014/main" id="{BC6DDD09-EA41-1470-2429-DBE27164913F}"/>
-              </a:ext>
-            </a:extLst>
-          </p:cNvPr>
-          <p:cNvSpPr txBox="1"/>
-          <p:nvPr/>
-        </p:nvSpPr>
-        <p:spPr>
-          <a:xfrm>
-            <a:off x="8224994" y="4611234"/>
-            <a:ext cx="713658" cy="230832"/>
-          </a:xfrm>
-          <a:prstGeom prst="rect">
-            <a:avLst/>
-          </a:prstGeom>
-          <a:noFill/>
-        </p:spPr>
-        <p:txBody>
-          <a:bodyPr wrap="none" rtlCol="0">
-            <a:spAutoFit/>
-          </a:bodyPr>
-          <a:lstStyle/>
-          <a:p>
-            <a:pPr algn="ctr"/>
-            <a:r>
-              <a:rPr lang="en-US" sz="900" dirty="0"/>
-              <a:t>Branch PC</a:t>
-            </a:r>
-          </a:p>
-        </p:txBody>
-      </p:sp>
       <p:cxnSp>
         <p:nvCxnSpPr>
-          <p:cNvPr id="152" name="Straight Arrow Connector 151">
-            <a:extLst>
-              <a:ext uri="{FF2B5EF4-FFF2-40B4-BE49-F238E27FC236}">
-                <a16:creationId xmlns:a16="http://schemas.microsoft.com/office/drawing/2014/main" id="{0B969FF2-6DAD-23DC-28B8-ACF737E02DB2}"/>
+          <p:cNvPr id="158" name="Straight Connector 157">
+            <a:extLst>
+              <a:ext uri="{FF2B5EF4-FFF2-40B4-BE49-F238E27FC236}">
+                <a16:creationId xmlns:a16="http://schemas.microsoft.com/office/drawing/2014/main" id="{1691EF3B-B49C-E8C7-89F0-04E2CEA7B43B}"/>
               </a:ext>
             </a:extLst>
           </p:cNvPr>
@@ -6584,15 +6704,12 @@
         </p:nvCxnSpPr>
         <p:spPr>
           <a:xfrm>
-            <a:off x="8937730" y="4726650"/>
-            <a:ext cx="374301" cy="0"/>
-          </a:xfrm>
-          <a:prstGeom prst="straightConnector1">
-            <a:avLst/>
-          </a:prstGeom>
-          <a:ln>
-            <a:tailEnd type="triangle"/>
-          </a:ln>
+            <a:off x="2639349" y="3251607"/>
+            <a:ext cx="0" cy="1014753"/>
+          </a:xfrm>
+          <a:prstGeom prst="line">
+            <a:avLst/>
+          </a:prstGeom>
         </p:spPr>
         <p:style>
           <a:lnRef idx="2">
@@ -6609,272 +6726,6 @@
           </a:fontRef>
         </p:style>
       </p:cxnSp>
-      <p:cxnSp>
-        <p:nvCxnSpPr>
-          <p:cNvPr id="153" name="Straight Arrow Connector 152">
-            <a:extLst>
-              <a:ext uri="{FF2B5EF4-FFF2-40B4-BE49-F238E27FC236}">
-                <a16:creationId xmlns:a16="http://schemas.microsoft.com/office/drawing/2014/main" id="{F030B5C6-68FA-2DA5-919A-5B353DA9C1A8}"/>
-              </a:ext>
-            </a:extLst>
-          </p:cNvPr>
-          <p:cNvCxnSpPr/>
-          <p:nvPr/>
-        </p:nvCxnSpPr>
-        <p:spPr>
-          <a:xfrm>
-            <a:off x="7896145" y="4306947"/>
-            <a:ext cx="177808" cy="0"/>
-          </a:xfrm>
-          <a:prstGeom prst="straightConnector1">
-            <a:avLst/>
-          </a:prstGeom>
-          <a:ln>
-            <a:tailEnd type="triangle"/>
-          </a:ln>
-        </p:spPr>
-        <p:style>
-          <a:lnRef idx="2">
-            <a:schemeClr val="accent1"/>
-          </a:lnRef>
-          <a:fillRef idx="0">
-            <a:schemeClr val="accent1"/>
-          </a:fillRef>
-          <a:effectRef idx="1">
-            <a:schemeClr val="accent1"/>
-          </a:effectRef>
-          <a:fontRef idx="minor">
-            <a:schemeClr val="tx1"/>
-          </a:fontRef>
-        </p:style>
-      </p:cxnSp>
-      <p:cxnSp>
-        <p:nvCxnSpPr>
-          <p:cNvPr id="154" name="Straight Arrow Connector 153">
-            <a:extLst>
-              <a:ext uri="{FF2B5EF4-FFF2-40B4-BE49-F238E27FC236}">
-                <a16:creationId xmlns:a16="http://schemas.microsoft.com/office/drawing/2014/main" id="{9779A5A3-D9AC-4884-E09E-088355A5273D}"/>
-              </a:ext>
-            </a:extLst>
-          </p:cNvPr>
-          <p:cNvCxnSpPr/>
-          <p:nvPr/>
-        </p:nvCxnSpPr>
-        <p:spPr>
-          <a:xfrm>
-            <a:off x="7896145" y="4507267"/>
-            <a:ext cx="177808" cy="0"/>
-          </a:xfrm>
-          <a:prstGeom prst="straightConnector1">
-            <a:avLst/>
-          </a:prstGeom>
-          <a:ln>
-            <a:tailEnd type="triangle"/>
-          </a:ln>
-        </p:spPr>
-        <p:style>
-          <a:lnRef idx="2">
-            <a:schemeClr val="accent1"/>
-          </a:lnRef>
-          <a:fillRef idx="0">
-            <a:schemeClr val="accent1"/>
-          </a:fillRef>
-          <a:effectRef idx="1">
-            <a:schemeClr val="accent1"/>
-          </a:effectRef>
-          <a:fontRef idx="minor">
-            <a:schemeClr val="tx1"/>
-          </a:fontRef>
-        </p:style>
-      </p:cxnSp>
-      <p:sp>
-        <p:nvSpPr>
-          <p:cNvPr id="155" name="TextBox 154">
-            <a:extLst>
-              <a:ext uri="{FF2B5EF4-FFF2-40B4-BE49-F238E27FC236}">
-                <a16:creationId xmlns:a16="http://schemas.microsoft.com/office/drawing/2014/main" id="{75FA3F6B-D94A-A494-28FD-7D4F921979A2}"/>
-              </a:ext>
-            </a:extLst>
-          </p:cNvPr>
-          <p:cNvSpPr txBox="1"/>
-          <p:nvPr/>
-        </p:nvSpPr>
-        <p:spPr>
-          <a:xfrm>
-            <a:off x="8311407" y="4765177"/>
-            <a:ext cx="620684" cy="230832"/>
-          </a:xfrm>
-          <a:prstGeom prst="rect">
-            <a:avLst/>
-          </a:prstGeom>
-          <a:noFill/>
-        </p:spPr>
-        <p:txBody>
-          <a:bodyPr wrap="none" rtlCol="0">
-            <a:spAutoFit/>
-          </a:bodyPr>
-          <a:lstStyle/>
-          <a:p>
-            <a:pPr algn="ctr"/>
-            <a:r>
-              <a:rPr lang="en-US" sz="900" dirty="0"/>
-              <a:t>Jump PC</a:t>
-            </a:r>
-          </a:p>
-        </p:txBody>
-      </p:sp>
-      <p:cxnSp>
-        <p:nvCxnSpPr>
-          <p:cNvPr id="156" name="Straight Arrow Connector 155">
-            <a:extLst>
-              <a:ext uri="{FF2B5EF4-FFF2-40B4-BE49-F238E27FC236}">
-                <a16:creationId xmlns:a16="http://schemas.microsoft.com/office/drawing/2014/main" id="{4E8E377D-848A-C4CD-E531-28E5114DF352}"/>
-              </a:ext>
-            </a:extLst>
-          </p:cNvPr>
-          <p:cNvCxnSpPr>
-            <a:cxnSpLocks/>
-          </p:cNvCxnSpPr>
-          <p:nvPr/>
-        </p:nvCxnSpPr>
-        <p:spPr>
-          <a:xfrm>
-            <a:off x="8937730" y="4895500"/>
-            <a:ext cx="379410" cy="0"/>
-          </a:xfrm>
-          <a:prstGeom prst="straightConnector1">
-            <a:avLst/>
-          </a:prstGeom>
-          <a:ln>
-            <a:tailEnd type="triangle"/>
-          </a:ln>
-        </p:spPr>
-        <p:style>
-          <a:lnRef idx="2">
-            <a:schemeClr val="accent1"/>
-          </a:lnRef>
-          <a:fillRef idx="0">
-            <a:schemeClr val="accent1"/>
-          </a:fillRef>
-          <a:effectRef idx="1">
-            <a:schemeClr val="accent1"/>
-          </a:effectRef>
-          <a:fontRef idx="minor">
-            <a:schemeClr val="tx1"/>
-          </a:fontRef>
-        </p:style>
-      </p:cxnSp>
-      <p:cxnSp>
-        <p:nvCxnSpPr>
-          <p:cNvPr id="158" name="Straight Connector 157">
-            <a:extLst>
-              <a:ext uri="{FF2B5EF4-FFF2-40B4-BE49-F238E27FC236}">
-                <a16:creationId xmlns:a16="http://schemas.microsoft.com/office/drawing/2014/main" id="{1691EF3B-B49C-E8C7-89F0-04E2CEA7B43B}"/>
-              </a:ext>
-            </a:extLst>
-          </p:cNvPr>
-          <p:cNvCxnSpPr>
-            <a:cxnSpLocks/>
-          </p:cNvCxnSpPr>
-          <p:nvPr/>
-        </p:nvCxnSpPr>
-        <p:spPr>
-          <a:xfrm>
-            <a:off x="2639349" y="3251607"/>
-            <a:ext cx="0" cy="1014753"/>
-          </a:xfrm>
-          <a:prstGeom prst="line">
-            <a:avLst/>
-          </a:prstGeom>
-        </p:spPr>
-        <p:style>
-          <a:lnRef idx="2">
-            <a:schemeClr val="accent1"/>
-          </a:lnRef>
-          <a:fillRef idx="0">
-            <a:schemeClr val="accent1"/>
-          </a:fillRef>
-          <a:effectRef idx="1">
-            <a:schemeClr val="accent1"/>
-          </a:effectRef>
-          <a:fontRef idx="minor">
-            <a:schemeClr val="tx1"/>
-          </a:fontRef>
-        </p:style>
-      </p:cxnSp>
-      <p:sp>
-        <p:nvSpPr>
-          <p:cNvPr id="160" name="TextBox 159">
-            <a:extLst>
-              <a:ext uri="{FF2B5EF4-FFF2-40B4-BE49-F238E27FC236}">
-                <a16:creationId xmlns:a16="http://schemas.microsoft.com/office/drawing/2014/main" id="{3BF5B236-4D8B-849D-0CDF-2CB1B5EE7284}"/>
-              </a:ext>
-            </a:extLst>
-          </p:cNvPr>
-          <p:cNvSpPr txBox="1"/>
-          <p:nvPr/>
-        </p:nvSpPr>
-        <p:spPr>
-          <a:xfrm>
-            <a:off x="7559719" y="4194029"/>
-            <a:ext cx="413896" cy="230832"/>
-          </a:xfrm>
-          <a:prstGeom prst="rect">
-            <a:avLst/>
-          </a:prstGeom>
-          <a:noFill/>
-        </p:spPr>
-        <p:txBody>
-          <a:bodyPr wrap="none" rtlCol="0">
-            <a:spAutoFit/>
-          </a:bodyPr>
-          <a:lstStyle/>
-          <a:p>
-            <a:pPr algn="ctr"/>
-            <a:r>
-              <a:rPr lang="en-US" sz="900" dirty="0"/>
-              <a:t>NPC</a:t>
-            </a:r>
-          </a:p>
-        </p:txBody>
-      </p:sp>
-      <p:sp>
-        <p:nvSpPr>
-          <p:cNvPr id="161" name="TextBox 160">
-            <a:extLst>
-              <a:ext uri="{FF2B5EF4-FFF2-40B4-BE49-F238E27FC236}">
-                <a16:creationId xmlns:a16="http://schemas.microsoft.com/office/drawing/2014/main" id="{0E9784F2-B3AB-C0FA-FDFE-48C83AB9B12E}"/>
-              </a:ext>
-            </a:extLst>
-          </p:cNvPr>
-          <p:cNvSpPr txBox="1"/>
-          <p:nvPr/>
-        </p:nvSpPr>
-        <p:spPr>
-          <a:xfrm>
-            <a:off x="7553125" y="4380402"/>
-            <a:ext cx="407484" cy="230832"/>
-          </a:xfrm>
-          <a:prstGeom prst="rect">
-            <a:avLst/>
-          </a:prstGeom>
-          <a:noFill/>
-        </p:spPr>
-        <p:txBody>
-          <a:bodyPr wrap="none" rtlCol="0">
-            <a:spAutoFit/>
-          </a:bodyPr>
-          <a:lstStyle/>
-          <a:p>
-            <a:pPr algn="ctr"/>
-            <a:r>
-              <a:rPr lang="en-US" sz="900" dirty="0" err="1"/>
-              <a:t>imm</a:t>
-            </a:r>
-            <a:endParaRPr lang="en-US" sz="900" dirty="0"/>
-          </a:p>
-        </p:txBody>
-      </p:sp>
       <p:grpSp>
         <p:nvGrpSpPr>
           <p:cNvPr id="162" name="Group 161">
@@ -8301,48 +8152,6 @@
           </a:fontRef>
         </p:style>
       </p:cxnSp>
-      <p:cxnSp>
-        <p:nvCxnSpPr>
-          <p:cNvPr id="245" name="Straight Arrow Connector 244">
-            <a:extLst>
-              <a:ext uri="{FF2B5EF4-FFF2-40B4-BE49-F238E27FC236}">
-                <a16:creationId xmlns:a16="http://schemas.microsoft.com/office/drawing/2014/main" id="{44285445-3673-F463-34B1-B7F351676027}"/>
-              </a:ext>
-            </a:extLst>
-          </p:cNvPr>
-          <p:cNvCxnSpPr/>
-          <p:nvPr/>
-        </p:nvCxnSpPr>
-        <p:spPr>
-          <a:xfrm flipV="1">
-            <a:off x="8716191" y="2434882"/>
-            <a:ext cx="0" cy="167673"/>
-          </a:xfrm>
-          <a:prstGeom prst="straightConnector1">
-            <a:avLst/>
-          </a:prstGeom>
-          <a:ln>
-            <a:solidFill>
-              <a:srgbClr val="FF0000"/>
-            </a:solidFill>
-            <a:tailEnd type="triangle"/>
-          </a:ln>
-        </p:spPr>
-        <p:style>
-          <a:lnRef idx="2">
-            <a:schemeClr val="accent1"/>
-          </a:lnRef>
-          <a:fillRef idx="0">
-            <a:schemeClr val="accent1"/>
-          </a:fillRef>
-          <a:effectRef idx="1">
-            <a:schemeClr val="accent1"/>
-          </a:effectRef>
-          <a:fontRef idx="minor">
-            <a:schemeClr val="tx1"/>
-          </a:fontRef>
-        </p:style>
-      </p:cxnSp>
       <p:grpSp>
         <p:nvGrpSpPr>
           <p:cNvPr id="247" name="Group 246">
@@ -8773,125 +8582,6 @@
       </p:sp>
       <p:cxnSp>
         <p:nvCxnSpPr>
-          <p:cNvPr id="269" name="Straight Arrow Connector 268">
-            <a:extLst>
-              <a:ext uri="{FF2B5EF4-FFF2-40B4-BE49-F238E27FC236}">
-                <a16:creationId xmlns:a16="http://schemas.microsoft.com/office/drawing/2014/main" id="{87860765-22E8-2DBF-0155-43937E1810EB}"/>
-              </a:ext>
-            </a:extLst>
-          </p:cNvPr>
-          <p:cNvCxnSpPr>
-            <a:cxnSpLocks/>
-          </p:cNvCxnSpPr>
-          <p:nvPr/>
-        </p:nvCxnSpPr>
-        <p:spPr>
-          <a:xfrm flipV="1">
-            <a:off x="9204837" y="4520967"/>
-            <a:ext cx="100338" cy="2498"/>
-          </a:xfrm>
-          <a:prstGeom prst="straightConnector1">
-            <a:avLst/>
-          </a:prstGeom>
-          <a:ln>
-            <a:tailEnd type="triangle"/>
-          </a:ln>
-        </p:spPr>
-        <p:style>
-          <a:lnRef idx="2">
-            <a:schemeClr val="accent1"/>
-          </a:lnRef>
-          <a:fillRef idx="0">
-            <a:schemeClr val="accent1"/>
-          </a:fillRef>
-          <a:effectRef idx="1">
-            <a:schemeClr val="accent1"/>
-          </a:effectRef>
-          <a:fontRef idx="minor">
-            <a:schemeClr val="tx1"/>
-          </a:fontRef>
-        </p:style>
-      </p:cxnSp>
-      <p:sp>
-        <p:nvSpPr>
-          <p:cNvPr id="270" name="TextBox 269">
-            <a:extLst>
-              <a:ext uri="{FF2B5EF4-FFF2-40B4-BE49-F238E27FC236}">
-                <a16:creationId xmlns:a16="http://schemas.microsoft.com/office/drawing/2014/main" id="{E335D321-53C8-872A-430E-7732E67F0A79}"/>
-              </a:ext>
-            </a:extLst>
-          </p:cNvPr>
-          <p:cNvSpPr txBox="1"/>
-          <p:nvPr/>
-        </p:nvSpPr>
-        <p:spPr>
-          <a:xfrm>
-            <a:off x="8882744" y="4402632"/>
-            <a:ext cx="413896" cy="230832"/>
-          </a:xfrm>
-          <a:prstGeom prst="rect">
-            <a:avLst/>
-          </a:prstGeom>
-          <a:noFill/>
-        </p:spPr>
-        <p:txBody>
-          <a:bodyPr wrap="none" rtlCol="0">
-            <a:spAutoFit/>
-          </a:bodyPr>
-          <a:lstStyle/>
-          <a:p>
-            <a:pPr algn="ctr"/>
-            <a:r>
-              <a:rPr lang="en-US" sz="900" dirty="0"/>
-              <a:t>NPC</a:t>
-            </a:r>
-          </a:p>
-        </p:txBody>
-      </p:sp>
-      <p:cxnSp>
-        <p:nvCxnSpPr>
-          <p:cNvPr id="275" name="Straight Arrow Connector 274">
-            <a:extLst>
-              <a:ext uri="{FF2B5EF4-FFF2-40B4-BE49-F238E27FC236}">
-                <a16:creationId xmlns:a16="http://schemas.microsoft.com/office/drawing/2014/main" id="{FF5E826E-C5DA-266A-3DEA-9D97594449EE}"/>
-              </a:ext>
-            </a:extLst>
-          </p:cNvPr>
-          <p:cNvCxnSpPr/>
-          <p:nvPr/>
-        </p:nvCxnSpPr>
-        <p:spPr>
-          <a:xfrm>
-            <a:off x="9506818" y="4099798"/>
-            <a:ext cx="0" cy="230832"/>
-          </a:xfrm>
-          <a:prstGeom prst="straightConnector1">
-            <a:avLst/>
-          </a:prstGeom>
-          <a:ln>
-            <a:solidFill>
-              <a:srgbClr val="FF0000"/>
-            </a:solidFill>
-            <a:tailEnd type="triangle"/>
-          </a:ln>
-        </p:spPr>
-        <p:style>
-          <a:lnRef idx="2">
-            <a:schemeClr val="accent1"/>
-          </a:lnRef>
-          <a:fillRef idx="0">
-            <a:schemeClr val="accent1"/>
-          </a:fillRef>
-          <a:effectRef idx="1">
-            <a:schemeClr val="accent1"/>
-          </a:effectRef>
-          <a:fontRef idx="minor">
-            <a:schemeClr val="tx1"/>
-          </a:fontRef>
-        </p:style>
-      </p:cxnSp>
-      <p:cxnSp>
-        <p:nvCxnSpPr>
           <p:cNvPr id="276" name="Straight Arrow Connector 275">
             <a:extLst>
               <a:ext uri="{FF2B5EF4-FFF2-40B4-BE49-F238E27FC236}">
@@ -9571,50 +9261,6 @@
       </p:sp>
       <p:cxnSp>
         <p:nvCxnSpPr>
-          <p:cNvPr id="315" name="Straight Arrow Connector 314">
-            <a:extLst>
-              <a:ext uri="{FF2B5EF4-FFF2-40B4-BE49-F238E27FC236}">
-                <a16:creationId xmlns:a16="http://schemas.microsoft.com/office/drawing/2014/main" id="{CC2E6CF6-7F9B-DF2E-8401-A11C6FFE7D1D}"/>
-              </a:ext>
-            </a:extLst>
-          </p:cNvPr>
-          <p:cNvCxnSpPr>
-            <a:cxnSpLocks/>
-          </p:cNvCxnSpPr>
-          <p:nvPr/>
-        </p:nvCxnSpPr>
-        <p:spPr>
-          <a:xfrm flipV="1">
-            <a:off x="10852467" y="3154000"/>
-            <a:ext cx="0" cy="195214"/>
-          </a:xfrm>
-          <a:prstGeom prst="straightConnector1">
-            <a:avLst/>
-          </a:prstGeom>
-          <a:ln>
-            <a:solidFill>
-              <a:srgbClr val="FF0000"/>
-            </a:solidFill>
-            <a:tailEnd type="triangle"/>
-          </a:ln>
-        </p:spPr>
-        <p:style>
-          <a:lnRef idx="2">
-            <a:schemeClr val="accent1"/>
-          </a:lnRef>
-          <a:fillRef idx="0">
-            <a:schemeClr val="accent1"/>
-          </a:fillRef>
-          <a:effectRef idx="1">
-            <a:schemeClr val="accent1"/>
-          </a:effectRef>
-          <a:fontRef idx="minor">
-            <a:schemeClr val="tx1"/>
-          </a:fontRef>
-        </p:style>
-      </p:cxnSp>
-      <p:cxnSp>
-        <p:nvCxnSpPr>
           <p:cNvPr id="316" name="Straight Connector 315">
             <a:extLst>
               <a:ext uri="{FF2B5EF4-FFF2-40B4-BE49-F238E27FC236}">
@@ -10285,6 +9931,1317 @@
           <a:p>
             <a:pPr algn="ctr"/>
             <a:endParaRPr lang="en-US"/>
+          </a:p>
+        </p:txBody>
+      </p:sp>
+      <p:cxnSp>
+        <p:nvCxnSpPr>
+          <p:cNvPr id="17" name="Straight Arrow Connector 16">
+            <a:extLst>
+              <a:ext uri="{FF2B5EF4-FFF2-40B4-BE49-F238E27FC236}">
+                <a16:creationId xmlns:a16="http://schemas.microsoft.com/office/drawing/2014/main" id="{D24E488E-A173-AFA0-3F6A-78FF8CC6952B}"/>
+              </a:ext>
+            </a:extLst>
+          </p:cNvPr>
+          <p:cNvCxnSpPr>
+            <a:cxnSpLocks/>
+          </p:cNvCxnSpPr>
+          <p:nvPr/>
+        </p:nvCxnSpPr>
+        <p:spPr>
+          <a:xfrm flipV="1">
+            <a:off x="10852467" y="3154000"/>
+            <a:ext cx="0" cy="195214"/>
+          </a:xfrm>
+          <a:prstGeom prst="straightConnector1">
+            <a:avLst/>
+          </a:prstGeom>
+          <a:ln>
+            <a:solidFill>
+              <a:srgbClr val="FF0000"/>
+            </a:solidFill>
+            <a:tailEnd type="triangle"/>
+          </a:ln>
+        </p:spPr>
+        <p:style>
+          <a:lnRef idx="2">
+            <a:schemeClr val="accent1"/>
+          </a:lnRef>
+          <a:fillRef idx="0">
+            <a:schemeClr val="accent1"/>
+          </a:fillRef>
+          <a:effectRef idx="1">
+            <a:schemeClr val="accent1"/>
+          </a:effectRef>
+          <a:fontRef idx="minor">
+            <a:schemeClr val="tx1"/>
+          </a:fontRef>
+        </p:style>
+      </p:cxnSp>
+      <p:cxnSp>
+        <p:nvCxnSpPr>
+          <p:cNvPr id="26" name="Straight Arrow Connector 25">
+            <a:extLst>
+              <a:ext uri="{FF2B5EF4-FFF2-40B4-BE49-F238E27FC236}">
+                <a16:creationId xmlns:a16="http://schemas.microsoft.com/office/drawing/2014/main" id="{EFC7A41C-61ED-49E4-BA0B-27EC82F62902}"/>
+              </a:ext>
+            </a:extLst>
+          </p:cNvPr>
+          <p:cNvCxnSpPr>
+            <a:cxnSpLocks/>
+          </p:cNvCxnSpPr>
+          <p:nvPr/>
+        </p:nvCxnSpPr>
+        <p:spPr>
+          <a:xfrm flipV="1">
+            <a:off x="10915967" y="3114188"/>
+            <a:ext cx="0" cy="195214"/>
+          </a:xfrm>
+          <a:prstGeom prst="straightConnector1">
+            <a:avLst/>
+          </a:prstGeom>
+          <a:ln>
+            <a:solidFill>
+              <a:srgbClr val="FF0000"/>
+            </a:solidFill>
+            <a:tailEnd type="triangle"/>
+          </a:ln>
+        </p:spPr>
+        <p:style>
+          <a:lnRef idx="2">
+            <a:schemeClr val="accent1"/>
+          </a:lnRef>
+          <a:fillRef idx="0">
+            <a:schemeClr val="accent1"/>
+          </a:fillRef>
+          <a:effectRef idx="1">
+            <a:schemeClr val="accent1"/>
+          </a:effectRef>
+          <a:fontRef idx="minor">
+            <a:schemeClr val="tx1"/>
+          </a:fontRef>
+        </p:style>
+      </p:cxnSp>
+      <p:cxnSp>
+        <p:nvCxnSpPr>
+          <p:cNvPr id="28" name="Straight Arrow Connector 27">
+            <a:extLst>
+              <a:ext uri="{FF2B5EF4-FFF2-40B4-BE49-F238E27FC236}">
+                <a16:creationId xmlns:a16="http://schemas.microsoft.com/office/drawing/2014/main" id="{EE79F449-2B1D-87A9-9E7B-9DD8C11C7B9B}"/>
+              </a:ext>
+            </a:extLst>
+          </p:cNvPr>
+          <p:cNvCxnSpPr>
+            <a:cxnSpLocks/>
+          </p:cNvCxnSpPr>
+          <p:nvPr/>
+        </p:nvCxnSpPr>
+        <p:spPr>
+          <a:xfrm flipV="1">
+            <a:off x="10776267" y="3233786"/>
+            <a:ext cx="0" cy="195214"/>
+          </a:xfrm>
+          <a:prstGeom prst="straightConnector1">
+            <a:avLst/>
+          </a:prstGeom>
+          <a:ln>
+            <a:solidFill>
+              <a:srgbClr val="FF0000"/>
+            </a:solidFill>
+            <a:tailEnd type="triangle"/>
+          </a:ln>
+        </p:spPr>
+        <p:style>
+          <a:lnRef idx="2">
+            <a:schemeClr val="accent1"/>
+          </a:lnRef>
+          <a:fillRef idx="0">
+            <a:schemeClr val="accent1"/>
+          </a:fillRef>
+          <a:effectRef idx="1">
+            <a:schemeClr val="accent1"/>
+          </a:effectRef>
+          <a:fontRef idx="minor">
+            <a:schemeClr val="tx1"/>
+          </a:fontRef>
+        </p:style>
+      </p:cxnSp>
+      <p:grpSp>
+        <p:nvGrpSpPr>
+          <p:cNvPr id="30" name="Group 29">
+            <a:extLst>
+              <a:ext uri="{FF2B5EF4-FFF2-40B4-BE49-F238E27FC236}">
+                <a16:creationId xmlns:a16="http://schemas.microsoft.com/office/drawing/2014/main" id="{F29CD4F1-4D65-2071-CB5D-56C21B0A8ADD}"/>
+              </a:ext>
+            </a:extLst>
+          </p:cNvPr>
+          <p:cNvGrpSpPr/>
+          <p:nvPr/>
+        </p:nvGrpSpPr>
+        <p:grpSpPr>
+          <a:xfrm rot="16200000">
+            <a:off x="8495764" y="2520050"/>
+            <a:ext cx="405246" cy="267608"/>
+            <a:chOff x="6169099" y="3766490"/>
+            <a:chExt cx="533480" cy="267608"/>
+          </a:xfrm>
+        </p:grpSpPr>
+        <p:pic>
+          <p:nvPicPr>
+            <p:cNvPr id="32" name="Picture 31">
+              <a:extLst>
+                <a:ext uri="{FF2B5EF4-FFF2-40B4-BE49-F238E27FC236}">
+                  <a16:creationId xmlns:a16="http://schemas.microsoft.com/office/drawing/2014/main" id="{08E484B5-905D-B38D-3D91-241CE1719D6C}"/>
+                </a:ext>
+              </a:extLst>
+            </p:cNvPr>
+            <p:cNvPicPr>
+              <a:picLocks noChangeAspect="1"/>
+            </p:cNvPicPr>
+            <p:nvPr/>
+          </p:nvPicPr>
+          <p:blipFill>
+            <a:blip r:embed="rId2"/>
+            <a:stretch>
+              <a:fillRect/>
+            </a:stretch>
+          </p:blipFill>
+          <p:spPr>
+            <a:xfrm>
+              <a:off x="6198580" y="3766490"/>
+              <a:ext cx="503999" cy="267608"/>
+            </a:xfrm>
+            <a:prstGeom prst="rect">
+              <a:avLst/>
+            </a:prstGeom>
+          </p:spPr>
+        </p:pic>
+        <p:cxnSp>
+          <p:nvCxnSpPr>
+            <p:cNvPr id="34" name="Straight Arrow Connector 33">
+              <a:extLst>
+                <a:ext uri="{FF2B5EF4-FFF2-40B4-BE49-F238E27FC236}">
+                  <a16:creationId xmlns:a16="http://schemas.microsoft.com/office/drawing/2014/main" id="{72BE6CC3-2C59-A24A-5E92-68A707F8638E}"/>
+                </a:ext>
+              </a:extLst>
+            </p:cNvPr>
+            <p:cNvCxnSpPr>
+              <a:cxnSpLocks/>
+            </p:cNvCxnSpPr>
+            <p:nvPr/>
+          </p:nvCxnSpPr>
+          <p:spPr>
+            <a:xfrm>
+              <a:off x="6169099" y="3838587"/>
+              <a:ext cx="177808" cy="0"/>
+            </a:xfrm>
+            <a:prstGeom prst="straightConnector1">
+              <a:avLst/>
+            </a:prstGeom>
+            <a:ln>
+              <a:solidFill>
+                <a:srgbClr val="FF0000"/>
+              </a:solidFill>
+              <a:tailEnd type="triangle"/>
+            </a:ln>
+          </p:spPr>
+          <p:style>
+            <a:lnRef idx="2">
+              <a:schemeClr val="accent1"/>
+            </a:lnRef>
+            <a:fillRef idx="0">
+              <a:schemeClr val="accent1"/>
+            </a:fillRef>
+            <a:effectRef idx="1">
+              <a:schemeClr val="accent1"/>
+            </a:effectRef>
+            <a:fontRef idx="minor">
+              <a:schemeClr val="tx1"/>
+            </a:fontRef>
+          </p:style>
+        </p:cxnSp>
+        <p:cxnSp>
+          <p:nvCxnSpPr>
+            <p:cNvPr id="35" name="Straight Arrow Connector 34">
+              <a:extLst>
+                <a:ext uri="{FF2B5EF4-FFF2-40B4-BE49-F238E27FC236}">
+                  <a16:creationId xmlns:a16="http://schemas.microsoft.com/office/drawing/2014/main" id="{8AB80F94-094C-4CE9-C275-29945A350AA8}"/>
+                </a:ext>
+              </a:extLst>
+            </p:cNvPr>
+            <p:cNvCxnSpPr>
+              <a:cxnSpLocks/>
+            </p:cNvCxnSpPr>
+            <p:nvPr/>
+          </p:nvCxnSpPr>
+          <p:spPr>
+            <a:xfrm>
+              <a:off x="6169099" y="3958185"/>
+              <a:ext cx="177808" cy="0"/>
+            </a:xfrm>
+            <a:prstGeom prst="straightConnector1">
+              <a:avLst/>
+            </a:prstGeom>
+            <a:ln>
+              <a:solidFill>
+                <a:srgbClr val="FF0000"/>
+              </a:solidFill>
+              <a:tailEnd type="triangle"/>
+            </a:ln>
+          </p:spPr>
+          <p:style>
+            <a:lnRef idx="2">
+              <a:schemeClr val="accent1"/>
+            </a:lnRef>
+            <a:fillRef idx="0">
+              <a:schemeClr val="accent1"/>
+            </a:fillRef>
+            <a:effectRef idx="1">
+              <a:schemeClr val="accent1"/>
+            </a:effectRef>
+            <a:fontRef idx="minor">
+              <a:schemeClr val="tx1"/>
+            </a:fontRef>
+          </p:style>
+        </p:cxnSp>
+      </p:grpSp>
+      <p:cxnSp>
+        <p:nvCxnSpPr>
+          <p:cNvPr id="37" name="Straight Arrow Connector 36">
+            <a:extLst>
+              <a:ext uri="{FF2B5EF4-FFF2-40B4-BE49-F238E27FC236}">
+                <a16:creationId xmlns:a16="http://schemas.microsoft.com/office/drawing/2014/main" id="{A09C37C1-E5D0-9FBA-A932-2F98BACEC0B2}"/>
+              </a:ext>
+            </a:extLst>
+          </p:cNvPr>
+          <p:cNvCxnSpPr/>
+          <p:nvPr/>
+        </p:nvCxnSpPr>
+        <p:spPr>
+          <a:xfrm>
+            <a:off x="2870131" y="3309402"/>
+            <a:ext cx="177808" cy="0"/>
+          </a:xfrm>
+          <a:prstGeom prst="straightConnector1">
+            <a:avLst/>
+          </a:prstGeom>
+          <a:ln>
+            <a:solidFill>
+              <a:srgbClr val="FF0000"/>
+            </a:solidFill>
+            <a:tailEnd type="triangle"/>
+          </a:ln>
+        </p:spPr>
+        <p:style>
+          <a:lnRef idx="2">
+            <a:schemeClr val="accent1"/>
+          </a:lnRef>
+          <a:fillRef idx="0">
+            <a:schemeClr val="accent1"/>
+          </a:fillRef>
+          <a:effectRef idx="1">
+            <a:schemeClr val="accent1"/>
+          </a:effectRef>
+          <a:fontRef idx="minor">
+            <a:schemeClr val="tx1"/>
+          </a:fontRef>
+        </p:style>
+      </p:cxnSp>
+      <p:cxnSp>
+        <p:nvCxnSpPr>
+          <p:cNvPr id="38" name="Straight Arrow Connector 37">
+            <a:extLst>
+              <a:ext uri="{FF2B5EF4-FFF2-40B4-BE49-F238E27FC236}">
+                <a16:creationId xmlns:a16="http://schemas.microsoft.com/office/drawing/2014/main" id="{4D9B3B66-045C-4BC7-2F4D-857D0D686CD3}"/>
+              </a:ext>
+            </a:extLst>
+          </p:cNvPr>
+          <p:cNvCxnSpPr/>
+          <p:nvPr/>
+        </p:nvCxnSpPr>
+        <p:spPr>
+          <a:xfrm>
+            <a:off x="2870131" y="3429000"/>
+            <a:ext cx="177808" cy="0"/>
+          </a:xfrm>
+          <a:prstGeom prst="straightConnector1">
+            <a:avLst/>
+          </a:prstGeom>
+          <a:ln>
+            <a:solidFill>
+              <a:srgbClr val="FF0000"/>
+            </a:solidFill>
+            <a:tailEnd type="triangle"/>
+          </a:ln>
+        </p:spPr>
+        <p:style>
+          <a:lnRef idx="2">
+            <a:schemeClr val="accent1"/>
+          </a:lnRef>
+          <a:fillRef idx="0">
+            <a:schemeClr val="accent1"/>
+          </a:fillRef>
+          <a:effectRef idx="1">
+            <a:schemeClr val="accent1"/>
+          </a:effectRef>
+          <a:fontRef idx="minor">
+            <a:schemeClr val="tx1"/>
+          </a:fontRef>
+        </p:style>
+      </p:cxnSp>
+      <p:cxnSp>
+        <p:nvCxnSpPr>
+          <p:cNvPr id="39" name="Straight Arrow Connector 38">
+            <a:extLst>
+              <a:ext uri="{FF2B5EF4-FFF2-40B4-BE49-F238E27FC236}">
+                <a16:creationId xmlns:a16="http://schemas.microsoft.com/office/drawing/2014/main" id="{119991E4-90E6-F0D1-11C3-602FF77B7F79}"/>
+              </a:ext>
+            </a:extLst>
+          </p:cNvPr>
+          <p:cNvCxnSpPr/>
+          <p:nvPr/>
+        </p:nvCxnSpPr>
+        <p:spPr>
+          <a:xfrm>
+            <a:off x="9424268" y="4047113"/>
+            <a:ext cx="0" cy="230832"/>
+          </a:xfrm>
+          <a:prstGeom prst="straightConnector1">
+            <a:avLst/>
+          </a:prstGeom>
+          <a:ln>
+            <a:solidFill>
+              <a:srgbClr val="FF0000"/>
+            </a:solidFill>
+            <a:tailEnd type="triangle"/>
+          </a:ln>
+        </p:spPr>
+        <p:style>
+          <a:lnRef idx="2">
+            <a:schemeClr val="accent1"/>
+          </a:lnRef>
+          <a:fillRef idx="0">
+            <a:schemeClr val="accent1"/>
+          </a:fillRef>
+          <a:effectRef idx="1">
+            <a:schemeClr val="accent1"/>
+          </a:effectRef>
+          <a:fontRef idx="minor">
+            <a:schemeClr val="tx1"/>
+          </a:fontRef>
+        </p:style>
+      </p:cxnSp>
+      <p:cxnSp>
+        <p:nvCxnSpPr>
+          <p:cNvPr id="47" name="Straight Arrow Connector 46">
+            <a:extLst>
+              <a:ext uri="{FF2B5EF4-FFF2-40B4-BE49-F238E27FC236}">
+                <a16:creationId xmlns:a16="http://schemas.microsoft.com/office/drawing/2014/main" id="{8A262BB7-393A-3D10-4768-BA19460EE16D}"/>
+              </a:ext>
+            </a:extLst>
+          </p:cNvPr>
+          <p:cNvCxnSpPr/>
+          <p:nvPr/>
+        </p:nvCxnSpPr>
+        <p:spPr>
+          <a:xfrm>
+            <a:off x="9462368" y="4084284"/>
+            <a:ext cx="0" cy="230832"/>
+          </a:xfrm>
+          <a:prstGeom prst="straightConnector1">
+            <a:avLst/>
+          </a:prstGeom>
+          <a:ln>
+            <a:solidFill>
+              <a:srgbClr val="FF0000"/>
+            </a:solidFill>
+            <a:tailEnd type="triangle"/>
+          </a:ln>
+        </p:spPr>
+        <p:style>
+          <a:lnRef idx="2">
+            <a:schemeClr val="accent1"/>
+          </a:lnRef>
+          <a:fillRef idx="0">
+            <a:schemeClr val="accent1"/>
+          </a:fillRef>
+          <a:effectRef idx="1">
+            <a:schemeClr val="accent1"/>
+          </a:effectRef>
+          <a:fontRef idx="minor">
+            <a:schemeClr val="tx1"/>
+          </a:fontRef>
+        </p:style>
+      </p:cxnSp>
+      <p:cxnSp>
+        <p:nvCxnSpPr>
+          <p:cNvPr id="52" name="Straight Arrow Connector 51">
+            <a:extLst>
+              <a:ext uri="{FF2B5EF4-FFF2-40B4-BE49-F238E27FC236}">
+                <a16:creationId xmlns:a16="http://schemas.microsoft.com/office/drawing/2014/main" id="{2AC5E79F-36BB-C55A-DF2D-C7C8E0255836}"/>
+              </a:ext>
+            </a:extLst>
+          </p:cNvPr>
+          <p:cNvCxnSpPr/>
+          <p:nvPr/>
+        </p:nvCxnSpPr>
+        <p:spPr>
+          <a:xfrm>
+            <a:off x="9514036" y="4115287"/>
+            <a:ext cx="0" cy="230832"/>
+          </a:xfrm>
+          <a:prstGeom prst="straightConnector1">
+            <a:avLst/>
+          </a:prstGeom>
+          <a:ln>
+            <a:solidFill>
+              <a:srgbClr val="FF0000"/>
+            </a:solidFill>
+            <a:tailEnd type="triangle"/>
+          </a:ln>
+        </p:spPr>
+        <p:style>
+          <a:lnRef idx="2">
+            <a:schemeClr val="accent1"/>
+          </a:lnRef>
+          <a:fillRef idx="0">
+            <a:schemeClr val="accent1"/>
+          </a:fillRef>
+          <a:effectRef idx="1">
+            <a:schemeClr val="accent1"/>
+          </a:effectRef>
+          <a:fontRef idx="minor">
+            <a:schemeClr val="tx1"/>
+          </a:fontRef>
+        </p:style>
+      </p:cxnSp>
+      <p:cxnSp>
+        <p:nvCxnSpPr>
+          <p:cNvPr id="53" name="Straight Arrow Connector 52">
+            <a:extLst>
+              <a:ext uri="{FF2B5EF4-FFF2-40B4-BE49-F238E27FC236}">
+                <a16:creationId xmlns:a16="http://schemas.microsoft.com/office/drawing/2014/main" id="{FE547B99-6FC8-A74C-FEEB-9E4CADACFA53}"/>
+              </a:ext>
+            </a:extLst>
+          </p:cNvPr>
+          <p:cNvCxnSpPr>
+            <a:cxnSpLocks/>
+          </p:cNvCxnSpPr>
+          <p:nvPr/>
+        </p:nvCxnSpPr>
+        <p:spPr>
+          <a:xfrm>
+            <a:off x="8930725" y="4560055"/>
+            <a:ext cx="374301" cy="0"/>
+          </a:xfrm>
+          <a:prstGeom prst="straightConnector1">
+            <a:avLst/>
+          </a:prstGeom>
+          <a:ln>
+            <a:tailEnd type="triangle"/>
+          </a:ln>
+        </p:spPr>
+        <p:style>
+          <a:lnRef idx="2">
+            <a:schemeClr val="accent1"/>
+          </a:lnRef>
+          <a:fillRef idx="0">
+            <a:schemeClr val="accent1"/>
+          </a:fillRef>
+          <a:effectRef idx="1">
+            <a:schemeClr val="accent1"/>
+          </a:effectRef>
+          <a:fontRef idx="minor">
+            <a:schemeClr val="tx1"/>
+          </a:fontRef>
+        </p:style>
+      </p:cxnSp>
+      <p:sp>
+        <p:nvSpPr>
+          <p:cNvPr id="54" name="TextBox 53">
+            <a:extLst>
+              <a:ext uri="{FF2B5EF4-FFF2-40B4-BE49-F238E27FC236}">
+                <a16:creationId xmlns:a16="http://schemas.microsoft.com/office/drawing/2014/main" id="{7C5CCBD1-0844-480F-8141-9A9CAA44FF50}"/>
+              </a:ext>
+            </a:extLst>
+          </p:cNvPr>
+          <p:cNvSpPr txBox="1"/>
+          <p:nvPr/>
+        </p:nvSpPr>
+        <p:spPr>
+          <a:xfrm>
+            <a:off x="7868407" y="4099798"/>
+            <a:ext cx="413896" cy="230832"/>
+          </a:xfrm>
+          <a:prstGeom prst="rect">
+            <a:avLst/>
+          </a:prstGeom>
+          <a:noFill/>
+        </p:spPr>
+        <p:txBody>
+          <a:bodyPr wrap="none" rtlCol="0">
+            <a:spAutoFit/>
+          </a:bodyPr>
+          <a:lstStyle/>
+          <a:p>
+            <a:pPr algn="ctr"/>
+            <a:r>
+              <a:rPr lang="en-US" sz="900" dirty="0"/>
+              <a:t>NPC</a:t>
+            </a:r>
+          </a:p>
+        </p:txBody>
+      </p:sp>
+      <p:sp>
+        <p:nvSpPr>
+          <p:cNvPr id="57" name="TextBox 56">
+            <a:extLst>
+              <a:ext uri="{FF2B5EF4-FFF2-40B4-BE49-F238E27FC236}">
+                <a16:creationId xmlns:a16="http://schemas.microsoft.com/office/drawing/2014/main" id="{BE8947B1-691B-936E-60AD-9FDFE4A4EA75}"/>
+              </a:ext>
+            </a:extLst>
+          </p:cNvPr>
+          <p:cNvSpPr txBox="1"/>
+          <p:nvPr/>
+        </p:nvSpPr>
+        <p:spPr>
+          <a:xfrm>
+            <a:off x="7871560" y="4515171"/>
+            <a:ext cx="407484" cy="230832"/>
+          </a:xfrm>
+          <a:prstGeom prst="rect">
+            <a:avLst/>
+          </a:prstGeom>
+          <a:noFill/>
+        </p:spPr>
+        <p:txBody>
+          <a:bodyPr wrap="none" rtlCol="0">
+            <a:spAutoFit/>
+          </a:bodyPr>
+          <a:lstStyle/>
+          <a:p>
+            <a:pPr algn="ctr"/>
+            <a:r>
+              <a:rPr lang="en-US" sz="900" dirty="0" err="1"/>
+              <a:t>imm</a:t>
+            </a:r>
+            <a:endParaRPr lang="en-US" sz="900" dirty="0"/>
+          </a:p>
+        </p:txBody>
+      </p:sp>
+      <p:cxnSp>
+        <p:nvCxnSpPr>
+          <p:cNvPr id="58" name="Straight Arrow Connector 57">
+            <a:extLst>
+              <a:ext uri="{FF2B5EF4-FFF2-40B4-BE49-F238E27FC236}">
+                <a16:creationId xmlns:a16="http://schemas.microsoft.com/office/drawing/2014/main" id="{37D73938-CD18-95EE-AF99-64BFF08C2E0D}"/>
+              </a:ext>
+            </a:extLst>
+          </p:cNvPr>
+          <p:cNvCxnSpPr>
+            <a:cxnSpLocks/>
+          </p:cNvCxnSpPr>
+          <p:nvPr/>
+        </p:nvCxnSpPr>
+        <p:spPr>
+          <a:xfrm flipV="1">
+            <a:off x="9214921" y="4718145"/>
+            <a:ext cx="100338" cy="2498"/>
+          </a:xfrm>
+          <a:prstGeom prst="straightConnector1">
+            <a:avLst/>
+          </a:prstGeom>
+          <a:ln>
+            <a:tailEnd type="triangle"/>
+          </a:ln>
+        </p:spPr>
+        <p:style>
+          <a:lnRef idx="2">
+            <a:schemeClr val="accent1"/>
+          </a:lnRef>
+          <a:fillRef idx="0">
+            <a:schemeClr val="accent1"/>
+          </a:fillRef>
+          <a:effectRef idx="1">
+            <a:schemeClr val="accent1"/>
+          </a:effectRef>
+          <a:fontRef idx="minor">
+            <a:schemeClr val="tx1"/>
+          </a:fontRef>
+        </p:style>
+      </p:cxnSp>
+      <p:sp>
+        <p:nvSpPr>
+          <p:cNvPr id="59" name="TextBox 58">
+            <a:extLst>
+              <a:ext uri="{FF2B5EF4-FFF2-40B4-BE49-F238E27FC236}">
+                <a16:creationId xmlns:a16="http://schemas.microsoft.com/office/drawing/2014/main" id="{62908768-78CB-6AA2-9F8F-560147BBA50C}"/>
+              </a:ext>
+            </a:extLst>
+          </p:cNvPr>
+          <p:cNvSpPr txBox="1"/>
+          <p:nvPr/>
+        </p:nvSpPr>
+        <p:spPr>
+          <a:xfrm>
+            <a:off x="8892828" y="4599810"/>
+            <a:ext cx="413896" cy="230832"/>
+          </a:xfrm>
+          <a:prstGeom prst="rect">
+            <a:avLst/>
+          </a:prstGeom>
+          <a:noFill/>
+        </p:spPr>
+        <p:txBody>
+          <a:bodyPr wrap="none" rtlCol="0">
+            <a:spAutoFit/>
+          </a:bodyPr>
+          <a:lstStyle/>
+          <a:p>
+            <a:pPr algn="ctr"/>
+            <a:r>
+              <a:rPr lang="en-US" sz="900" dirty="0"/>
+              <a:t>NPC</a:t>
+            </a:r>
+          </a:p>
+        </p:txBody>
+      </p:sp>
+      <p:grpSp>
+        <p:nvGrpSpPr>
+          <p:cNvPr id="61" name="Group 60">
+            <a:extLst>
+              <a:ext uri="{FF2B5EF4-FFF2-40B4-BE49-F238E27FC236}">
+                <a16:creationId xmlns:a16="http://schemas.microsoft.com/office/drawing/2014/main" id="{16FC76F5-1B0B-DFD2-2DFE-467D7246D31F}"/>
+              </a:ext>
+            </a:extLst>
+          </p:cNvPr>
+          <p:cNvGrpSpPr/>
+          <p:nvPr/>
+        </p:nvGrpSpPr>
+        <p:grpSpPr>
+          <a:xfrm>
+            <a:off x="8407592" y="4109253"/>
+            <a:ext cx="292770" cy="637674"/>
+            <a:chOff x="1074820" y="1507958"/>
+            <a:chExt cx="292770" cy="637674"/>
+          </a:xfrm>
+        </p:grpSpPr>
+        <p:cxnSp>
+          <p:nvCxnSpPr>
+            <p:cNvPr id="66" name="Straight Connector 65">
+              <a:extLst>
+                <a:ext uri="{FF2B5EF4-FFF2-40B4-BE49-F238E27FC236}">
+                  <a16:creationId xmlns:a16="http://schemas.microsoft.com/office/drawing/2014/main" id="{C0F3C053-4536-CA7C-4EE4-418998840D9A}"/>
+                </a:ext>
+              </a:extLst>
+            </p:cNvPr>
+            <p:cNvCxnSpPr>
+              <a:cxnSpLocks/>
+            </p:cNvCxnSpPr>
+            <p:nvPr/>
+          </p:nvCxnSpPr>
+          <p:spPr>
+            <a:xfrm>
+              <a:off x="1074821" y="1507958"/>
+              <a:ext cx="0" cy="212558"/>
+            </a:xfrm>
+            <a:prstGeom prst="line">
+              <a:avLst/>
+            </a:prstGeom>
+          </p:spPr>
+          <p:style>
+            <a:lnRef idx="2">
+              <a:schemeClr val="accent1"/>
+            </a:lnRef>
+            <a:fillRef idx="0">
+              <a:schemeClr val="accent1"/>
+            </a:fillRef>
+            <a:effectRef idx="1">
+              <a:schemeClr val="accent1"/>
+            </a:effectRef>
+            <a:fontRef idx="minor">
+              <a:schemeClr val="tx1"/>
+            </a:fontRef>
+          </p:style>
+        </p:cxnSp>
+        <p:cxnSp>
+          <p:nvCxnSpPr>
+            <p:cNvPr id="67" name="Straight Connector 66">
+              <a:extLst>
+                <a:ext uri="{FF2B5EF4-FFF2-40B4-BE49-F238E27FC236}">
+                  <a16:creationId xmlns:a16="http://schemas.microsoft.com/office/drawing/2014/main" id="{F4ACF4A3-01ED-D5D2-AE79-3A96A5B0A6EC}"/>
+                </a:ext>
+              </a:extLst>
+            </p:cNvPr>
+            <p:cNvCxnSpPr>
+              <a:cxnSpLocks/>
+            </p:cNvCxnSpPr>
+            <p:nvPr/>
+          </p:nvCxnSpPr>
+          <p:spPr>
+            <a:xfrm>
+              <a:off x="1367590" y="1720516"/>
+              <a:ext cx="0" cy="212558"/>
+            </a:xfrm>
+            <a:prstGeom prst="line">
+              <a:avLst/>
+            </a:prstGeom>
+          </p:spPr>
+          <p:style>
+            <a:lnRef idx="2">
+              <a:schemeClr val="accent1"/>
+            </a:lnRef>
+            <a:fillRef idx="0">
+              <a:schemeClr val="accent1"/>
+            </a:fillRef>
+            <a:effectRef idx="1">
+              <a:schemeClr val="accent1"/>
+            </a:effectRef>
+            <a:fontRef idx="minor">
+              <a:schemeClr val="tx1"/>
+            </a:fontRef>
+          </p:style>
+        </p:cxnSp>
+        <p:cxnSp>
+          <p:nvCxnSpPr>
+            <p:cNvPr id="68" name="Straight Connector 67">
+              <a:extLst>
+                <a:ext uri="{FF2B5EF4-FFF2-40B4-BE49-F238E27FC236}">
+                  <a16:creationId xmlns:a16="http://schemas.microsoft.com/office/drawing/2014/main" id="{F8BA57EF-BE1E-D9E4-5BCF-2A7FF9099FFC}"/>
+                </a:ext>
+              </a:extLst>
+            </p:cNvPr>
+            <p:cNvCxnSpPr>
+              <a:cxnSpLocks/>
+            </p:cNvCxnSpPr>
+            <p:nvPr/>
+          </p:nvCxnSpPr>
+          <p:spPr>
+            <a:xfrm>
+              <a:off x="1074821" y="1933074"/>
+              <a:ext cx="0" cy="212558"/>
+            </a:xfrm>
+            <a:prstGeom prst="line">
+              <a:avLst/>
+            </a:prstGeom>
+          </p:spPr>
+          <p:style>
+            <a:lnRef idx="2">
+              <a:schemeClr val="accent1"/>
+            </a:lnRef>
+            <a:fillRef idx="0">
+              <a:schemeClr val="accent1"/>
+            </a:fillRef>
+            <a:effectRef idx="1">
+              <a:schemeClr val="accent1"/>
+            </a:effectRef>
+            <a:fontRef idx="minor">
+              <a:schemeClr val="tx1"/>
+            </a:fontRef>
+          </p:style>
+        </p:cxnSp>
+        <p:cxnSp>
+          <p:nvCxnSpPr>
+            <p:cNvPr id="72" name="Straight Connector 71">
+              <a:extLst>
+                <a:ext uri="{FF2B5EF4-FFF2-40B4-BE49-F238E27FC236}">
+                  <a16:creationId xmlns:a16="http://schemas.microsoft.com/office/drawing/2014/main" id="{35E72814-B29A-A6B9-3873-6A3C7C551AE8}"/>
+                </a:ext>
+              </a:extLst>
+            </p:cNvPr>
+            <p:cNvCxnSpPr>
+              <a:cxnSpLocks/>
+            </p:cNvCxnSpPr>
+            <p:nvPr/>
+          </p:nvCxnSpPr>
+          <p:spPr>
+            <a:xfrm flipH="1">
+              <a:off x="1074821" y="1936227"/>
+              <a:ext cx="292769" cy="209405"/>
+            </a:xfrm>
+            <a:prstGeom prst="line">
+              <a:avLst/>
+            </a:prstGeom>
+          </p:spPr>
+          <p:style>
+            <a:lnRef idx="2">
+              <a:schemeClr val="accent1"/>
+            </a:lnRef>
+            <a:fillRef idx="0">
+              <a:schemeClr val="accent1"/>
+            </a:fillRef>
+            <a:effectRef idx="1">
+              <a:schemeClr val="accent1"/>
+            </a:effectRef>
+            <a:fontRef idx="minor">
+              <a:schemeClr val="tx1"/>
+            </a:fontRef>
+          </p:style>
+        </p:cxnSp>
+        <p:cxnSp>
+          <p:nvCxnSpPr>
+            <p:cNvPr id="75" name="Straight Connector 74">
+              <a:extLst>
+                <a:ext uri="{FF2B5EF4-FFF2-40B4-BE49-F238E27FC236}">
+                  <a16:creationId xmlns:a16="http://schemas.microsoft.com/office/drawing/2014/main" id="{8E1DD0ED-9DFA-FDD8-737C-FB8DE70DA26A}"/>
+                </a:ext>
+              </a:extLst>
+            </p:cNvPr>
+            <p:cNvCxnSpPr>
+              <a:cxnSpLocks/>
+            </p:cNvCxnSpPr>
+            <p:nvPr/>
+          </p:nvCxnSpPr>
+          <p:spPr>
+            <a:xfrm flipH="1" flipV="1">
+              <a:off x="1074821" y="1507958"/>
+              <a:ext cx="292769" cy="215711"/>
+            </a:xfrm>
+            <a:prstGeom prst="line">
+              <a:avLst/>
+            </a:prstGeom>
+          </p:spPr>
+          <p:style>
+            <a:lnRef idx="2">
+              <a:schemeClr val="accent1"/>
+            </a:lnRef>
+            <a:fillRef idx="0">
+              <a:schemeClr val="accent1"/>
+            </a:fillRef>
+            <a:effectRef idx="1">
+              <a:schemeClr val="accent1"/>
+            </a:effectRef>
+            <a:fontRef idx="minor">
+              <a:schemeClr val="tx1"/>
+            </a:fontRef>
+          </p:style>
+        </p:cxnSp>
+        <p:cxnSp>
+          <p:nvCxnSpPr>
+            <p:cNvPr id="76" name="Straight Connector 75">
+              <a:extLst>
+                <a:ext uri="{FF2B5EF4-FFF2-40B4-BE49-F238E27FC236}">
+                  <a16:creationId xmlns:a16="http://schemas.microsoft.com/office/drawing/2014/main" id="{10A822E0-4EAA-5FC7-F211-354CF1DD8C97}"/>
+                </a:ext>
+              </a:extLst>
+            </p:cNvPr>
+            <p:cNvCxnSpPr>
+              <a:cxnSpLocks/>
+            </p:cNvCxnSpPr>
+            <p:nvPr/>
+          </p:nvCxnSpPr>
+          <p:spPr>
+            <a:xfrm flipV="1">
+              <a:off x="1074821" y="1829948"/>
+              <a:ext cx="140545" cy="103126"/>
+            </a:xfrm>
+            <a:prstGeom prst="line">
+              <a:avLst/>
+            </a:prstGeom>
+          </p:spPr>
+          <p:style>
+            <a:lnRef idx="2">
+              <a:schemeClr val="accent1"/>
+            </a:lnRef>
+            <a:fillRef idx="0">
+              <a:schemeClr val="accent1"/>
+            </a:fillRef>
+            <a:effectRef idx="1">
+              <a:schemeClr val="accent1"/>
+            </a:effectRef>
+            <a:fontRef idx="minor">
+              <a:schemeClr val="tx1"/>
+            </a:fontRef>
+          </p:style>
+        </p:cxnSp>
+        <p:cxnSp>
+          <p:nvCxnSpPr>
+            <p:cNvPr id="77" name="Straight Connector 76">
+              <a:extLst>
+                <a:ext uri="{FF2B5EF4-FFF2-40B4-BE49-F238E27FC236}">
+                  <a16:creationId xmlns:a16="http://schemas.microsoft.com/office/drawing/2014/main" id="{05428BE6-A028-2505-F585-6481D0268AE8}"/>
+                </a:ext>
+              </a:extLst>
+            </p:cNvPr>
+            <p:cNvCxnSpPr>
+              <a:cxnSpLocks/>
+            </p:cNvCxnSpPr>
+            <p:nvPr/>
+          </p:nvCxnSpPr>
+          <p:spPr>
+            <a:xfrm>
+              <a:off x="1074820" y="1716505"/>
+              <a:ext cx="140545" cy="107137"/>
+            </a:xfrm>
+            <a:prstGeom prst="line">
+              <a:avLst/>
+            </a:prstGeom>
+          </p:spPr>
+          <p:style>
+            <a:lnRef idx="2">
+              <a:schemeClr val="accent1"/>
+            </a:lnRef>
+            <a:fillRef idx="0">
+              <a:schemeClr val="accent1"/>
+            </a:fillRef>
+            <a:effectRef idx="1">
+              <a:schemeClr val="accent1"/>
+            </a:effectRef>
+            <a:fontRef idx="minor">
+              <a:schemeClr val="tx1"/>
+            </a:fontRef>
+          </p:style>
+        </p:cxnSp>
+      </p:grpSp>
+      <p:cxnSp>
+        <p:nvCxnSpPr>
+          <p:cNvPr id="78" name="Straight Arrow Connector 77">
+            <a:extLst>
+              <a:ext uri="{FF2B5EF4-FFF2-40B4-BE49-F238E27FC236}">
+                <a16:creationId xmlns:a16="http://schemas.microsoft.com/office/drawing/2014/main" id="{179B177D-A620-CBB7-1F57-B85744BC1768}"/>
+              </a:ext>
+            </a:extLst>
+          </p:cNvPr>
+          <p:cNvCxnSpPr>
+            <a:cxnSpLocks/>
+          </p:cNvCxnSpPr>
+          <p:nvPr/>
+        </p:nvCxnSpPr>
+        <p:spPr>
+          <a:xfrm>
+            <a:off x="8233657" y="4640648"/>
+            <a:ext cx="173935" cy="0"/>
+          </a:xfrm>
+          <a:prstGeom prst="straightConnector1">
+            <a:avLst/>
+          </a:prstGeom>
+          <a:ln>
+            <a:tailEnd type="triangle"/>
+          </a:ln>
+        </p:spPr>
+        <p:style>
+          <a:lnRef idx="2">
+            <a:schemeClr val="accent1"/>
+          </a:lnRef>
+          <a:fillRef idx="0">
+            <a:schemeClr val="accent1"/>
+          </a:fillRef>
+          <a:effectRef idx="1">
+            <a:schemeClr val="accent1"/>
+          </a:effectRef>
+          <a:fontRef idx="minor">
+            <a:schemeClr val="tx1"/>
+          </a:fontRef>
+        </p:style>
+      </p:cxnSp>
+      <p:cxnSp>
+        <p:nvCxnSpPr>
+          <p:cNvPr id="79" name="Straight Arrow Connector 78">
+            <a:extLst>
+              <a:ext uri="{FF2B5EF4-FFF2-40B4-BE49-F238E27FC236}">
+                <a16:creationId xmlns:a16="http://schemas.microsoft.com/office/drawing/2014/main" id="{64751035-C943-F4AC-E721-2329E2124269}"/>
+              </a:ext>
+            </a:extLst>
+          </p:cNvPr>
+          <p:cNvCxnSpPr/>
+          <p:nvPr/>
+        </p:nvCxnSpPr>
+        <p:spPr>
+          <a:xfrm>
+            <a:off x="8229784" y="4215532"/>
+            <a:ext cx="177808" cy="0"/>
+          </a:xfrm>
+          <a:prstGeom prst="straightConnector1">
+            <a:avLst/>
+          </a:prstGeom>
+          <a:ln>
+            <a:tailEnd type="triangle"/>
+          </a:ln>
+        </p:spPr>
+        <p:style>
+          <a:lnRef idx="2">
+            <a:schemeClr val="accent1"/>
+          </a:lnRef>
+          <a:fillRef idx="0">
+            <a:schemeClr val="accent1"/>
+          </a:fillRef>
+          <a:effectRef idx="1">
+            <a:schemeClr val="accent1"/>
+          </a:effectRef>
+          <a:fontRef idx="minor">
+            <a:schemeClr val="tx1"/>
+          </a:fontRef>
+        </p:style>
+      </p:cxnSp>
+      <p:sp>
+        <p:nvSpPr>
+          <p:cNvPr id="80" name="TextBox 79">
+            <a:extLst>
+              <a:ext uri="{FF2B5EF4-FFF2-40B4-BE49-F238E27FC236}">
+                <a16:creationId xmlns:a16="http://schemas.microsoft.com/office/drawing/2014/main" id="{55A3E227-0BF3-A73B-3BC7-43B3ED0C951A}"/>
+              </a:ext>
+            </a:extLst>
+          </p:cNvPr>
+          <p:cNvSpPr txBox="1"/>
+          <p:nvPr/>
+        </p:nvSpPr>
+        <p:spPr>
+          <a:xfrm>
+            <a:off x="8442429" y="4314065"/>
+            <a:ext cx="351378" cy="230832"/>
+          </a:xfrm>
+          <a:prstGeom prst="rect">
+            <a:avLst/>
+          </a:prstGeom>
+          <a:noFill/>
+        </p:spPr>
+        <p:txBody>
+          <a:bodyPr wrap="none" rtlCol="0">
+            <a:spAutoFit/>
+          </a:bodyPr>
+          <a:lstStyle/>
+          <a:p>
+            <a:pPr algn="ctr"/>
+            <a:r>
+              <a:rPr lang="en-US" sz="900" dirty="0"/>
+              <a:t>“+”</a:t>
+            </a:r>
+          </a:p>
+        </p:txBody>
+      </p:sp>
+      <p:cxnSp>
+        <p:nvCxnSpPr>
+          <p:cNvPr id="82" name="Straight Arrow Connector 81">
+            <a:extLst>
+              <a:ext uri="{FF2B5EF4-FFF2-40B4-BE49-F238E27FC236}">
+                <a16:creationId xmlns:a16="http://schemas.microsoft.com/office/drawing/2014/main" id="{2BADD6A5-EF1D-D5D2-C1C0-C06AAF0FB60A}"/>
+              </a:ext>
+            </a:extLst>
+          </p:cNvPr>
+          <p:cNvCxnSpPr>
+            <a:cxnSpLocks/>
+          </p:cNvCxnSpPr>
+          <p:nvPr/>
+        </p:nvCxnSpPr>
+        <p:spPr>
+          <a:xfrm flipV="1">
+            <a:off x="9192573" y="4893615"/>
+            <a:ext cx="100338" cy="2498"/>
+          </a:xfrm>
+          <a:prstGeom prst="straightConnector1">
+            <a:avLst/>
+          </a:prstGeom>
+          <a:ln>
+            <a:tailEnd type="triangle"/>
+          </a:ln>
+        </p:spPr>
+        <p:style>
+          <a:lnRef idx="2">
+            <a:schemeClr val="accent1"/>
+          </a:lnRef>
+          <a:fillRef idx="0">
+            <a:schemeClr val="accent1"/>
+          </a:fillRef>
+          <a:effectRef idx="1">
+            <a:schemeClr val="accent1"/>
+          </a:effectRef>
+          <a:fontRef idx="minor">
+            <a:schemeClr val="tx1"/>
+          </a:fontRef>
+        </p:style>
+      </p:cxnSp>
+      <p:sp>
+        <p:nvSpPr>
+          <p:cNvPr id="84" name="TextBox 83">
+            <a:extLst>
+              <a:ext uri="{FF2B5EF4-FFF2-40B4-BE49-F238E27FC236}">
+                <a16:creationId xmlns:a16="http://schemas.microsoft.com/office/drawing/2014/main" id="{D1142331-E346-04E4-CE7D-40DA0254B7E8}"/>
+              </a:ext>
+            </a:extLst>
+          </p:cNvPr>
+          <p:cNvSpPr txBox="1"/>
+          <p:nvPr/>
+        </p:nvSpPr>
+        <p:spPr>
+          <a:xfrm>
+            <a:off x="8937784" y="4780084"/>
+            <a:ext cx="332142" cy="230832"/>
+          </a:xfrm>
+          <a:prstGeom prst="rect">
+            <a:avLst/>
+          </a:prstGeom>
+          <a:noFill/>
+        </p:spPr>
+        <p:txBody>
+          <a:bodyPr wrap="none" rtlCol="0">
+            <a:spAutoFit/>
+          </a:bodyPr>
+          <a:lstStyle/>
+          <a:p>
+            <a:pPr algn="ctr"/>
+            <a:r>
+              <a:rPr lang="en-US" sz="900" dirty="0"/>
+              <a:t>PC</a:t>
+            </a:r>
+          </a:p>
+        </p:txBody>
+      </p:sp>
+      <p:cxnSp>
+        <p:nvCxnSpPr>
+          <p:cNvPr id="86" name="Straight Arrow Connector 85">
+            <a:extLst>
+              <a:ext uri="{FF2B5EF4-FFF2-40B4-BE49-F238E27FC236}">
+                <a16:creationId xmlns:a16="http://schemas.microsoft.com/office/drawing/2014/main" id="{241FC06E-49A1-E737-FC39-BA3F124F2533}"/>
+              </a:ext>
+            </a:extLst>
+          </p:cNvPr>
+          <p:cNvCxnSpPr>
+            <a:cxnSpLocks/>
+          </p:cNvCxnSpPr>
+          <p:nvPr/>
+        </p:nvCxnSpPr>
+        <p:spPr>
+          <a:xfrm>
+            <a:off x="8930725" y="4346119"/>
+            <a:ext cx="374301" cy="0"/>
+          </a:xfrm>
+          <a:prstGeom prst="straightConnector1">
+            <a:avLst/>
+          </a:prstGeom>
+          <a:ln>
+            <a:tailEnd type="triangle"/>
+          </a:ln>
+        </p:spPr>
+        <p:style>
+          <a:lnRef idx="2">
+            <a:schemeClr val="accent1"/>
+          </a:lnRef>
+          <a:fillRef idx="0">
+            <a:schemeClr val="accent1"/>
+          </a:fillRef>
+          <a:effectRef idx="1">
+            <a:schemeClr val="accent1"/>
+          </a:effectRef>
+          <a:fontRef idx="minor">
+            <a:schemeClr val="tx1"/>
+          </a:fontRef>
+        </p:style>
+      </p:cxnSp>
+      <p:cxnSp>
+        <p:nvCxnSpPr>
+          <p:cNvPr id="88" name="Straight Arrow Connector 87">
+            <a:extLst>
+              <a:ext uri="{FF2B5EF4-FFF2-40B4-BE49-F238E27FC236}">
+                <a16:creationId xmlns:a16="http://schemas.microsoft.com/office/drawing/2014/main" id="{1BC490C6-9F7A-C0A3-5E86-3D4C3F2DB87B}"/>
+              </a:ext>
+            </a:extLst>
+          </p:cNvPr>
+          <p:cNvCxnSpPr>
+            <a:cxnSpLocks/>
+          </p:cNvCxnSpPr>
+          <p:nvPr/>
+        </p:nvCxnSpPr>
+        <p:spPr>
+          <a:xfrm>
+            <a:off x="8930725" y="4346119"/>
+            <a:ext cx="0" cy="213936"/>
+          </a:xfrm>
+          <a:prstGeom prst="straightConnector1">
+            <a:avLst/>
+          </a:prstGeom>
+          <a:ln>
+            <a:tailEnd type="none"/>
+          </a:ln>
+        </p:spPr>
+        <p:style>
+          <a:lnRef idx="2">
+            <a:schemeClr val="accent1"/>
+          </a:lnRef>
+          <a:fillRef idx="0">
+            <a:schemeClr val="accent1"/>
+          </a:fillRef>
+          <a:effectRef idx="1">
+            <a:schemeClr val="accent1"/>
+          </a:effectRef>
+          <a:fontRef idx="minor">
+            <a:schemeClr val="tx1"/>
+          </a:fontRef>
+        </p:style>
+      </p:cxnSp>
+      <p:cxnSp>
+        <p:nvCxnSpPr>
+          <p:cNvPr id="92" name="Straight Arrow Connector 91">
+            <a:extLst>
+              <a:ext uri="{FF2B5EF4-FFF2-40B4-BE49-F238E27FC236}">
+                <a16:creationId xmlns:a16="http://schemas.microsoft.com/office/drawing/2014/main" id="{A258B8B8-0DCC-7046-F080-D64CBE4BD6A0}"/>
+              </a:ext>
+            </a:extLst>
+          </p:cNvPr>
+          <p:cNvCxnSpPr>
+            <a:cxnSpLocks/>
+          </p:cNvCxnSpPr>
+          <p:nvPr/>
+        </p:nvCxnSpPr>
+        <p:spPr>
+          <a:xfrm>
+            <a:off x="8698040" y="4454260"/>
+            <a:ext cx="232685" cy="0"/>
+          </a:xfrm>
+          <a:prstGeom prst="straightConnector1">
+            <a:avLst/>
+          </a:prstGeom>
+          <a:ln>
+            <a:tailEnd type="none"/>
+          </a:ln>
+        </p:spPr>
+        <p:style>
+          <a:lnRef idx="2">
+            <a:schemeClr val="accent1"/>
+          </a:lnRef>
+          <a:fillRef idx="0">
+            <a:schemeClr val="accent1"/>
+          </a:fillRef>
+          <a:effectRef idx="1">
+            <a:schemeClr val="accent1"/>
+          </a:effectRef>
+          <a:fontRef idx="minor">
+            <a:schemeClr val="tx1"/>
+          </a:fontRef>
+        </p:style>
+      </p:cxnSp>
+      <p:sp>
+        <p:nvSpPr>
+          <p:cNvPr id="105" name="TextBox 104">
+            <a:extLst>
+              <a:ext uri="{FF2B5EF4-FFF2-40B4-BE49-F238E27FC236}">
+                <a16:creationId xmlns:a16="http://schemas.microsoft.com/office/drawing/2014/main" id="{0DEEFEFE-6A7C-4AE5-CCC3-83F00563D393}"/>
+              </a:ext>
+            </a:extLst>
+          </p:cNvPr>
+          <p:cNvSpPr txBox="1"/>
+          <p:nvPr/>
+        </p:nvSpPr>
+        <p:spPr>
+          <a:xfrm>
+            <a:off x="8640052" y="3387564"/>
+            <a:ext cx="671979" cy="230832"/>
+          </a:xfrm>
+          <a:prstGeom prst="rect">
+            <a:avLst/>
+          </a:prstGeom>
+          <a:noFill/>
+        </p:spPr>
+        <p:txBody>
+          <a:bodyPr wrap="none" rtlCol="0">
+            <a:spAutoFit/>
+          </a:bodyPr>
+          <a:lstStyle/>
+          <a:p>
+            <a:pPr algn="ctr"/>
+            <a:r>
+              <a:rPr lang="en-US" sz="900" dirty="0"/>
+              <a:t>Not equal</a:t>
+            </a:r>
           </a:p>
         </p:txBody>
       </p:sp>

--- a/RISCVstage2.pptx
+++ b/RISCVstage2.pptx
@@ -115,7 +115,7 @@
 <file path=ppt/revisionInfo.xml><?xml version="1.0" encoding="utf-8"?>
 <p1510:revInfo xmlns:a="http://schemas.openxmlformats.org/drawingml/2006/main" xmlns:r="http://schemas.openxmlformats.org/officeDocument/2006/relationships" xmlns:p1510="http://schemas.microsoft.com/office/powerpoint/2015/10/main">
   <p1510:revLst>
-    <p1510:client id="{38F3156C-1A0B-40A4-B506-136BA873DFD3}" v="6" dt="2026-03-05T22:38:07.501"/>
+    <p1510:client id="{38F3156C-1A0B-40A4-B506-136BA873DFD3}" v="3" dt="2026-03-10T03:59:35.312"/>
   </p1510:revLst>
 </p1510:revInfo>
 </file>
@@ -125,16 +125,48 @@
   <pc:docChgLst>
     <pc:chgData name="York, George W CIV USAF USAFA DF/DFEC" userId="1fb5875a-4594-4db2-80fb-f0db3de11280" providerId="ADAL" clId="{09330963-85FD-4C99-A81B-94D0EE5CFFEB}"/>
     <pc:docChg chg="custSel modSld">
-      <pc:chgData name="York, George W CIV USAF USAFA DF/DFEC" userId="1fb5875a-4594-4db2-80fb-f0db3de11280" providerId="ADAL" clId="{09330963-85FD-4C99-A81B-94D0EE5CFFEB}" dt="2026-03-05T22:38:07.500" v="11"/>
+      <pc:chgData name="York, George W CIV USAF USAFA DF/DFEC" userId="1fb5875a-4594-4db2-80fb-f0db3de11280" providerId="ADAL" clId="{09330963-85FD-4C99-A81B-94D0EE5CFFEB}" dt="2026-03-10T03:59:35.312" v="22"/>
       <pc:docMkLst>
         <pc:docMk/>
       </pc:docMkLst>
       <pc:sldChg chg="addSp delSp modSp mod">
-        <pc:chgData name="York, George W CIV USAF USAFA DF/DFEC" userId="1fb5875a-4594-4db2-80fb-f0db3de11280" providerId="ADAL" clId="{09330963-85FD-4C99-A81B-94D0EE5CFFEB}" dt="2026-03-05T22:38:07.500" v="11"/>
+        <pc:chgData name="York, George W CIV USAF USAFA DF/DFEC" userId="1fb5875a-4594-4db2-80fb-f0db3de11280" providerId="ADAL" clId="{09330963-85FD-4C99-A81B-94D0EE5CFFEB}" dt="2026-03-10T03:59:35.312" v="22"/>
         <pc:sldMkLst>
           <pc:docMk/>
           <pc:sldMk cId="1501170907" sldId="256"/>
         </pc:sldMkLst>
+        <pc:spChg chg="add mod">
+          <ac:chgData name="York, George W CIV USAF USAFA DF/DFEC" userId="1fb5875a-4594-4db2-80fb-f0db3de11280" providerId="ADAL" clId="{09330963-85FD-4C99-A81B-94D0EE5CFFEB}" dt="2026-03-10T03:59:35.312" v="22"/>
+          <ac:spMkLst>
+            <pc:docMk/>
+            <pc:sldMk cId="1501170907" sldId="256"/>
+            <ac:spMk id="26" creationId="{C78A4DC8-3C80-881E-FB81-42CE7A660FBF}"/>
+          </ac:spMkLst>
+        </pc:spChg>
+        <pc:spChg chg="add mod">
+          <ac:chgData name="York, George W CIV USAF USAFA DF/DFEC" userId="1fb5875a-4594-4db2-80fb-f0db3de11280" providerId="ADAL" clId="{09330963-85FD-4C99-A81B-94D0EE5CFFEB}" dt="2026-03-10T03:59:35.312" v="22"/>
+          <ac:spMkLst>
+            <pc:docMk/>
+            <pc:sldMk cId="1501170907" sldId="256"/>
+            <ac:spMk id="28" creationId="{FF31582E-8364-8CF1-92BA-63B0BC31CB78}"/>
+          </ac:spMkLst>
+        </pc:spChg>
+        <pc:spChg chg="add mod">
+          <ac:chgData name="York, George W CIV USAF USAFA DF/DFEC" userId="1fb5875a-4594-4db2-80fb-f0db3de11280" providerId="ADAL" clId="{09330963-85FD-4C99-A81B-94D0EE5CFFEB}" dt="2026-03-10T03:59:35.312" v="22"/>
+          <ac:spMkLst>
+            <pc:docMk/>
+            <pc:sldMk cId="1501170907" sldId="256"/>
+            <ac:spMk id="47" creationId="{CC388D4E-B582-ECD3-F069-D98CD3BAA839}"/>
+          </ac:spMkLst>
+        </pc:spChg>
+        <pc:spChg chg="add mod">
+          <ac:chgData name="York, George W CIV USAF USAFA DF/DFEC" userId="1fb5875a-4594-4db2-80fb-f0db3de11280" providerId="ADAL" clId="{09330963-85FD-4C99-A81B-94D0EE5CFFEB}" dt="2026-03-10T03:59:35.312" v="22"/>
+          <ac:spMkLst>
+            <pc:docMk/>
+            <pc:sldMk cId="1501170907" sldId="256"/>
+            <ac:spMk id="52" creationId="{0CCCD093-1D8B-D339-2269-5293EF85E0E3}"/>
+          </ac:spMkLst>
+        </pc:spChg>
         <pc:spChg chg="add mod">
           <ac:chgData name="York, George W CIV USAF USAFA DF/DFEC" userId="1fb5875a-4594-4db2-80fb-f0db3de11280" providerId="ADAL" clId="{09330963-85FD-4C99-A81B-94D0EE5CFFEB}" dt="2026-03-05T22:27:36.393" v="10"/>
           <ac:spMkLst>
@@ -175,8 +207,8 @@
             <ac:spMk id="84" creationId="{D1142331-E346-04E4-CE7D-40DA0254B7E8}"/>
           </ac:spMkLst>
         </pc:spChg>
-        <pc:spChg chg="add mod">
-          <ac:chgData name="York, George W CIV USAF USAFA DF/DFEC" userId="1fb5875a-4594-4db2-80fb-f0db3de11280" providerId="ADAL" clId="{09330963-85FD-4C99-A81B-94D0EE5CFFEB}" dt="2026-03-05T22:38:07.500" v="11"/>
+        <pc:spChg chg="add del mod">
+          <ac:chgData name="York, George W CIV USAF USAFA DF/DFEC" userId="1fb5875a-4594-4db2-80fb-f0db3de11280" providerId="ADAL" clId="{09330963-85FD-4C99-A81B-94D0EE5CFFEB}" dt="2026-03-10T03:59:17.858" v="20" actId="478"/>
           <ac:spMkLst>
             <pc:docMk/>
             <pc:sldMk cId="1501170907" sldId="256"/>
@@ -184,75 +216,27 @@
           </ac:spMkLst>
         </pc:spChg>
         <pc:spChg chg="del">
-          <ac:chgData name="York, George W CIV USAF USAFA DF/DFEC" userId="1fb5875a-4594-4db2-80fb-f0db3de11280" providerId="ADAL" clId="{09330963-85FD-4C99-A81B-94D0EE5CFFEB}" dt="2026-03-05T22:27:24.978" v="9" actId="478"/>
+          <ac:chgData name="York, George W CIV USAF USAFA DF/DFEC" userId="1fb5875a-4594-4db2-80fb-f0db3de11280" providerId="ADAL" clId="{09330963-85FD-4C99-A81B-94D0EE5CFFEB}" dt="2026-03-10T03:59:17.858" v="20" actId="478"/>
           <ac:spMkLst>
             <pc:docMk/>
             <pc:sldMk cId="1501170907" sldId="256"/>
-            <ac:spMk id="145" creationId="{D48BF948-61BF-AC37-8597-388094170D18}"/>
+            <ac:spMk id="264" creationId="{18102C07-F7E1-1AF1-477B-00B68F177F07}"/>
           </ac:spMkLst>
         </pc:spChg>
         <pc:spChg chg="del">
-          <ac:chgData name="York, George W CIV USAF USAFA DF/DFEC" userId="1fb5875a-4594-4db2-80fb-f0db3de11280" providerId="ADAL" clId="{09330963-85FD-4C99-A81B-94D0EE5CFFEB}" dt="2026-03-05T22:27:24.978" v="9" actId="478"/>
+          <ac:chgData name="York, George W CIV USAF USAFA DF/DFEC" userId="1fb5875a-4594-4db2-80fb-f0db3de11280" providerId="ADAL" clId="{09330963-85FD-4C99-A81B-94D0EE5CFFEB}" dt="2026-03-10T03:59:17.858" v="20" actId="478"/>
           <ac:spMkLst>
             <pc:docMk/>
             <pc:sldMk cId="1501170907" sldId="256"/>
-            <ac:spMk id="146" creationId="{69719632-7E59-F7B2-AEF4-E4C30AA0AEF2}"/>
+            <ac:spMk id="265" creationId="{00A05C49-A5A2-CC74-BAEB-00CF47323BC9}"/>
           </ac:spMkLst>
         </pc:spChg>
         <pc:spChg chg="del">
-          <ac:chgData name="York, George W CIV USAF USAFA DF/DFEC" userId="1fb5875a-4594-4db2-80fb-f0db3de11280" providerId="ADAL" clId="{09330963-85FD-4C99-A81B-94D0EE5CFFEB}" dt="2026-03-05T22:27:24.978" v="9" actId="478"/>
+          <ac:chgData name="York, George W CIV USAF USAFA DF/DFEC" userId="1fb5875a-4594-4db2-80fb-f0db3de11280" providerId="ADAL" clId="{09330963-85FD-4C99-A81B-94D0EE5CFFEB}" dt="2026-03-10T03:59:17.858" v="20" actId="478"/>
           <ac:spMkLst>
             <pc:docMk/>
             <pc:sldMk cId="1501170907" sldId="256"/>
-            <ac:spMk id="148" creationId="{6432B689-7D1C-F807-6B45-D8272427DA3A}"/>
-          </ac:spMkLst>
-        </pc:spChg>
-        <pc:spChg chg="del">
-          <ac:chgData name="York, George W CIV USAF USAFA DF/DFEC" userId="1fb5875a-4594-4db2-80fb-f0db3de11280" providerId="ADAL" clId="{09330963-85FD-4C99-A81B-94D0EE5CFFEB}" dt="2026-03-05T22:27:24.978" v="9" actId="478"/>
-          <ac:spMkLst>
-            <pc:docMk/>
-            <pc:sldMk cId="1501170907" sldId="256"/>
-            <ac:spMk id="149" creationId="{831B5896-D57B-4667-02CD-6AAF11DEE5E2}"/>
-          </ac:spMkLst>
-        </pc:spChg>
-        <pc:spChg chg="del">
-          <ac:chgData name="York, George W CIV USAF USAFA DF/DFEC" userId="1fb5875a-4594-4db2-80fb-f0db3de11280" providerId="ADAL" clId="{09330963-85FD-4C99-A81B-94D0EE5CFFEB}" dt="2026-03-05T22:27:24.978" v="9" actId="478"/>
-          <ac:spMkLst>
-            <pc:docMk/>
-            <pc:sldMk cId="1501170907" sldId="256"/>
-            <ac:spMk id="151" creationId="{BC6DDD09-EA41-1470-2429-DBE27164913F}"/>
-          </ac:spMkLst>
-        </pc:spChg>
-        <pc:spChg chg="del">
-          <ac:chgData name="York, George W CIV USAF USAFA DF/DFEC" userId="1fb5875a-4594-4db2-80fb-f0db3de11280" providerId="ADAL" clId="{09330963-85FD-4C99-A81B-94D0EE5CFFEB}" dt="2026-03-05T22:27:24.978" v="9" actId="478"/>
-          <ac:spMkLst>
-            <pc:docMk/>
-            <pc:sldMk cId="1501170907" sldId="256"/>
-            <ac:spMk id="155" creationId="{75FA3F6B-D94A-A494-28FD-7D4F921979A2}"/>
-          </ac:spMkLst>
-        </pc:spChg>
-        <pc:spChg chg="del">
-          <ac:chgData name="York, George W CIV USAF USAFA DF/DFEC" userId="1fb5875a-4594-4db2-80fb-f0db3de11280" providerId="ADAL" clId="{09330963-85FD-4C99-A81B-94D0EE5CFFEB}" dt="2026-03-05T22:27:24.978" v="9" actId="478"/>
-          <ac:spMkLst>
-            <pc:docMk/>
-            <pc:sldMk cId="1501170907" sldId="256"/>
-            <ac:spMk id="160" creationId="{3BF5B236-4D8B-849D-0CDF-2CB1B5EE7284}"/>
-          </ac:spMkLst>
-        </pc:spChg>
-        <pc:spChg chg="del">
-          <ac:chgData name="York, George W CIV USAF USAFA DF/DFEC" userId="1fb5875a-4594-4db2-80fb-f0db3de11280" providerId="ADAL" clId="{09330963-85FD-4C99-A81B-94D0EE5CFFEB}" dt="2026-03-05T22:27:24.978" v="9" actId="478"/>
-          <ac:spMkLst>
-            <pc:docMk/>
-            <pc:sldMk cId="1501170907" sldId="256"/>
-            <ac:spMk id="161" creationId="{0E9784F2-B3AB-C0FA-FDFE-48C83AB9B12E}"/>
-          </ac:spMkLst>
-        </pc:spChg>
-        <pc:spChg chg="del">
-          <ac:chgData name="York, George W CIV USAF USAFA DF/DFEC" userId="1fb5875a-4594-4db2-80fb-f0db3de11280" providerId="ADAL" clId="{09330963-85FD-4C99-A81B-94D0EE5CFFEB}" dt="2026-03-05T22:27:24.978" v="9" actId="478"/>
-          <ac:spMkLst>
-            <pc:docMk/>
-            <pc:sldMk cId="1501170907" sldId="256"/>
-            <ac:spMk id="270" creationId="{E335D321-53C8-872A-430E-7732E67F0A79}"/>
+            <ac:spMk id="266" creationId="{B178740B-BE6B-31B0-B4FD-0ED1D3EABF36}"/>
           </ac:spMkLst>
         </pc:spChg>
         <pc:grpChg chg="add mod">
@@ -269,6 +253,14 @@
             <pc:docMk/>
             <pc:sldMk cId="1501170907" sldId="256"/>
             <ac:grpSpMk id="61" creationId="{16FC76F5-1B0B-DFD2-2DFE-467D7246D31F}"/>
+          </ac:grpSpMkLst>
+        </pc:grpChg>
+        <pc:grpChg chg="del">
+          <ac:chgData name="York, George W CIV USAF USAFA DF/DFEC" userId="1fb5875a-4594-4db2-80fb-f0db3de11280" providerId="ADAL" clId="{09330963-85FD-4C99-A81B-94D0EE5CFFEB}" dt="2026-03-10T03:59:17.858" v="20" actId="478"/>
+          <ac:grpSpMkLst>
+            <pc:docMk/>
+            <pc:sldMk cId="1501170907" sldId="256"/>
+            <ac:grpSpMk id="175" creationId="{CF1E05C7-0258-A1DB-5D4E-EA66C6CAA296}"/>
           </ac:grpSpMkLst>
         </pc:grpChg>
         <pc:picChg chg="mod">
@@ -288,23 +280,31 @@
           </ac:picMkLst>
         </pc:picChg>
         <pc:cxnChg chg="add mod">
-          <ac:chgData name="York, George W CIV USAF USAFA DF/DFEC" userId="1fb5875a-4594-4db2-80fb-f0db3de11280" providerId="ADAL" clId="{09330963-85FD-4C99-A81B-94D0EE5CFFEB}" dt="2026-03-05T22:26:00.956" v="1"/>
+          <ac:chgData name="York, George W CIV USAF USAFA DF/DFEC" userId="1fb5875a-4594-4db2-80fb-f0db3de11280" providerId="ADAL" clId="{09330963-85FD-4C99-A81B-94D0EE5CFFEB}" dt="2026-03-10T03:59:35.312" v="22"/>
+          <ac:cxnSpMkLst>
+            <pc:docMk/>
+            <pc:sldMk cId="1501170907" sldId="256"/>
+            <ac:cxnSpMk id="17" creationId="{31DB38F9-E090-4FB9-FA0F-47CDA73DF572}"/>
+          </ac:cxnSpMkLst>
+        </pc:cxnChg>
+        <pc:cxnChg chg="add del mod">
+          <ac:chgData name="York, George W CIV USAF USAFA DF/DFEC" userId="1fb5875a-4594-4db2-80fb-f0db3de11280" providerId="ADAL" clId="{09330963-85FD-4C99-A81B-94D0EE5CFFEB}" dt="2026-03-10T03:49:54.583" v="16" actId="478"/>
           <ac:cxnSpMkLst>
             <pc:docMk/>
             <pc:sldMk cId="1501170907" sldId="256"/>
             <ac:cxnSpMk id="17" creationId="{D24E488E-A173-AFA0-3F6A-78FF8CC6952B}"/>
           </ac:cxnSpMkLst>
         </pc:cxnChg>
-        <pc:cxnChg chg="add mod">
-          <ac:chgData name="York, George W CIV USAF USAFA DF/DFEC" userId="1fb5875a-4594-4db2-80fb-f0db3de11280" providerId="ADAL" clId="{09330963-85FD-4C99-A81B-94D0EE5CFFEB}" dt="2026-03-05T22:26:00.956" v="1"/>
+        <pc:cxnChg chg="add del mod">
+          <ac:chgData name="York, George W CIV USAF USAFA DF/DFEC" userId="1fb5875a-4594-4db2-80fb-f0db3de11280" providerId="ADAL" clId="{09330963-85FD-4C99-A81B-94D0EE5CFFEB}" dt="2026-03-10T03:49:53.700" v="15" actId="478"/>
           <ac:cxnSpMkLst>
             <pc:docMk/>
             <pc:sldMk cId="1501170907" sldId="256"/>
             <ac:cxnSpMk id="26" creationId="{EFC7A41C-61ED-49E4-BA0B-27EC82F62902}"/>
           </ac:cxnSpMkLst>
         </pc:cxnChg>
-        <pc:cxnChg chg="add mod">
-          <ac:chgData name="York, George W CIV USAF USAFA DF/DFEC" userId="1fb5875a-4594-4db2-80fb-f0db3de11280" providerId="ADAL" clId="{09330963-85FD-4C99-A81B-94D0EE5CFFEB}" dt="2026-03-05T22:26:00.956" v="1"/>
+        <pc:cxnChg chg="add del mod">
+          <ac:chgData name="York, George W CIV USAF USAFA DF/DFEC" userId="1fb5875a-4594-4db2-80fb-f0db3de11280" providerId="ADAL" clId="{09330963-85FD-4C99-A81B-94D0EE5CFFEB}" dt="2026-03-10T03:49:55.400" v="17" actId="478"/>
           <ac:cxnSpMkLst>
             <pc:docMk/>
             <pc:sldMk cId="1501170907" sldId="256"/>
@@ -343,8 +343,8 @@
             <ac:cxnSpMk id="38" creationId="{4D9B3B66-045C-4BC7-2F4D-857D0D686CD3}"/>
           </ac:cxnSpMkLst>
         </pc:cxnChg>
-        <pc:cxnChg chg="add mod">
-          <ac:chgData name="York, George W CIV USAF USAFA DF/DFEC" userId="1fb5875a-4594-4db2-80fb-f0db3de11280" providerId="ADAL" clId="{09330963-85FD-4C99-A81B-94D0EE5CFFEB}" dt="2026-03-05T22:27:08.932" v="8"/>
+        <pc:cxnChg chg="add del mod">
+          <ac:chgData name="York, George W CIV USAF USAFA DF/DFEC" userId="1fb5875a-4594-4db2-80fb-f0db3de11280" providerId="ADAL" clId="{09330963-85FD-4C99-A81B-94D0EE5CFFEB}" dt="2026-03-10T03:49:51.970" v="14" actId="478"/>
           <ac:cxnSpMkLst>
             <pc:docMk/>
             <pc:sldMk cId="1501170907" sldId="256"/>
@@ -352,15 +352,23 @@
           </ac:cxnSpMkLst>
         </pc:cxnChg>
         <pc:cxnChg chg="add mod">
-          <ac:chgData name="York, George W CIV USAF USAFA DF/DFEC" userId="1fb5875a-4594-4db2-80fb-f0db3de11280" providerId="ADAL" clId="{09330963-85FD-4C99-A81B-94D0EE5CFFEB}" dt="2026-03-05T22:27:08.932" v="8"/>
+          <ac:chgData name="York, George W CIV USAF USAFA DF/DFEC" userId="1fb5875a-4594-4db2-80fb-f0db3de11280" providerId="ADAL" clId="{09330963-85FD-4C99-A81B-94D0EE5CFFEB}" dt="2026-03-10T03:59:35.312" v="22"/>
+          <ac:cxnSpMkLst>
+            <pc:docMk/>
+            <pc:sldMk cId="1501170907" sldId="256"/>
+            <ac:cxnSpMk id="39" creationId="{7804F544-7548-D877-9F4A-794E86AF3151}"/>
+          </ac:cxnSpMkLst>
+        </pc:cxnChg>
+        <pc:cxnChg chg="add del mod">
+          <ac:chgData name="York, George W CIV USAF USAFA DF/DFEC" userId="1fb5875a-4594-4db2-80fb-f0db3de11280" providerId="ADAL" clId="{09330963-85FD-4C99-A81B-94D0EE5CFFEB}" dt="2026-03-10T03:49:50.703" v="13" actId="478"/>
           <ac:cxnSpMkLst>
             <pc:docMk/>
             <pc:sldMk cId="1501170907" sldId="256"/>
             <ac:cxnSpMk id="47" creationId="{8A262BB7-393A-3D10-4768-BA19460EE16D}"/>
           </ac:cxnSpMkLst>
         </pc:cxnChg>
-        <pc:cxnChg chg="add mod">
-          <ac:chgData name="York, George W CIV USAF USAFA DF/DFEC" userId="1fb5875a-4594-4db2-80fb-f0db3de11280" providerId="ADAL" clId="{09330963-85FD-4C99-A81B-94D0EE5CFFEB}" dt="2026-03-05T22:27:08.932" v="8"/>
+        <pc:cxnChg chg="add del mod">
+          <ac:chgData name="York, George W CIV USAF USAFA DF/DFEC" userId="1fb5875a-4594-4db2-80fb-f0db3de11280" providerId="ADAL" clId="{09330963-85FD-4C99-A81B-94D0EE5CFFEB}" dt="2026-03-10T03:49:49.677" v="12" actId="478"/>
           <ac:cxnSpMkLst>
             <pc:docMk/>
             <pc:sldMk cId="1501170907" sldId="256"/>
@@ -399,44 +407,76 @@
             <ac:cxnSpMk id="92" creationId="{A258B8B8-0DCC-7046-F080-D64CBE4BD6A0}"/>
           </ac:cxnSpMkLst>
         </pc:cxnChg>
-        <pc:cxnChg chg="del">
-          <ac:chgData name="York, George W CIV USAF USAFA DF/DFEC" userId="1fb5875a-4594-4db2-80fb-f0db3de11280" providerId="ADAL" clId="{09330963-85FD-4C99-A81B-94D0EE5CFFEB}" dt="2026-03-05T22:26:34.461" v="4" actId="478"/>
+        <pc:cxnChg chg="add mod">
+          <ac:chgData name="York, George W CIV USAF USAFA DF/DFEC" userId="1fb5875a-4594-4db2-80fb-f0db3de11280" providerId="ADAL" clId="{09330963-85FD-4C99-A81B-94D0EE5CFFEB}" dt="2026-03-10T03:50:28.651" v="18"/>
           <ac:cxnSpMkLst>
             <pc:docMk/>
             <pc:sldMk cId="1501170907" sldId="256"/>
-            <ac:cxnSpMk id="105" creationId="{96194351-1F6F-6ECD-551A-2B077972FE1F}"/>
+            <ac:cxnSpMk id="106" creationId="{EF1EA85E-B4DD-CD65-B4DF-4B4DB8B39F46}"/>
+          </ac:cxnSpMkLst>
+        </pc:cxnChg>
+        <pc:cxnChg chg="add mod">
+          <ac:chgData name="York, George W CIV USAF USAFA DF/DFEC" userId="1fb5875a-4594-4db2-80fb-f0db3de11280" providerId="ADAL" clId="{09330963-85FD-4C99-A81B-94D0EE5CFFEB}" dt="2026-03-10T03:50:28.651" v="18"/>
+          <ac:cxnSpMkLst>
+            <pc:docMk/>
+            <pc:sldMk cId="1501170907" sldId="256"/>
+            <ac:cxnSpMk id="107" creationId="{79860AC4-97D8-03B3-AF86-AB6DE017878E}"/>
+          </ac:cxnSpMkLst>
+        </pc:cxnChg>
+        <pc:cxnChg chg="add mod">
+          <ac:chgData name="York, George W CIV USAF USAFA DF/DFEC" userId="1fb5875a-4594-4db2-80fb-f0db3de11280" providerId="ADAL" clId="{09330963-85FD-4C99-A81B-94D0EE5CFFEB}" dt="2026-03-10T03:50:39.938" v="19"/>
+          <ac:cxnSpMkLst>
+            <pc:docMk/>
+            <pc:sldMk cId="1501170907" sldId="256"/>
+            <ac:cxnSpMk id="108" creationId="{3F5D046F-4CDC-941C-775F-ABA64AB9D3A8}"/>
+          </ac:cxnSpMkLst>
+        </pc:cxnChg>
+        <pc:cxnChg chg="add mod">
+          <ac:chgData name="York, George W CIV USAF USAFA DF/DFEC" userId="1fb5875a-4594-4db2-80fb-f0db3de11280" providerId="ADAL" clId="{09330963-85FD-4C99-A81B-94D0EE5CFFEB}" dt="2026-03-10T03:50:39.938" v="19"/>
+          <ac:cxnSpMkLst>
+            <pc:docMk/>
+            <pc:sldMk cId="1501170907" sldId="256"/>
+            <ac:cxnSpMk id="109" creationId="{92BCAF6F-B9A4-9C21-9FF9-B23BDE25056A}"/>
+          </ac:cxnSpMkLst>
+        </pc:cxnChg>
+        <pc:cxnChg chg="add mod">
+          <ac:chgData name="York, George W CIV USAF USAFA DF/DFEC" userId="1fb5875a-4594-4db2-80fb-f0db3de11280" providerId="ADAL" clId="{09330963-85FD-4C99-A81B-94D0EE5CFFEB}" dt="2026-03-10T03:59:35.312" v="22"/>
+          <ac:cxnSpMkLst>
+            <pc:docMk/>
+            <pc:sldMk cId="1501170907" sldId="256"/>
+            <ac:cxnSpMk id="110" creationId="{93EEA11B-25C2-49C4-CEFB-DC750F39B294}"/>
           </ac:cxnSpMkLst>
         </pc:cxnChg>
         <pc:cxnChg chg="del">
-          <ac:chgData name="York, George W CIV USAF USAFA DF/DFEC" userId="1fb5875a-4594-4db2-80fb-f0db3de11280" providerId="ADAL" clId="{09330963-85FD-4C99-A81B-94D0EE5CFFEB}" dt="2026-03-05T22:27:24.978" v="9" actId="478"/>
+          <ac:chgData name="York, George W CIV USAF USAFA DF/DFEC" userId="1fb5875a-4594-4db2-80fb-f0db3de11280" providerId="ADAL" clId="{09330963-85FD-4C99-A81B-94D0EE5CFFEB}" dt="2026-03-10T03:59:17.858" v="20" actId="478"/>
           <ac:cxnSpMkLst>
             <pc:docMk/>
             <pc:sldMk cId="1501170907" sldId="256"/>
-            <ac:cxnSpMk id="152" creationId="{0B969FF2-6DAD-23DC-28B8-ACF737E02DB2}"/>
+            <ac:cxnSpMk id="183" creationId="{FD895F0D-4BF5-DC7B-F7F3-413542C80AFB}"/>
           </ac:cxnSpMkLst>
         </pc:cxnChg>
         <pc:cxnChg chg="del">
-          <ac:chgData name="York, George W CIV USAF USAFA DF/DFEC" userId="1fb5875a-4594-4db2-80fb-f0db3de11280" providerId="ADAL" clId="{09330963-85FD-4C99-A81B-94D0EE5CFFEB}" dt="2026-03-05T22:26:15.926" v="2" actId="478"/>
+          <ac:chgData name="York, George W CIV USAF USAFA DF/DFEC" userId="1fb5875a-4594-4db2-80fb-f0db3de11280" providerId="ADAL" clId="{09330963-85FD-4C99-A81B-94D0EE5CFFEB}" dt="2026-03-10T03:59:17.858" v="20" actId="478"/>
           <ac:cxnSpMkLst>
             <pc:docMk/>
             <pc:sldMk cId="1501170907" sldId="256"/>
-            <ac:cxnSpMk id="245" creationId="{44285445-3673-F463-34B1-B7F351676027}"/>
+            <ac:cxnSpMk id="185" creationId="{8A322888-ED2A-D52F-5D81-55A9F50D831D}"/>
           </ac:cxnSpMkLst>
         </pc:cxnChg>
         <pc:cxnChg chg="del">
-          <ac:chgData name="York, George W CIV USAF USAFA DF/DFEC" userId="1fb5875a-4594-4db2-80fb-f0db3de11280" providerId="ADAL" clId="{09330963-85FD-4C99-A81B-94D0EE5CFFEB}" dt="2026-03-05T22:27:07.655" v="7" actId="478"/>
+          <ac:chgData name="York, George W CIV USAF USAFA DF/DFEC" userId="1fb5875a-4594-4db2-80fb-f0db3de11280" providerId="ADAL" clId="{09330963-85FD-4C99-A81B-94D0EE5CFFEB}" dt="2026-03-10T03:59:20.624" v="21" actId="478"/>
           <ac:cxnSpMkLst>
             <pc:docMk/>
             <pc:sldMk cId="1501170907" sldId="256"/>
-            <ac:cxnSpMk id="275" creationId="{FF5E826E-C5DA-266A-3DEA-9D97594449EE}"/>
+            <ac:cxnSpMk id="276" creationId="{370ACF3C-5A72-31AC-3830-8B43C336935F}"/>
           </ac:cxnSpMkLst>
         </pc:cxnChg>
         <pc:cxnChg chg="del">
-          <ac:chgData name="York, George W CIV USAF USAFA DF/DFEC" userId="1fb5875a-4594-4db2-80fb-f0db3de11280" providerId="ADAL" clId="{09330963-85FD-4C99-A81B-94D0EE5CFFEB}" dt="2026-03-05T22:25:59.379" v="0" actId="478"/>
+          <ac:chgData name="York, George W CIV USAF USAFA DF/DFEC" userId="1fb5875a-4594-4db2-80fb-f0db3de11280" providerId="ADAL" clId="{09330963-85FD-4C99-A81B-94D0EE5CFFEB}" dt="2026-03-10T03:59:17.858" v="20" actId="478"/>
           <ac:cxnSpMkLst>
             <pc:docMk/>
             <pc:sldMk cId="1501170907" sldId="256"/>
-            <ac:cxnSpMk id="315" creationId="{CC2E6CF6-7F9B-DF2E-8401-A11C6FFE7D1D}"/>
+            <ac:cxnSpMk id="280" creationId="{BF12A351-142A-23D7-36BD-9308B9D720AA}"/>
           </ac:cxnSpMkLst>
         </pc:cxnChg>
       </pc:sldChg>
@@ -592,7 +632,7 @@
           <a:p>
             <a:fld id="{51AFF834-1BEC-4F95-9622-28B5DCC1FE16}" type="datetimeFigureOut">
               <a:rPr lang="en-US" smtClean="0"/>
-              <a:t>3/5/2026</a:t>
+              <a:t>3/9/2026</a:t>
             </a:fld>
             <a:endParaRPr lang="en-US"/>
           </a:p>
@@ -790,7 +830,7 @@
           <a:p>
             <a:fld id="{51AFF834-1BEC-4F95-9622-28B5DCC1FE16}" type="datetimeFigureOut">
               <a:rPr lang="en-US" smtClean="0"/>
-              <a:t>3/5/2026</a:t>
+              <a:t>3/9/2026</a:t>
             </a:fld>
             <a:endParaRPr lang="en-US"/>
           </a:p>
@@ -998,7 +1038,7 @@
           <a:p>
             <a:fld id="{51AFF834-1BEC-4F95-9622-28B5DCC1FE16}" type="datetimeFigureOut">
               <a:rPr lang="en-US" smtClean="0"/>
-              <a:t>3/5/2026</a:t>
+              <a:t>3/9/2026</a:t>
             </a:fld>
             <a:endParaRPr lang="en-US"/>
           </a:p>
@@ -1196,7 +1236,7 @@
           <a:p>
             <a:fld id="{51AFF834-1BEC-4F95-9622-28B5DCC1FE16}" type="datetimeFigureOut">
               <a:rPr lang="en-US" smtClean="0"/>
-              <a:t>3/5/2026</a:t>
+              <a:t>3/9/2026</a:t>
             </a:fld>
             <a:endParaRPr lang="en-US"/>
           </a:p>
@@ -1471,7 +1511,7 @@
           <a:p>
             <a:fld id="{51AFF834-1BEC-4F95-9622-28B5DCC1FE16}" type="datetimeFigureOut">
               <a:rPr lang="en-US" smtClean="0"/>
-              <a:t>3/5/2026</a:t>
+              <a:t>3/9/2026</a:t>
             </a:fld>
             <a:endParaRPr lang="en-US"/>
           </a:p>
@@ -1736,7 +1776,7 @@
           <a:p>
             <a:fld id="{51AFF834-1BEC-4F95-9622-28B5DCC1FE16}" type="datetimeFigureOut">
               <a:rPr lang="en-US" smtClean="0"/>
-              <a:t>3/5/2026</a:t>
+              <a:t>3/9/2026</a:t>
             </a:fld>
             <a:endParaRPr lang="en-US"/>
           </a:p>
@@ -2148,7 +2188,7 @@
           <a:p>
             <a:fld id="{51AFF834-1BEC-4F95-9622-28B5DCC1FE16}" type="datetimeFigureOut">
               <a:rPr lang="en-US" smtClean="0"/>
-              <a:t>3/5/2026</a:t>
+              <a:t>3/9/2026</a:t>
             </a:fld>
             <a:endParaRPr lang="en-US"/>
           </a:p>
@@ -2289,7 +2329,7 @@
           <a:p>
             <a:fld id="{51AFF834-1BEC-4F95-9622-28B5DCC1FE16}" type="datetimeFigureOut">
               <a:rPr lang="en-US" smtClean="0"/>
-              <a:t>3/5/2026</a:t>
+              <a:t>3/9/2026</a:t>
             </a:fld>
             <a:endParaRPr lang="en-US"/>
           </a:p>
@@ -2402,7 +2442,7 @@
           <a:p>
             <a:fld id="{51AFF834-1BEC-4F95-9622-28B5DCC1FE16}" type="datetimeFigureOut">
               <a:rPr lang="en-US" smtClean="0"/>
-              <a:t>3/5/2026</a:t>
+              <a:t>3/9/2026</a:t>
             </a:fld>
             <a:endParaRPr lang="en-US"/>
           </a:p>
@@ -2713,7 +2753,7 @@
           <a:p>
             <a:fld id="{51AFF834-1BEC-4F95-9622-28B5DCC1FE16}" type="datetimeFigureOut">
               <a:rPr lang="en-US" smtClean="0"/>
-              <a:t>3/5/2026</a:t>
+              <a:t>3/9/2026</a:t>
             </a:fld>
             <a:endParaRPr lang="en-US"/>
           </a:p>
@@ -3001,7 +3041,7 @@
           <a:p>
             <a:fld id="{51AFF834-1BEC-4F95-9622-28B5DCC1FE16}" type="datetimeFigureOut">
               <a:rPr lang="en-US" smtClean="0"/>
-              <a:t>3/5/2026</a:t>
+              <a:t>3/9/2026</a:t>
             </a:fld>
             <a:endParaRPr lang="en-US"/>
           </a:p>
@@ -3242,7 +3282,7 @@
           <a:p>
             <a:fld id="{51AFF834-1BEC-4F95-9622-28B5DCC1FE16}" type="datetimeFigureOut">
               <a:rPr lang="en-US" smtClean="0"/>
-              <a:t>3/5/2026</a:t>
+              <a:t>3/9/2026</a:t>
             </a:fld>
             <a:endParaRPr lang="en-US"/>
           </a:p>
@@ -7095,373 +7135,6 @@
       </p:cxnSp>
       <p:grpSp>
         <p:nvGrpSpPr>
-          <p:cNvPr id="175" name="Group 174">
-            <a:extLst>
-              <a:ext uri="{FF2B5EF4-FFF2-40B4-BE49-F238E27FC236}">
-                <a16:creationId xmlns:a16="http://schemas.microsoft.com/office/drawing/2014/main" id="{CF1E05C7-0258-A1DB-5D4E-EA66C6CAA296}"/>
-              </a:ext>
-            </a:extLst>
-          </p:cNvPr>
-          <p:cNvGrpSpPr/>
-          <p:nvPr/>
-        </p:nvGrpSpPr>
-        <p:grpSpPr>
-          <a:xfrm>
-            <a:off x="8385327" y="3269097"/>
-            <a:ext cx="292770" cy="637674"/>
-            <a:chOff x="1074820" y="1507958"/>
-            <a:chExt cx="292770" cy="637674"/>
-          </a:xfrm>
-        </p:grpSpPr>
-        <p:cxnSp>
-          <p:nvCxnSpPr>
-            <p:cNvPr id="176" name="Straight Connector 175">
-              <a:extLst>
-                <a:ext uri="{FF2B5EF4-FFF2-40B4-BE49-F238E27FC236}">
-                  <a16:creationId xmlns:a16="http://schemas.microsoft.com/office/drawing/2014/main" id="{9B1C3327-A611-2BA8-B007-9186CF3A0E42}"/>
-                </a:ext>
-              </a:extLst>
-            </p:cNvPr>
-            <p:cNvCxnSpPr>
-              <a:cxnSpLocks/>
-            </p:cNvCxnSpPr>
-            <p:nvPr/>
-          </p:nvCxnSpPr>
-          <p:spPr>
-            <a:xfrm>
-              <a:off x="1074821" y="1507958"/>
-              <a:ext cx="0" cy="212558"/>
-            </a:xfrm>
-            <a:prstGeom prst="line">
-              <a:avLst/>
-            </a:prstGeom>
-          </p:spPr>
-          <p:style>
-            <a:lnRef idx="2">
-              <a:schemeClr val="accent1"/>
-            </a:lnRef>
-            <a:fillRef idx="0">
-              <a:schemeClr val="accent1"/>
-            </a:fillRef>
-            <a:effectRef idx="1">
-              <a:schemeClr val="accent1"/>
-            </a:effectRef>
-            <a:fontRef idx="minor">
-              <a:schemeClr val="tx1"/>
-            </a:fontRef>
-          </p:style>
-        </p:cxnSp>
-        <p:cxnSp>
-          <p:nvCxnSpPr>
-            <p:cNvPr id="177" name="Straight Connector 176">
-              <a:extLst>
-                <a:ext uri="{FF2B5EF4-FFF2-40B4-BE49-F238E27FC236}">
-                  <a16:creationId xmlns:a16="http://schemas.microsoft.com/office/drawing/2014/main" id="{3874B16B-1236-9BD1-3E90-062756FAD0B0}"/>
-                </a:ext>
-              </a:extLst>
-            </p:cNvPr>
-            <p:cNvCxnSpPr>
-              <a:cxnSpLocks/>
-            </p:cNvCxnSpPr>
-            <p:nvPr/>
-          </p:nvCxnSpPr>
-          <p:spPr>
-            <a:xfrm>
-              <a:off x="1367590" y="1720516"/>
-              <a:ext cx="0" cy="212558"/>
-            </a:xfrm>
-            <a:prstGeom prst="line">
-              <a:avLst/>
-            </a:prstGeom>
-          </p:spPr>
-          <p:style>
-            <a:lnRef idx="2">
-              <a:schemeClr val="accent1"/>
-            </a:lnRef>
-            <a:fillRef idx="0">
-              <a:schemeClr val="accent1"/>
-            </a:fillRef>
-            <a:effectRef idx="1">
-              <a:schemeClr val="accent1"/>
-            </a:effectRef>
-            <a:fontRef idx="minor">
-              <a:schemeClr val="tx1"/>
-            </a:fontRef>
-          </p:style>
-        </p:cxnSp>
-        <p:cxnSp>
-          <p:nvCxnSpPr>
-            <p:cNvPr id="178" name="Straight Connector 177">
-              <a:extLst>
-                <a:ext uri="{FF2B5EF4-FFF2-40B4-BE49-F238E27FC236}">
-                  <a16:creationId xmlns:a16="http://schemas.microsoft.com/office/drawing/2014/main" id="{C545D7D5-18F9-460B-16FB-45A5E5B3036A}"/>
-                </a:ext>
-              </a:extLst>
-            </p:cNvPr>
-            <p:cNvCxnSpPr>
-              <a:cxnSpLocks/>
-            </p:cNvCxnSpPr>
-            <p:nvPr/>
-          </p:nvCxnSpPr>
-          <p:spPr>
-            <a:xfrm>
-              <a:off x="1074821" y="1933074"/>
-              <a:ext cx="0" cy="212558"/>
-            </a:xfrm>
-            <a:prstGeom prst="line">
-              <a:avLst/>
-            </a:prstGeom>
-          </p:spPr>
-          <p:style>
-            <a:lnRef idx="2">
-              <a:schemeClr val="accent1"/>
-            </a:lnRef>
-            <a:fillRef idx="0">
-              <a:schemeClr val="accent1"/>
-            </a:fillRef>
-            <a:effectRef idx="1">
-              <a:schemeClr val="accent1"/>
-            </a:effectRef>
-            <a:fontRef idx="minor">
-              <a:schemeClr val="tx1"/>
-            </a:fontRef>
-          </p:style>
-        </p:cxnSp>
-        <p:cxnSp>
-          <p:nvCxnSpPr>
-            <p:cNvPr id="179" name="Straight Connector 178">
-              <a:extLst>
-                <a:ext uri="{FF2B5EF4-FFF2-40B4-BE49-F238E27FC236}">
-                  <a16:creationId xmlns:a16="http://schemas.microsoft.com/office/drawing/2014/main" id="{18D96393-1B92-25C8-CCC7-A10F33059DC8}"/>
-                </a:ext>
-              </a:extLst>
-            </p:cNvPr>
-            <p:cNvCxnSpPr>
-              <a:cxnSpLocks/>
-            </p:cNvCxnSpPr>
-            <p:nvPr/>
-          </p:nvCxnSpPr>
-          <p:spPr>
-            <a:xfrm flipH="1">
-              <a:off x="1074821" y="1936227"/>
-              <a:ext cx="292769" cy="209405"/>
-            </a:xfrm>
-            <a:prstGeom prst="line">
-              <a:avLst/>
-            </a:prstGeom>
-          </p:spPr>
-          <p:style>
-            <a:lnRef idx="2">
-              <a:schemeClr val="accent1"/>
-            </a:lnRef>
-            <a:fillRef idx="0">
-              <a:schemeClr val="accent1"/>
-            </a:fillRef>
-            <a:effectRef idx="1">
-              <a:schemeClr val="accent1"/>
-            </a:effectRef>
-            <a:fontRef idx="minor">
-              <a:schemeClr val="tx1"/>
-            </a:fontRef>
-          </p:style>
-        </p:cxnSp>
-        <p:cxnSp>
-          <p:nvCxnSpPr>
-            <p:cNvPr id="180" name="Straight Connector 179">
-              <a:extLst>
-                <a:ext uri="{FF2B5EF4-FFF2-40B4-BE49-F238E27FC236}">
-                  <a16:creationId xmlns:a16="http://schemas.microsoft.com/office/drawing/2014/main" id="{753456A5-2F22-6878-6368-381F766CB36D}"/>
-                </a:ext>
-              </a:extLst>
-            </p:cNvPr>
-            <p:cNvCxnSpPr>
-              <a:cxnSpLocks/>
-            </p:cNvCxnSpPr>
-            <p:nvPr/>
-          </p:nvCxnSpPr>
-          <p:spPr>
-            <a:xfrm flipH="1" flipV="1">
-              <a:off x="1074821" y="1507958"/>
-              <a:ext cx="292769" cy="215711"/>
-            </a:xfrm>
-            <a:prstGeom prst="line">
-              <a:avLst/>
-            </a:prstGeom>
-          </p:spPr>
-          <p:style>
-            <a:lnRef idx="2">
-              <a:schemeClr val="accent1"/>
-            </a:lnRef>
-            <a:fillRef idx="0">
-              <a:schemeClr val="accent1"/>
-            </a:fillRef>
-            <a:effectRef idx="1">
-              <a:schemeClr val="accent1"/>
-            </a:effectRef>
-            <a:fontRef idx="minor">
-              <a:schemeClr val="tx1"/>
-            </a:fontRef>
-          </p:style>
-        </p:cxnSp>
-        <p:cxnSp>
-          <p:nvCxnSpPr>
-            <p:cNvPr id="181" name="Straight Connector 180">
-              <a:extLst>
-                <a:ext uri="{FF2B5EF4-FFF2-40B4-BE49-F238E27FC236}">
-                  <a16:creationId xmlns:a16="http://schemas.microsoft.com/office/drawing/2014/main" id="{0460A47E-6551-87B8-D148-22BB0E7B222D}"/>
-                </a:ext>
-              </a:extLst>
-            </p:cNvPr>
-            <p:cNvCxnSpPr>
-              <a:cxnSpLocks/>
-            </p:cNvCxnSpPr>
-            <p:nvPr/>
-          </p:nvCxnSpPr>
-          <p:spPr>
-            <a:xfrm flipV="1">
-              <a:off x="1074821" y="1829948"/>
-              <a:ext cx="140545" cy="103126"/>
-            </a:xfrm>
-            <a:prstGeom prst="line">
-              <a:avLst/>
-            </a:prstGeom>
-          </p:spPr>
-          <p:style>
-            <a:lnRef idx="2">
-              <a:schemeClr val="accent1"/>
-            </a:lnRef>
-            <a:fillRef idx="0">
-              <a:schemeClr val="accent1"/>
-            </a:fillRef>
-            <a:effectRef idx="1">
-              <a:schemeClr val="accent1"/>
-            </a:effectRef>
-            <a:fontRef idx="minor">
-              <a:schemeClr val="tx1"/>
-            </a:fontRef>
-          </p:style>
-        </p:cxnSp>
-        <p:cxnSp>
-          <p:nvCxnSpPr>
-            <p:cNvPr id="182" name="Straight Connector 181">
-              <a:extLst>
-                <a:ext uri="{FF2B5EF4-FFF2-40B4-BE49-F238E27FC236}">
-                  <a16:creationId xmlns:a16="http://schemas.microsoft.com/office/drawing/2014/main" id="{5A016AB0-C9E3-96DB-019B-5F43AB8DD8B9}"/>
-                </a:ext>
-              </a:extLst>
-            </p:cNvPr>
-            <p:cNvCxnSpPr>
-              <a:cxnSpLocks/>
-            </p:cNvCxnSpPr>
-            <p:nvPr/>
-          </p:nvCxnSpPr>
-          <p:spPr>
-            <a:xfrm>
-              <a:off x="1074820" y="1716505"/>
-              <a:ext cx="140545" cy="107137"/>
-            </a:xfrm>
-            <a:prstGeom prst="line">
-              <a:avLst/>
-            </a:prstGeom>
-          </p:spPr>
-          <p:style>
-            <a:lnRef idx="2">
-              <a:schemeClr val="accent1"/>
-            </a:lnRef>
-            <a:fillRef idx="0">
-              <a:schemeClr val="accent1"/>
-            </a:fillRef>
-            <a:effectRef idx="1">
-              <a:schemeClr val="accent1"/>
-            </a:effectRef>
-            <a:fontRef idx="minor">
-              <a:schemeClr val="tx1"/>
-            </a:fontRef>
-          </p:style>
-        </p:cxnSp>
-      </p:grpSp>
-      <p:cxnSp>
-        <p:nvCxnSpPr>
-          <p:cNvPr id="183" name="Straight Arrow Connector 182">
-            <a:extLst>
-              <a:ext uri="{FF2B5EF4-FFF2-40B4-BE49-F238E27FC236}">
-                <a16:creationId xmlns:a16="http://schemas.microsoft.com/office/drawing/2014/main" id="{FD895F0D-4BF5-DC7B-F7F3-413542C80AFB}"/>
-              </a:ext>
-            </a:extLst>
-          </p:cNvPr>
-          <p:cNvCxnSpPr>
-            <a:cxnSpLocks/>
-          </p:cNvCxnSpPr>
-          <p:nvPr/>
-        </p:nvCxnSpPr>
-        <p:spPr>
-          <a:xfrm>
-            <a:off x="8211392" y="3800492"/>
-            <a:ext cx="173935" cy="0"/>
-          </a:xfrm>
-          <a:prstGeom prst="straightConnector1">
-            <a:avLst/>
-          </a:prstGeom>
-          <a:ln>
-            <a:tailEnd type="triangle"/>
-          </a:ln>
-        </p:spPr>
-        <p:style>
-          <a:lnRef idx="2">
-            <a:schemeClr val="accent1"/>
-          </a:lnRef>
-          <a:fillRef idx="0">
-            <a:schemeClr val="accent1"/>
-          </a:fillRef>
-          <a:effectRef idx="1">
-            <a:schemeClr val="accent1"/>
-          </a:effectRef>
-          <a:fontRef idx="minor">
-            <a:schemeClr val="tx1"/>
-          </a:fontRef>
-        </p:style>
-      </p:cxnSp>
-      <p:cxnSp>
-        <p:nvCxnSpPr>
-          <p:cNvPr id="185" name="Straight Arrow Connector 184">
-            <a:extLst>
-              <a:ext uri="{FF2B5EF4-FFF2-40B4-BE49-F238E27FC236}">
-                <a16:creationId xmlns:a16="http://schemas.microsoft.com/office/drawing/2014/main" id="{8A322888-ED2A-D52F-5D81-55A9F50D831D}"/>
-              </a:ext>
-            </a:extLst>
-          </p:cNvPr>
-          <p:cNvCxnSpPr/>
-          <p:nvPr/>
-        </p:nvCxnSpPr>
-        <p:spPr>
-          <a:xfrm>
-            <a:off x="8207519" y="3375376"/>
-            <a:ext cx="177808" cy="0"/>
-          </a:xfrm>
-          <a:prstGeom prst="straightConnector1">
-            <a:avLst/>
-          </a:prstGeom>
-          <a:ln>
-            <a:tailEnd type="triangle"/>
-          </a:ln>
-        </p:spPr>
-        <p:style>
-          <a:lnRef idx="2">
-            <a:schemeClr val="accent1"/>
-          </a:lnRef>
-          <a:fillRef idx="0">
-            <a:schemeClr val="accent1"/>
-          </a:fillRef>
-          <a:effectRef idx="1">
-            <a:schemeClr val="accent1"/>
-          </a:effectRef>
-          <a:fontRef idx="minor">
-            <a:schemeClr val="tx1"/>
-          </a:fontRef>
-        </p:style>
-      </p:cxnSp>
-      <p:grpSp>
-        <p:nvGrpSpPr>
           <p:cNvPr id="214" name="Group 213">
             <a:extLst>
               <a:ext uri="{FF2B5EF4-FFF2-40B4-BE49-F238E27FC236}">
@@ -8472,201 +8145,6 @@
           </a:p>
         </p:txBody>
       </p:sp>
-      <p:sp>
-        <p:nvSpPr>
-          <p:cNvPr id="264" name="TextBox 263">
-            <a:extLst>
-              <a:ext uri="{FF2B5EF4-FFF2-40B4-BE49-F238E27FC236}">
-                <a16:creationId xmlns:a16="http://schemas.microsoft.com/office/drawing/2014/main" id="{18102C07-F7E1-1AF1-477B-00B68F177F07}"/>
-              </a:ext>
-            </a:extLst>
-          </p:cNvPr>
-          <p:cNvSpPr txBox="1"/>
-          <p:nvPr/>
-        </p:nvSpPr>
-        <p:spPr>
-          <a:xfrm>
-            <a:off x="7795398" y="3262227"/>
-            <a:ext cx="474810" cy="230832"/>
-          </a:xfrm>
-          <a:prstGeom prst="rect">
-            <a:avLst/>
-          </a:prstGeom>
-          <a:noFill/>
-        </p:spPr>
-        <p:txBody>
-          <a:bodyPr wrap="none" rtlCol="0">
-            <a:spAutoFit/>
-          </a:bodyPr>
-          <a:lstStyle/>
-          <a:p>
-            <a:pPr algn="ctr"/>
-            <a:r>
-              <a:rPr lang="en-US" sz="900" dirty="0"/>
-              <a:t>dout1</a:t>
-            </a:r>
-          </a:p>
-        </p:txBody>
-      </p:sp>
-      <p:sp>
-        <p:nvSpPr>
-          <p:cNvPr id="265" name="TextBox 264">
-            <a:extLst>
-              <a:ext uri="{FF2B5EF4-FFF2-40B4-BE49-F238E27FC236}">
-                <a16:creationId xmlns:a16="http://schemas.microsoft.com/office/drawing/2014/main" id="{00A05C49-A5A2-CC74-BAEB-00CF47323BC9}"/>
-              </a:ext>
-            </a:extLst>
-          </p:cNvPr>
-          <p:cNvSpPr txBox="1"/>
-          <p:nvPr/>
-        </p:nvSpPr>
-        <p:spPr>
-          <a:xfrm>
-            <a:off x="7776328" y="3693360"/>
-            <a:ext cx="474810" cy="230832"/>
-          </a:xfrm>
-          <a:prstGeom prst="rect">
-            <a:avLst/>
-          </a:prstGeom>
-          <a:noFill/>
-        </p:spPr>
-        <p:txBody>
-          <a:bodyPr wrap="none" rtlCol="0">
-            <a:spAutoFit/>
-          </a:bodyPr>
-          <a:lstStyle/>
-          <a:p>
-            <a:pPr algn="ctr"/>
-            <a:r>
-              <a:rPr lang="en-US" sz="900" dirty="0"/>
-              <a:t>dout2</a:t>
-            </a:r>
-          </a:p>
-        </p:txBody>
-      </p:sp>
-      <p:sp>
-        <p:nvSpPr>
-          <p:cNvPr id="266" name="TextBox 265">
-            <a:extLst>
-              <a:ext uri="{FF2B5EF4-FFF2-40B4-BE49-F238E27FC236}">
-                <a16:creationId xmlns:a16="http://schemas.microsoft.com/office/drawing/2014/main" id="{B178740B-BE6B-31B0-B4FD-0ED1D3EABF36}"/>
-              </a:ext>
-            </a:extLst>
-          </p:cNvPr>
-          <p:cNvSpPr txBox="1"/>
-          <p:nvPr/>
-        </p:nvSpPr>
-        <p:spPr>
-          <a:xfrm>
-            <a:off x="8430583" y="3473909"/>
-            <a:ext cx="330540" cy="230832"/>
-          </a:xfrm>
-          <a:prstGeom prst="rect">
-            <a:avLst/>
-          </a:prstGeom>
-          <a:noFill/>
-        </p:spPr>
-        <p:txBody>
-          <a:bodyPr wrap="none" rtlCol="0">
-            <a:spAutoFit/>
-          </a:bodyPr>
-          <a:lstStyle/>
-          <a:p>
-            <a:pPr algn="ctr"/>
-            <a:r>
-              <a:rPr lang="en-US" sz="900" dirty="0"/>
-              <a:t>“-”</a:t>
-            </a:r>
-          </a:p>
-        </p:txBody>
-      </p:sp>
-      <p:cxnSp>
-        <p:nvCxnSpPr>
-          <p:cNvPr id="276" name="Straight Arrow Connector 275">
-            <a:extLst>
-              <a:ext uri="{FF2B5EF4-FFF2-40B4-BE49-F238E27FC236}">
-                <a16:creationId xmlns:a16="http://schemas.microsoft.com/office/drawing/2014/main" id="{370ACF3C-5A72-31AC-3830-8B43C336935F}"/>
-              </a:ext>
-            </a:extLst>
-          </p:cNvPr>
-          <p:cNvCxnSpPr>
-            <a:cxnSpLocks/>
-          </p:cNvCxnSpPr>
-          <p:nvPr/>
-        </p:nvCxnSpPr>
-        <p:spPr>
-          <a:xfrm>
-            <a:off x="9389588" y="3591169"/>
-            <a:ext cx="0" cy="650213"/>
-          </a:xfrm>
-          <a:prstGeom prst="straightConnector1">
-            <a:avLst/>
-          </a:prstGeom>
-          <a:ln>
-            <a:solidFill>
-              <a:srgbClr val="FF0000"/>
-            </a:solidFill>
-            <a:tailEnd type="triangle"/>
-          </a:ln>
-        </p:spPr>
-        <p:style>
-          <a:lnRef idx="2">
-            <a:schemeClr val="accent1"/>
-          </a:lnRef>
-          <a:fillRef idx="0">
-            <a:schemeClr val="accent1"/>
-          </a:fillRef>
-          <a:effectRef idx="1">
-            <a:schemeClr val="accent1"/>
-          </a:effectRef>
-          <a:fontRef idx="minor">
-            <a:schemeClr val="tx1"/>
-          </a:fontRef>
-        </p:style>
-      </p:cxnSp>
-      <p:cxnSp>
-        <p:nvCxnSpPr>
-          <p:cNvPr id="280" name="Straight Connector 279">
-            <a:extLst>
-              <a:ext uri="{FF2B5EF4-FFF2-40B4-BE49-F238E27FC236}">
-                <a16:creationId xmlns:a16="http://schemas.microsoft.com/office/drawing/2014/main" id="{BF12A351-142A-23D7-36BD-9308B9D720AA}"/>
-              </a:ext>
-            </a:extLst>
-          </p:cNvPr>
-          <p:cNvCxnSpPr>
-            <a:cxnSpLocks/>
-          </p:cNvCxnSpPr>
-          <p:nvPr/>
-        </p:nvCxnSpPr>
-        <p:spPr>
-          <a:xfrm>
-            <a:off x="8690708" y="3591169"/>
-            <a:ext cx="695569" cy="0"/>
-          </a:xfrm>
-          <a:prstGeom prst="line">
-            <a:avLst/>
-          </a:prstGeom>
-          <a:ln>
-            <a:solidFill>
-              <a:srgbClr val="FF0000"/>
-            </a:solidFill>
-          </a:ln>
-        </p:spPr>
-        <p:style>
-          <a:lnRef idx="2">
-            <a:schemeClr val="accent1"/>
-          </a:lnRef>
-          <a:fillRef idx="0">
-            <a:schemeClr val="accent1"/>
-          </a:fillRef>
-          <a:effectRef idx="1">
-            <a:schemeClr val="accent1"/>
-          </a:effectRef>
-          <a:fontRef idx="minor">
-            <a:schemeClr val="tx1"/>
-          </a:fontRef>
-        </p:style>
-      </p:cxnSp>
       <p:cxnSp>
         <p:nvCxnSpPr>
           <p:cNvPr id="286" name="Straight Connector 285">
@@ -9934,138 +9412,6 @@
           </a:p>
         </p:txBody>
       </p:sp>
-      <p:cxnSp>
-        <p:nvCxnSpPr>
-          <p:cNvPr id="17" name="Straight Arrow Connector 16">
-            <a:extLst>
-              <a:ext uri="{FF2B5EF4-FFF2-40B4-BE49-F238E27FC236}">
-                <a16:creationId xmlns:a16="http://schemas.microsoft.com/office/drawing/2014/main" id="{D24E488E-A173-AFA0-3F6A-78FF8CC6952B}"/>
-              </a:ext>
-            </a:extLst>
-          </p:cNvPr>
-          <p:cNvCxnSpPr>
-            <a:cxnSpLocks/>
-          </p:cNvCxnSpPr>
-          <p:nvPr/>
-        </p:nvCxnSpPr>
-        <p:spPr>
-          <a:xfrm flipV="1">
-            <a:off x="10852467" y="3154000"/>
-            <a:ext cx="0" cy="195214"/>
-          </a:xfrm>
-          <a:prstGeom prst="straightConnector1">
-            <a:avLst/>
-          </a:prstGeom>
-          <a:ln>
-            <a:solidFill>
-              <a:srgbClr val="FF0000"/>
-            </a:solidFill>
-            <a:tailEnd type="triangle"/>
-          </a:ln>
-        </p:spPr>
-        <p:style>
-          <a:lnRef idx="2">
-            <a:schemeClr val="accent1"/>
-          </a:lnRef>
-          <a:fillRef idx="0">
-            <a:schemeClr val="accent1"/>
-          </a:fillRef>
-          <a:effectRef idx="1">
-            <a:schemeClr val="accent1"/>
-          </a:effectRef>
-          <a:fontRef idx="minor">
-            <a:schemeClr val="tx1"/>
-          </a:fontRef>
-        </p:style>
-      </p:cxnSp>
-      <p:cxnSp>
-        <p:nvCxnSpPr>
-          <p:cNvPr id="26" name="Straight Arrow Connector 25">
-            <a:extLst>
-              <a:ext uri="{FF2B5EF4-FFF2-40B4-BE49-F238E27FC236}">
-                <a16:creationId xmlns:a16="http://schemas.microsoft.com/office/drawing/2014/main" id="{EFC7A41C-61ED-49E4-BA0B-27EC82F62902}"/>
-              </a:ext>
-            </a:extLst>
-          </p:cNvPr>
-          <p:cNvCxnSpPr>
-            <a:cxnSpLocks/>
-          </p:cNvCxnSpPr>
-          <p:nvPr/>
-        </p:nvCxnSpPr>
-        <p:spPr>
-          <a:xfrm flipV="1">
-            <a:off x="10915967" y="3114188"/>
-            <a:ext cx="0" cy="195214"/>
-          </a:xfrm>
-          <a:prstGeom prst="straightConnector1">
-            <a:avLst/>
-          </a:prstGeom>
-          <a:ln>
-            <a:solidFill>
-              <a:srgbClr val="FF0000"/>
-            </a:solidFill>
-            <a:tailEnd type="triangle"/>
-          </a:ln>
-        </p:spPr>
-        <p:style>
-          <a:lnRef idx="2">
-            <a:schemeClr val="accent1"/>
-          </a:lnRef>
-          <a:fillRef idx="0">
-            <a:schemeClr val="accent1"/>
-          </a:fillRef>
-          <a:effectRef idx="1">
-            <a:schemeClr val="accent1"/>
-          </a:effectRef>
-          <a:fontRef idx="minor">
-            <a:schemeClr val="tx1"/>
-          </a:fontRef>
-        </p:style>
-      </p:cxnSp>
-      <p:cxnSp>
-        <p:nvCxnSpPr>
-          <p:cNvPr id="28" name="Straight Arrow Connector 27">
-            <a:extLst>
-              <a:ext uri="{FF2B5EF4-FFF2-40B4-BE49-F238E27FC236}">
-                <a16:creationId xmlns:a16="http://schemas.microsoft.com/office/drawing/2014/main" id="{EE79F449-2B1D-87A9-9E7B-9DD8C11C7B9B}"/>
-              </a:ext>
-            </a:extLst>
-          </p:cNvPr>
-          <p:cNvCxnSpPr>
-            <a:cxnSpLocks/>
-          </p:cNvCxnSpPr>
-          <p:nvPr/>
-        </p:nvCxnSpPr>
-        <p:spPr>
-          <a:xfrm flipV="1">
-            <a:off x="10776267" y="3233786"/>
-            <a:ext cx="0" cy="195214"/>
-          </a:xfrm>
-          <a:prstGeom prst="straightConnector1">
-            <a:avLst/>
-          </a:prstGeom>
-          <a:ln>
-            <a:solidFill>
-              <a:srgbClr val="FF0000"/>
-            </a:solidFill>
-            <a:tailEnd type="triangle"/>
-          </a:ln>
-        </p:spPr>
-        <p:style>
-          <a:lnRef idx="2">
-            <a:schemeClr val="accent1"/>
-          </a:lnRef>
-          <a:fillRef idx="0">
-            <a:schemeClr val="accent1"/>
-          </a:fillRef>
-          <a:effectRef idx="1">
-            <a:schemeClr val="accent1"/>
-          </a:effectRef>
-          <a:fontRef idx="minor">
-            <a:schemeClr val="tx1"/>
-          </a:fontRef>
-        </p:style>
-      </p:cxnSp>
       <p:grpSp>
         <p:nvGrpSpPr>
           <p:cNvPr id="30" name="Group 29">
@@ -10263,132 +9609,6 @@
           <a:xfrm>
             <a:off x="2870131" y="3429000"/>
             <a:ext cx="177808" cy="0"/>
-          </a:xfrm>
-          <a:prstGeom prst="straightConnector1">
-            <a:avLst/>
-          </a:prstGeom>
-          <a:ln>
-            <a:solidFill>
-              <a:srgbClr val="FF0000"/>
-            </a:solidFill>
-            <a:tailEnd type="triangle"/>
-          </a:ln>
-        </p:spPr>
-        <p:style>
-          <a:lnRef idx="2">
-            <a:schemeClr val="accent1"/>
-          </a:lnRef>
-          <a:fillRef idx="0">
-            <a:schemeClr val="accent1"/>
-          </a:fillRef>
-          <a:effectRef idx="1">
-            <a:schemeClr val="accent1"/>
-          </a:effectRef>
-          <a:fontRef idx="minor">
-            <a:schemeClr val="tx1"/>
-          </a:fontRef>
-        </p:style>
-      </p:cxnSp>
-      <p:cxnSp>
-        <p:nvCxnSpPr>
-          <p:cNvPr id="39" name="Straight Arrow Connector 38">
-            <a:extLst>
-              <a:ext uri="{FF2B5EF4-FFF2-40B4-BE49-F238E27FC236}">
-                <a16:creationId xmlns:a16="http://schemas.microsoft.com/office/drawing/2014/main" id="{119991E4-90E6-F0D1-11C3-602FF77B7F79}"/>
-              </a:ext>
-            </a:extLst>
-          </p:cNvPr>
-          <p:cNvCxnSpPr/>
-          <p:nvPr/>
-        </p:nvCxnSpPr>
-        <p:spPr>
-          <a:xfrm>
-            <a:off x="9424268" y="4047113"/>
-            <a:ext cx="0" cy="230832"/>
-          </a:xfrm>
-          <a:prstGeom prst="straightConnector1">
-            <a:avLst/>
-          </a:prstGeom>
-          <a:ln>
-            <a:solidFill>
-              <a:srgbClr val="FF0000"/>
-            </a:solidFill>
-            <a:tailEnd type="triangle"/>
-          </a:ln>
-        </p:spPr>
-        <p:style>
-          <a:lnRef idx="2">
-            <a:schemeClr val="accent1"/>
-          </a:lnRef>
-          <a:fillRef idx="0">
-            <a:schemeClr val="accent1"/>
-          </a:fillRef>
-          <a:effectRef idx="1">
-            <a:schemeClr val="accent1"/>
-          </a:effectRef>
-          <a:fontRef idx="minor">
-            <a:schemeClr val="tx1"/>
-          </a:fontRef>
-        </p:style>
-      </p:cxnSp>
-      <p:cxnSp>
-        <p:nvCxnSpPr>
-          <p:cNvPr id="47" name="Straight Arrow Connector 46">
-            <a:extLst>
-              <a:ext uri="{FF2B5EF4-FFF2-40B4-BE49-F238E27FC236}">
-                <a16:creationId xmlns:a16="http://schemas.microsoft.com/office/drawing/2014/main" id="{8A262BB7-393A-3D10-4768-BA19460EE16D}"/>
-              </a:ext>
-            </a:extLst>
-          </p:cNvPr>
-          <p:cNvCxnSpPr/>
-          <p:nvPr/>
-        </p:nvCxnSpPr>
-        <p:spPr>
-          <a:xfrm>
-            <a:off x="9462368" y="4084284"/>
-            <a:ext cx="0" cy="230832"/>
-          </a:xfrm>
-          <a:prstGeom prst="straightConnector1">
-            <a:avLst/>
-          </a:prstGeom>
-          <a:ln>
-            <a:solidFill>
-              <a:srgbClr val="FF0000"/>
-            </a:solidFill>
-            <a:tailEnd type="triangle"/>
-          </a:ln>
-        </p:spPr>
-        <p:style>
-          <a:lnRef idx="2">
-            <a:schemeClr val="accent1"/>
-          </a:lnRef>
-          <a:fillRef idx="0">
-            <a:schemeClr val="accent1"/>
-          </a:fillRef>
-          <a:effectRef idx="1">
-            <a:schemeClr val="accent1"/>
-          </a:effectRef>
-          <a:fontRef idx="minor">
-            <a:schemeClr val="tx1"/>
-          </a:fontRef>
-        </p:style>
-      </p:cxnSp>
-      <p:cxnSp>
-        <p:nvCxnSpPr>
-          <p:cNvPr id="52" name="Straight Arrow Connector 51">
-            <a:extLst>
-              <a:ext uri="{FF2B5EF4-FFF2-40B4-BE49-F238E27FC236}">
-                <a16:creationId xmlns:a16="http://schemas.microsoft.com/office/drawing/2014/main" id="{2AC5E79F-36BB-C55A-DF2D-C7C8E0255836}"/>
-              </a:ext>
-            </a:extLst>
-          </p:cNvPr>
-          <p:cNvCxnSpPr/>
-          <p:nvPr/>
-        </p:nvCxnSpPr>
-        <p:spPr>
-          <a:xfrm>
-            <a:off x="9514036" y="4115287"/>
-            <a:ext cx="0" cy="230832"/>
           </a:xfrm>
           <a:prstGeom prst="straightConnector1">
             <a:avLst/>
@@ -11209,12 +10429,217 @@
           </a:fontRef>
         </p:style>
       </p:cxnSp>
-      <p:sp>
-        <p:nvSpPr>
-          <p:cNvPr id="105" name="TextBox 104">
-            <a:extLst>
-              <a:ext uri="{FF2B5EF4-FFF2-40B4-BE49-F238E27FC236}">
-                <a16:creationId xmlns:a16="http://schemas.microsoft.com/office/drawing/2014/main" id="{0DEEFEFE-6A7C-4AE5-CCC3-83F00563D393}"/>
+      <p:cxnSp>
+        <p:nvCxnSpPr>
+          <p:cNvPr id="106" name="Straight Arrow Connector 105">
+            <a:extLst>
+              <a:ext uri="{FF2B5EF4-FFF2-40B4-BE49-F238E27FC236}">
+                <a16:creationId xmlns:a16="http://schemas.microsoft.com/office/drawing/2014/main" id="{EF1EA85E-B4DD-CD65-B4DF-4B4DB8B39F46}"/>
+              </a:ext>
+            </a:extLst>
+          </p:cNvPr>
+          <p:cNvCxnSpPr>
+            <a:cxnSpLocks/>
+          </p:cNvCxnSpPr>
+          <p:nvPr/>
+        </p:nvCxnSpPr>
+        <p:spPr>
+          <a:xfrm flipV="1">
+            <a:off x="10822834" y="3193477"/>
+            <a:ext cx="0" cy="616523"/>
+          </a:xfrm>
+          <a:prstGeom prst="straightConnector1">
+            <a:avLst/>
+          </a:prstGeom>
+          <a:ln>
+            <a:solidFill>
+              <a:srgbClr val="FF0000"/>
+            </a:solidFill>
+            <a:tailEnd type="triangle"/>
+          </a:ln>
+        </p:spPr>
+        <p:style>
+          <a:lnRef idx="2">
+            <a:schemeClr val="accent1"/>
+          </a:lnRef>
+          <a:fillRef idx="0">
+            <a:schemeClr val="accent1"/>
+          </a:fillRef>
+          <a:effectRef idx="1">
+            <a:schemeClr val="accent1"/>
+          </a:effectRef>
+          <a:fontRef idx="minor">
+            <a:schemeClr val="tx1"/>
+          </a:fontRef>
+        </p:style>
+      </p:cxnSp>
+      <p:cxnSp>
+        <p:nvCxnSpPr>
+          <p:cNvPr id="107" name="Straight Connector 106">
+            <a:extLst>
+              <a:ext uri="{FF2B5EF4-FFF2-40B4-BE49-F238E27FC236}">
+                <a16:creationId xmlns:a16="http://schemas.microsoft.com/office/drawing/2014/main" id="{79860AC4-97D8-03B3-AF86-AB6DE017878E}"/>
+              </a:ext>
+            </a:extLst>
+          </p:cNvPr>
+          <p:cNvCxnSpPr>
+            <a:cxnSpLocks/>
+          </p:cNvCxnSpPr>
+          <p:nvPr/>
+        </p:nvCxnSpPr>
+        <p:spPr>
+          <a:xfrm flipH="1">
+            <a:off x="10772078" y="3608496"/>
+            <a:ext cx="107051" cy="69157"/>
+          </a:xfrm>
+          <a:prstGeom prst="line">
+            <a:avLst/>
+          </a:prstGeom>
+        </p:spPr>
+        <p:style>
+          <a:lnRef idx="2">
+            <a:schemeClr val="accent1"/>
+          </a:lnRef>
+          <a:fillRef idx="0">
+            <a:schemeClr val="accent1"/>
+          </a:fillRef>
+          <a:effectRef idx="1">
+            <a:schemeClr val="accent1"/>
+          </a:effectRef>
+          <a:fontRef idx="minor">
+            <a:schemeClr val="tx1"/>
+          </a:fontRef>
+        </p:style>
+      </p:cxnSp>
+      <p:cxnSp>
+        <p:nvCxnSpPr>
+          <p:cNvPr id="108" name="Straight Arrow Connector 107">
+            <a:extLst>
+              <a:ext uri="{FF2B5EF4-FFF2-40B4-BE49-F238E27FC236}">
+                <a16:creationId xmlns:a16="http://schemas.microsoft.com/office/drawing/2014/main" id="{3F5D046F-4CDC-941C-775F-ABA64AB9D3A8}"/>
+              </a:ext>
+            </a:extLst>
+          </p:cNvPr>
+          <p:cNvCxnSpPr>
+            <a:cxnSpLocks/>
+          </p:cNvCxnSpPr>
+          <p:nvPr/>
+        </p:nvCxnSpPr>
+        <p:spPr>
+          <a:xfrm flipV="1">
+            <a:off x="9432653" y="4931909"/>
+            <a:ext cx="0" cy="318976"/>
+          </a:xfrm>
+          <a:prstGeom prst="straightConnector1">
+            <a:avLst/>
+          </a:prstGeom>
+          <a:ln>
+            <a:solidFill>
+              <a:srgbClr val="FF0000"/>
+            </a:solidFill>
+            <a:tailEnd type="triangle"/>
+          </a:ln>
+        </p:spPr>
+        <p:style>
+          <a:lnRef idx="2">
+            <a:schemeClr val="accent1"/>
+          </a:lnRef>
+          <a:fillRef idx="0">
+            <a:schemeClr val="accent1"/>
+          </a:fillRef>
+          <a:effectRef idx="1">
+            <a:schemeClr val="accent1"/>
+          </a:effectRef>
+          <a:fontRef idx="minor">
+            <a:schemeClr val="tx1"/>
+          </a:fontRef>
+        </p:style>
+      </p:cxnSp>
+      <p:cxnSp>
+        <p:nvCxnSpPr>
+          <p:cNvPr id="109" name="Straight Connector 108">
+            <a:extLst>
+              <a:ext uri="{FF2B5EF4-FFF2-40B4-BE49-F238E27FC236}">
+                <a16:creationId xmlns:a16="http://schemas.microsoft.com/office/drawing/2014/main" id="{92BCAF6F-B9A4-9C21-9FF9-B23BDE25056A}"/>
+              </a:ext>
+            </a:extLst>
+          </p:cNvPr>
+          <p:cNvCxnSpPr>
+            <a:cxnSpLocks/>
+          </p:cNvCxnSpPr>
+          <p:nvPr/>
+        </p:nvCxnSpPr>
+        <p:spPr>
+          <a:xfrm flipH="1">
+            <a:off x="9388685" y="5117831"/>
+            <a:ext cx="85431" cy="62194"/>
+          </a:xfrm>
+          <a:prstGeom prst="line">
+            <a:avLst/>
+          </a:prstGeom>
+        </p:spPr>
+        <p:style>
+          <a:lnRef idx="2">
+            <a:schemeClr val="accent1"/>
+          </a:lnRef>
+          <a:fillRef idx="0">
+            <a:schemeClr val="accent1"/>
+          </a:fillRef>
+          <a:effectRef idx="1">
+            <a:schemeClr val="accent1"/>
+          </a:effectRef>
+          <a:fontRef idx="minor">
+            <a:schemeClr val="tx1"/>
+          </a:fontRef>
+        </p:style>
+      </p:cxnSp>
+      <p:cxnSp>
+        <p:nvCxnSpPr>
+          <p:cNvPr id="17" name="Straight Arrow Connector 16">
+            <a:extLst>
+              <a:ext uri="{FF2B5EF4-FFF2-40B4-BE49-F238E27FC236}">
+                <a16:creationId xmlns:a16="http://schemas.microsoft.com/office/drawing/2014/main" id="{31DB38F9-E090-4FB9-FA0F-47CDA73DF572}"/>
+              </a:ext>
+            </a:extLst>
+          </p:cNvPr>
+          <p:cNvCxnSpPr>
+            <a:cxnSpLocks/>
+          </p:cNvCxnSpPr>
+          <p:nvPr/>
+        </p:nvCxnSpPr>
+        <p:spPr>
+          <a:xfrm>
+            <a:off x="9254353" y="3367023"/>
+            <a:ext cx="0" cy="137890"/>
+          </a:xfrm>
+          <a:prstGeom prst="straightConnector1">
+            <a:avLst/>
+          </a:prstGeom>
+          <a:ln>
+            <a:tailEnd type="triangle"/>
+          </a:ln>
+        </p:spPr>
+        <p:style>
+          <a:lnRef idx="2">
+            <a:schemeClr val="accent1"/>
+          </a:lnRef>
+          <a:fillRef idx="0">
+            <a:schemeClr val="accent1"/>
+          </a:fillRef>
+          <a:effectRef idx="1">
+            <a:schemeClr val="accent1"/>
+          </a:effectRef>
+          <a:fontRef idx="minor">
+            <a:schemeClr val="tx1"/>
+          </a:fontRef>
+        </p:style>
+      </p:cxnSp>
+      <p:sp>
+        <p:nvSpPr>
+          <p:cNvPr id="26" name="TextBox 25">
+            <a:extLst>
+              <a:ext uri="{FF2B5EF4-FFF2-40B4-BE49-F238E27FC236}">
+                <a16:creationId xmlns:a16="http://schemas.microsoft.com/office/drawing/2014/main" id="{C78A4DC8-3C80-881E-FB81-42CE7A660FBF}"/>
               </a:ext>
             </a:extLst>
           </p:cNvPr>
@@ -11223,8 +10648,8 @@
         </p:nvSpPr>
         <p:spPr>
           <a:xfrm>
-            <a:off x="8640052" y="3387564"/>
-            <a:ext cx="671979" cy="230832"/>
+            <a:off x="9014468" y="3198168"/>
+            <a:ext cx="474810" cy="230832"/>
           </a:xfrm>
           <a:prstGeom prst="rect">
             <a:avLst/>
@@ -11240,11 +10665,220 @@
             <a:pPr algn="ctr"/>
             <a:r>
               <a:rPr lang="en-US" sz="900" dirty="0"/>
+              <a:t>dout1</a:t>
+            </a:r>
+          </a:p>
+        </p:txBody>
+      </p:sp>
+      <p:sp>
+        <p:nvSpPr>
+          <p:cNvPr id="28" name="TextBox 27">
+            <a:extLst>
+              <a:ext uri="{FF2B5EF4-FFF2-40B4-BE49-F238E27FC236}">
+                <a16:creationId xmlns:a16="http://schemas.microsoft.com/office/drawing/2014/main" id="{FF31582E-8364-8CF1-92BA-63B0BC31CB78}"/>
+              </a:ext>
+            </a:extLst>
+          </p:cNvPr>
+          <p:cNvSpPr txBox="1"/>
+          <p:nvPr/>
+        </p:nvSpPr>
+        <p:spPr>
+          <a:xfrm>
+            <a:off x="9378410" y="3198168"/>
+            <a:ext cx="474810" cy="230832"/>
+          </a:xfrm>
+          <a:prstGeom prst="rect">
+            <a:avLst/>
+          </a:prstGeom>
+          <a:noFill/>
+        </p:spPr>
+        <p:txBody>
+          <a:bodyPr wrap="none" rtlCol="0">
+            <a:spAutoFit/>
+          </a:bodyPr>
+          <a:lstStyle/>
+          <a:p>
+            <a:pPr algn="ctr"/>
+            <a:r>
+              <a:rPr lang="en-US" sz="900" dirty="0"/>
+              <a:t>dout2</a:t>
+            </a:r>
+          </a:p>
+        </p:txBody>
+      </p:sp>
+      <p:cxnSp>
+        <p:nvCxnSpPr>
+          <p:cNvPr id="39" name="Straight Arrow Connector 38">
+            <a:extLst>
+              <a:ext uri="{FF2B5EF4-FFF2-40B4-BE49-F238E27FC236}">
+                <a16:creationId xmlns:a16="http://schemas.microsoft.com/office/drawing/2014/main" id="{7804F544-7548-D877-9F4A-794E86AF3151}"/>
+              </a:ext>
+            </a:extLst>
+          </p:cNvPr>
+          <p:cNvCxnSpPr>
+            <a:cxnSpLocks/>
+          </p:cNvCxnSpPr>
+          <p:nvPr/>
+        </p:nvCxnSpPr>
+        <p:spPr>
+          <a:xfrm>
+            <a:off x="9431921" y="3928834"/>
+            <a:ext cx="0" cy="325106"/>
+          </a:xfrm>
+          <a:prstGeom prst="straightConnector1">
+            <a:avLst/>
+          </a:prstGeom>
+          <a:ln>
+            <a:solidFill>
+              <a:srgbClr val="FF0000"/>
+            </a:solidFill>
+            <a:tailEnd type="triangle"/>
+          </a:ln>
+        </p:spPr>
+        <p:style>
+          <a:lnRef idx="2">
+            <a:schemeClr val="accent1"/>
+          </a:lnRef>
+          <a:fillRef idx="0">
+            <a:schemeClr val="accent1"/>
+          </a:fillRef>
+          <a:effectRef idx="1">
+            <a:schemeClr val="accent1"/>
+          </a:effectRef>
+          <a:fontRef idx="minor">
+            <a:schemeClr val="tx1"/>
+          </a:fontRef>
+        </p:style>
+      </p:cxnSp>
+      <p:sp>
+        <p:nvSpPr>
+          <p:cNvPr id="47" name="TextBox 46">
+            <a:extLst>
+              <a:ext uri="{FF2B5EF4-FFF2-40B4-BE49-F238E27FC236}">
+                <a16:creationId xmlns:a16="http://schemas.microsoft.com/office/drawing/2014/main" id="{CC388D4E-B582-ECD3-F069-D98CD3BAA839}"/>
+              </a:ext>
+            </a:extLst>
+          </p:cNvPr>
+          <p:cNvSpPr txBox="1"/>
+          <p:nvPr/>
+        </p:nvSpPr>
+        <p:spPr>
+          <a:xfrm>
+            <a:off x="9063374" y="3733304"/>
+            <a:ext cx="671979" cy="230832"/>
+          </a:xfrm>
+          <a:prstGeom prst="rect">
+            <a:avLst/>
+          </a:prstGeom>
+          <a:noFill/>
+        </p:spPr>
+        <p:txBody>
+          <a:bodyPr wrap="none" rtlCol="0">
+            <a:spAutoFit/>
+          </a:bodyPr>
+          <a:lstStyle/>
+          <a:p>
+            <a:pPr algn="ctr"/>
+            <a:r>
+              <a:rPr lang="en-US" sz="900" dirty="0"/>
               <a:t>Not equal</a:t>
             </a:r>
           </a:p>
         </p:txBody>
       </p:sp>
+      <p:sp>
+        <p:nvSpPr>
+          <p:cNvPr id="52" name="Rectangle 51">
+            <a:extLst>
+              <a:ext uri="{FF2B5EF4-FFF2-40B4-BE49-F238E27FC236}">
+                <a16:creationId xmlns:a16="http://schemas.microsoft.com/office/drawing/2014/main" id="{0CCCD093-1D8B-D339-2269-5293EF85E0E3}"/>
+              </a:ext>
+            </a:extLst>
+          </p:cNvPr>
+          <p:cNvSpPr/>
+          <p:nvPr/>
+        </p:nvSpPr>
+        <p:spPr>
+          <a:xfrm>
+            <a:off x="9027891" y="3504913"/>
+            <a:ext cx="736311" cy="418585"/>
+          </a:xfrm>
+          <a:prstGeom prst="rect">
+            <a:avLst/>
+          </a:prstGeom>
+          <a:noFill/>
+          <a:ln>
+            <a:solidFill>
+              <a:srgbClr val="0070C0"/>
+            </a:solidFill>
+          </a:ln>
+        </p:spPr>
+        <p:style>
+          <a:lnRef idx="2">
+            <a:schemeClr val="accent1">
+              <a:shade val="15000"/>
+            </a:schemeClr>
+          </a:lnRef>
+          <a:fillRef idx="1">
+            <a:schemeClr val="accent1"/>
+          </a:fillRef>
+          <a:effectRef idx="0">
+            <a:schemeClr val="accent1"/>
+          </a:effectRef>
+          <a:fontRef idx="minor">
+            <a:schemeClr val="lt1"/>
+          </a:fontRef>
+        </p:style>
+        <p:txBody>
+          <a:bodyPr rtlCol="0" anchor="ctr"/>
+          <a:lstStyle/>
+          <a:p>
+            <a:pPr algn="ctr"/>
+            <a:endParaRPr lang="en-US"/>
+          </a:p>
+        </p:txBody>
+      </p:sp>
+      <p:cxnSp>
+        <p:nvCxnSpPr>
+          <p:cNvPr id="110" name="Straight Arrow Connector 109">
+            <a:extLst>
+              <a:ext uri="{FF2B5EF4-FFF2-40B4-BE49-F238E27FC236}">
+                <a16:creationId xmlns:a16="http://schemas.microsoft.com/office/drawing/2014/main" id="{93EEA11B-25C2-49C4-CEFB-DC750F39B294}"/>
+              </a:ext>
+            </a:extLst>
+          </p:cNvPr>
+          <p:cNvCxnSpPr>
+            <a:cxnSpLocks/>
+          </p:cNvCxnSpPr>
+          <p:nvPr/>
+        </p:nvCxnSpPr>
+        <p:spPr>
+          <a:xfrm>
+            <a:off x="9601800" y="3367023"/>
+            <a:ext cx="0" cy="137890"/>
+          </a:xfrm>
+          <a:prstGeom prst="straightConnector1">
+            <a:avLst/>
+          </a:prstGeom>
+          <a:ln>
+            <a:tailEnd type="triangle"/>
+          </a:ln>
+        </p:spPr>
+        <p:style>
+          <a:lnRef idx="2">
+            <a:schemeClr val="accent1"/>
+          </a:lnRef>
+          <a:fillRef idx="0">
+            <a:schemeClr val="accent1"/>
+          </a:fillRef>
+          <a:effectRef idx="1">
+            <a:schemeClr val="accent1"/>
+          </a:effectRef>
+          <a:fontRef idx="minor">
+            <a:schemeClr val="tx1"/>
+          </a:fontRef>
+        </p:style>
+      </p:cxnSp>
     </p:spTree>
     <p:extLst>
       <p:ext uri="{BB962C8B-B14F-4D97-AF65-F5344CB8AC3E}">

--- a/RISCVstage2.pptx
+++ b/RISCVstage2.pptx
@@ -115,7 +115,7 @@
 <file path=ppt/revisionInfo.xml><?xml version="1.0" encoding="utf-8"?>
 <p1510:revInfo xmlns:a="http://schemas.openxmlformats.org/drawingml/2006/main" xmlns:r="http://schemas.openxmlformats.org/officeDocument/2006/relationships" xmlns:p1510="http://schemas.microsoft.com/office/powerpoint/2015/10/main">
   <p1510:revLst>
-    <p1510:client id="{38F3156C-1A0B-40A4-B506-136BA873DFD3}" v="3" dt="2026-03-10T03:59:35.312"/>
+    <p1510:client id="{38F3156C-1A0B-40A4-B506-136BA873DFD3}" v="4" dt="2026-03-10T17:13:22.712"/>
   </p1510:revLst>
 </p1510:revInfo>
 </file>
@@ -125,12 +125,12 @@
   <pc:docChgLst>
     <pc:chgData name="York, George W CIV USAF USAFA DF/DFEC" userId="1fb5875a-4594-4db2-80fb-f0db3de11280" providerId="ADAL" clId="{09330963-85FD-4C99-A81B-94D0EE5CFFEB}"/>
     <pc:docChg chg="custSel modSld">
-      <pc:chgData name="York, George W CIV USAF USAFA DF/DFEC" userId="1fb5875a-4594-4db2-80fb-f0db3de11280" providerId="ADAL" clId="{09330963-85FD-4C99-A81B-94D0EE5CFFEB}" dt="2026-03-10T03:59:35.312" v="22"/>
+      <pc:chgData name="York, George W CIV USAF USAFA DF/DFEC" userId="1fb5875a-4594-4db2-80fb-f0db3de11280" providerId="ADAL" clId="{09330963-85FD-4C99-A81B-94D0EE5CFFEB}" dt="2026-03-10T17:13:40.174" v="28" actId="478"/>
       <pc:docMkLst>
         <pc:docMk/>
       </pc:docMkLst>
       <pc:sldChg chg="addSp delSp modSp mod">
-        <pc:chgData name="York, George W CIV USAF USAFA DF/DFEC" userId="1fb5875a-4594-4db2-80fb-f0db3de11280" providerId="ADAL" clId="{09330963-85FD-4C99-A81B-94D0EE5CFFEB}" dt="2026-03-10T03:59:35.312" v="22"/>
+        <pc:chgData name="York, George W CIV USAF USAFA DF/DFEC" userId="1fb5875a-4594-4db2-80fb-f0db3de11280" providerId="ADAL" clId="{09330963-85FD-4C99-A81B-94D0EE5CFFEB}" dt="2026-03-10T17:13:40.174" v="28" actId="478"/>
         <pc:sldMkLst>
           <pc:docMk/>
           <pc:sldMk cId="1501170907" sldId="256"/>
@@ -239,8 +239,8 @@
             <ac:spMk id="266" creationId="{B178740B-BE6B-31B0-B4FD-0ED1D3EABF36}"/>
           </ac:spMkLst>
         </pc:spChg>
-        <pc:grpChg chg="add mod">
-          <ac:chgData name="York, George W CIV USAF USAFA DF/DFEC" userId="1fb5875a-4594-4db2-80fb-f0db3de11280" providerId="ADAL" clId="{09330963-85FD-4C99-A81B-94D0EE5CFFEB}" dt="2026-03-05T22:26:17.388" v="3"/>
+        <pc:grpChg chg="add del mod">
+          <ac:chgData name="York, George W CIV USAF USAFA DF/DFEC" userId="1fb5875a-4594-4db2-80fb-f0db3de11280" providerId="ADAL" clId="{09330963-85FD-4C99-A81B-94D0EE5CFFEB}" dt="2026-03-10T17:13:11.635" v="23" actId="478"/>
           <ac:grpSpMkLst>
             <pc:docMk/>
             <pc:sldMk cId="1501170907" sldId="256"/>
@@ -263,16 +263,8 @@
             <ac:grpSpMk id="175" creationId="{CF1E05C7-0258-A1DB-5D4E-EA66C6CAA296}"/>
           </ac:grpSpMkLst>
         </pc:grpChg>
-        <pc:picChg chg="mod">
-          <ac:chgData name="York, George W CIV USAF USAFA DF/DFEC" userId="1fb5875a-4594-4db2-80fb-f0db3de11280" providerId="ADAL" clId="{09330963-85FD-4C99-A81B-94D0EE5CFFEB}" dt="2026-03-05T22:26:17.388" v="3"/>
-          <ac:picMkLst>
-            <pc:docMk/>
-            <pc:sldMk cId="1501170907" sldId="256"/>
-            <ac:picMk id="32" creationId="{08E484B5-905D-B38D-3D91-241CE1719D6C}"/>
-          </ac:picMkLst>
-        </pc:picChg>
-        <pc:picChg chg="add mod ord">
-          <ac:chgData name="York, George W CIV USAF USAFA DF/DFEC" userId="1fb5875a-4594-4db2-80fb-f0db3de11280" providerId="ADAL" clId="{09330963-85FD-4C99-A81B-94D0EE5CFFEB}" dt="2026-03-05T22:26:44.928" v="6" actId="167"/>
+        <pc:picChg chg="add del mod ord">
+          <ac:chgData name="York, George W CIV USAF USAFA DF/DFEC" userId="1fb5875a-4594-4db2-80fb-f0db3de11280" providerId="ADAL" clId="{09330963-85FD-4C99-A81B-94D0EE5CFFEB}" dt="2026-03-10T17:13:34.702" v="26" actId="478"/>
           <ac:picMkLst>
             <pc:docMk/>
             <pc:sldMk cId="1501170907" sldId="256"/>
@@ -311,24 +303,8 @@
             <ac:cxnSpMk id="28" creationId="{EE79F449-2B1D-87A9-9E7B-9DD8C11C7B9B}"/>
           </ac:cxnSpMkLst>
         </pc:cxnChg>
-        <pc:cxnChg chg="mod">
-          <ac:chgData name="York, George W CIV USAF USAFA DF/DFEC" userId="1fb5875a-4594-4db2-80fb-f0db3de11280" providerId="ADAL" clId="{09330963-85FD-4C99-A81B-94D0EE5CFFEB}" dt="2026-03-05T22:26:17.388" v="3"/>
-          <ac:cxnSpMkLst>
-            <pc:docMk/>
-            <pc:sldMk cId="1501170907" sldId="256"/>
-            <ac:cxnSpMk id="34" creationId="{72BE6CC3-2C59-A24A-5E92-68A707F8638E}"/>
-          </ac:cxnSpMkLst>
-        </pc:cxnChg>
-        <pc:cxnChg chg="mod">
-          <ac:chgData name="York, George W CIV USAF USAFA DF/DFEC" userId="1fb5875a-4594-4db2-80fb-f0db3de11280" providerId="ADAL" clId="{09330963-85FD-4C99-A81B-94D0EE5CFFEB}" dt="2026-03-05T22:26:17.388" v="3"/>
-          <ac:cxnSpMkLst>
-            <pc:docMk/>
-            <pc:sldMk cId="1501170907" sldId="256"/>
-            <ac:cxnSpMk id="35" creationId="{8AB80F94-094C-4CE9-C275-29945A350AA8}"/>
-          </ac:cxnSpMkLst>
-        </pc:cxnChg>
-        <pc:cxnChg chg="add mod">
-          <ac:chgData name="York, George W CIV USAF USAFA DF/DFEC" userId="1fb5875a-4594-4db2-80fb-f0db3de11280" providerId="ADAL" clId="{09330963-85FD-4C99-A81B-94D0EE5CFFEB}" dt="2026-03-05T22:26:35.967" v="5"/>
+        <pc:cxnChg chg="add del mod">
+          <ac:chgData name="York, George W CIV USAF USAFA DF/DFEC" userId="1fb5875a-4594-4db2-80fb-f0db3de11280" providerId="ADAL" clId="{09330963-85FD-4C99-A81B-94D0EE5CFFEB}" dt="2026-03-10T17:13:40.174" v="28" actId="478"/>
           <ac:cxnSpMkLst>
             <pc:docMk/>
             <pc:sldMk cId="1501170907" sldId="256"/>
@@ -336,7 +312,7 @@
           </ac:cxnSpMkLst>
         </pc:cxnChg>
         <pc:cxnChg chg="add mod">
-          <ac:chgData name="York, George W CIV USAF USAFA DF/DFEC" userId="1fb5875a-4594-4db2-80fb-f0db3de11280" providerId="ADAL" clId="{09330963-85FD-4C99-A81B-94D0EE5CFFEB}" dt="2026-03-05T22:26:35.967" v="5"/>
+          <ac:chgData name="York, George W CIV USAF USAFA DF/DFEC" userId="1fb5875a-4594-4db2-80fb-f0db3de11280" providerId="ADAL" clId="{09330963-85FD-4C99-A81B-94D0EE5CFFEB}" dt="2026-03-10T17:13:38.206" v="27" actId="1076"/>
           <ac:cxnSpMkLst>
             <pc:docMk/>
             <pc:sldMk cId="1501170907" sldId="256"/>
@@ -405,6 +381,14 @@
             <pc:docMk/>
             <pc:sldMk cId="1501170907" sldId="256"/>
             <ac:cxnSpMk id="92" creationId="{A258B8B8-0DCC-7046-F080-D64CBE4BD6A0}"/>
+          </ac:cxnSpMkLst>
+        </pc:cxnChg>
+        <pc:cxnChg chg="add mod">
+          <ac:chgData name="York, George W CIV USAF USAFA DF/DFEC" userId="1fb5875a-4594-4db2-80fb-f0db3de11280" providerId="ADAL" clId="{09330963-85FD-4C99-A81B-94D0EE5CFFEB}" dt="2026-03-10T17:13:26.975" v="25" actId="1076"/>
+          <ac:cxnSpMkLst>
+            <pc:docMk/>
+            <pc:sldMk cId="1501170907" sldId="256"/>
+            <ac:cxnSpMk id="105" creationId="{8CD91CF8-916B-D654-9E0C-D97E1D897DD5}"/>
           </ac:cxnSpMkLst>
         </pc:cxnChg>
         <pc:cxnChg chg="add mod">
@@ -632,7 +616,7 @@
           <a:p>
             <a:fld id="{51AFF834-1BEC-4F95-9622-28B5DCC1FE16}" type="datetimeFigureOut">
               <a:rPr lang="en-US" smtClean="0"/>
-              <a:t>3/9/2026</a:t>
+              <a:t>3/10/2026</a:t>
             </a:fld>
             <a:endParaRPr lang="en-US"/>
           </a:p>
@@ -830,7 +814,7 @@
           <a:p>
             <a:fld id="{51AFF834-1BEC-4F95-9622-28B5DCC1FE16}" type="datetimeFigureOut">
               <a:rPr lang="en-US" smtClean="0"/>
-              <a:t>3/9/2026</a:t>
+              <a:t>3/10/2026</a:t>
             </a:fld>
             <a:endParaRPr lang="en-US"/>
           </a:p>
@@ -1038,7 +1022,7 @@
           <a:p>
             <a:fld id="{51AFF834-1BEC-4F95-9622-28B5DCC1FE16}" type="datetimeFigureOut">
               <a:rPr lang="en-US" smtClean="0"/>
-              <a:t>3/9/2026</a:t>
+              <a:t>3/10/2026</a:t>
             </a:fld>
             <a:endParaRPr lang="en-US"/>
           </a:p>
@@ -1236,7 +1220,7 @@
           <a:p>
             <a:fld id="{51AFF834-1BEC-4F95-9622-28B5DCC1FE16}" type="datetimeFigureOut">
               <a:rPr lang="en-US" smtClean="0"/>
-              <a:t>3/9/2026</a:t>
+              <a:t>3/10/2026</a:t>
             </a:fld>
             <a:endParaRPr lang="en-US"/>
           </a:p>
@@ -1511,7 +1495,7 @@
           <a:p>
             <a:fld id="{51AFF834-1BEC-4F95-9622-28B5DCC1FE16}" type="datetimeFigureOut">
               <a:rPr lang="en-US" smtClean="0"/>
-              <a:t>3/9/2026</a:t>
+              <a:t>3/10/2026</a:t>
             </a:fld>
             <a:endParaRPr lang="en-US"/>
           </a:p>
@@ -1776,7 +1760,7 @@
           <a:p>
             <a:fld id="{51AFF834-1BEC-4F95-9622-28B5DCC1FE16}" type="datetimeFigureOut">
               <a:rPr lang="en-US" smtClean="0"/>
-              <a:t>3/9/2026</a:t>
+              <a:t>3/10/2026</a:t>
             </a:fld>
             <a:endParaRPr lang="en-US"/>
           </a:p>
@@ -2188,7 +2172,7 @@
           <a:p>
             <a:fld id="{51AFF834-1BEC-4F95-9622-28B5DCC1FE16}" type="datetimeFigureOut">
               <a:rPr lang="en-US" smtClean="0"/>
-              <a:t>3/9/2026</a:t>
+              <a:t>3/10/2026</a:t>
             </a:fld>
             <a:endParaRPr lang="en-US"/>
           </a:p>
@@ -2329,7 +2313,7 @@
           <a:p>
             <a:fld id="{51AFF834-1BEC-4F95-9622-28B5DCC1FE16}" type="datetimeFigureOut">
               <a:rPr lang="en-US" smtClean="0"/>
-              <a:t>3/9/2026</a:t>
+              <a:t>3/10/2026</a:t>
             </a:fld>
             <a:endParaRPr lang="en-US"/>
           </a:p>
@@ -2442,7 +2426,7 @@
           <a:p>
             <a:fld id="{51AFF834-1BEC-4F95-9622-28B5DCC1FE16}" type="datetimeFigureOut">
               <a:rPr lang="en-US" smtClean="0"/>
-              <a:t>3/9/2026</a:t>
+              <a:t>3/10/2026</a:t>
             </a:fld>
             <a:endParaRPr lang="en-US"/>
           </a:p>
@@ -2753,7 +2737,7 @@
           <a:p>
             <a:fld id="{51AFF834-1BEC-4F95-9622-28B5DCC1FE16}" type="datetimeFigureOut">
               <a:rPr lang="en-US" smtClean="0"/>
-              <a:t>3/9/2026</a:t>
+              <a:t>3/10/2026</a:t>
             </a:fld>
             <a:endParaRPr lang="en-US"/>
           </a:p>
@@ -3041,7 +3025,7 @@
           <a:p>
             <a:fld id="{51AFF834-1BEC-4F95-9622-28B5DCC1FE16}" type="datetimeFigureOut">
               <a:rPr lang="en-US" smtClean="0"/>
-              <a:t>3/9/2026</a:t>
+              <a:t>3/10/2026</a:t>
             </a:fld>
             <a:endParaRPr lang="en-US"/>
           </a:p>
@@ -3282,7 +3266,7 @@
           <a:p>
             <a:fld id="{51AFF834-1BEC-4F95-9622-28B5DCC1FE16}" type="datetimeFigureOut">
               <a:rPr lang="en-US" smtClean="0"/>
-              <a:t>3/9/2026</a:t>
+              <a:t>3/10/2026</a:t>
             </a:fld>
             <a:endParaRPr lang="en-US"/>
           </a:p>
@@ -3699,36 +3683,6 @@
           <a:chExt cx="0" cy="0"/>
         </a:xfrm>
       </p:grpSpPr>
-      <p:pic>
-        <p:nvPicPr>
-          <p:cNvPr id="36" name="Picture 35">
-            <a:extLst>
-              <a:ext uri="{FF2B5EF4-FFF2-40B4-BE49-F238E27FC236}">
-                <a16:creationId xmlns:a16="http://schemas.microsoft.com/office/drawing/2014/main" id="{7D1B8B85-7F90-6201-21E9-F6ABDFFBBFF8}"/>
-              </a:ext>
-            </a:extLst>
-          </p:cNvPr>
-          <p:cNvPicPr>
-            <a:picLocks noChangeAspect="1"/>
-          </p:cNvPicPr>
-          <p:nvPr/>
-        </p:nvPicPr>
-        <p:blipFill>
-          <a:blip r:embed="rId2"/>
-          <a:stretch>
-            <a:fillRect/>
-          </a:stretch>
-        </p:blipFill>
-        <p:spPr>
-          <a:xfrm>
-            <a:off x="2899612" y="3237305"/>
-            <a:ext cx="503999" cy="267608"/>
-          </a:xfrm>
-          <a:prstGeom prst="rect">
-            <a:avLst/>
-          </a:prstGeom>
-        </p:spPr>
-      </p:pic>
       <p:sp>
         <p:nvSpPr>
           <p:cNvPr id="4" name="TextBox 3">
@@ -9412,187 +9366,6 @@
           </a:p>
         </p:txBody>
       </p:sp>
-      <p:grpSp>
-        <p:nvGrpSpPr>
-          <p:cNvPr id="30" name="Group 29">
-            <a:extLst>
-              <a:ext uri="{FF2B5EF4-FFF2-40B4-BE49-F238E27FC236}">
-                <a16:creationId xmlns:a16="http://schemas.microsoft.com/office/drawing/2014/main" id="{F29CD4F1-4D65-2071-CB5D-56C21B0A8ADD}"/>
-              </a:ext>
-            </a:extLst>
-          </p:cNvPr>
-          <p:cNvGrpSpPr/>
-          <p:nvPr/>
-        </p:nvGrpSpPr>
-        <p:grpSpPr>
-          <a:xfrm rot="16200000">
-            <a:off x="8495764" y="2520050"/>
-            <a:ext cx="405246" cy="267608"/>
-            <a:chOff x="6169099" y="3766490"/>
-            <a:chExt cx="533480" cy="267608"/>
-          </a:xfrm>
-        </p:grpSpPr>
-        <p:pic>
-          <p:nvPicPr>
-            <p:cNvPr id="32" name="Picture 31">
-              <a:extLst>
-                <a:ext uri="{FF2B5EF4-FFF2-40B4-BE49-F238E27FC236}">
-                  <a16:creationId xmlns:a16="http://schemas.microsoft.com/office/drawing/2014/main" id="{08E484B5-905D-B38D-3D91-241CE1719D6C}"/>
-                </a:ext>
-              </a:extLst>
-            </p:cNvPr>
-            <p:cNvPicPr>
-              <a:picLocks noChangeAspect="1"/>
-            </p:cNvPicPr>
-            <p:nvPr/>
-          </p:nvPicPr>
-          <p:blipFill>
-            <a:blip r:embed="rId2"/>
-            <a:stretch>
-              <a:fillRect/>
-            </a:stretch>
-          </p:blipFill>
-          <p:spPr>
-            <a:xfrm>
-              <a:off x="6198580" y="3766490"/>
-              <a:ext cx="503999" cy="267608"/>
-            </a:xfrm>
-            <a:prstGeom prst="rect">
-              <a:avLst/>
-            </a:prstGeom>
-          </p:spPr>
-        </p:pic>
-        <p:cxnSp>
-          <p:nvCxnSpPr>
-            <p:cNvPr id="34" name="Straight Arrow Connector 33">
-              <a:extLst>
-                <a:ext uri="{FF2B5EF4-FFF2-40B4-BE49-F238E27FC236}">
-                  <a16:creationId xmlns:a16="http://schemas.microsoft.com/office/drawing/2014/main" id="{72BE6CC3-2C59-A24A-5E92-68A707F8638E}"/>
-                </a:ext>
-              </a:extLst>
-            </p:cNvPr>
-            <p:cNvCxnSpPr>
-              <a:cxnSpLocks/>
-            </p:cNvCxnSpPr>
-            <p:nvPr/>
-          </p:nvCxnSpPr>
-          <p:spPr>
-            <a:xfrm>
-              <a:off x="6169099" y="3838587"/>
-              <a:ext cx="177808" cy="0"/>
-            </a:xfrm>
-            <a:prstGeom prst="straightConnector1">
-              <a:avLst/>
-            </a:prstGeom>
-            <a:ln>
-              <a:solidFill>
-                <a:srgbClr val="FF0000"/>
-              </a:solidFill>
-              <a:tailEnd type="triangle"/>
-            </a:ln>
-          </p:spPr>
-          <p:style>
-            <a:lnRef idx="2">
-              <a:schemeClr val="accent1"/>
-            </a:lnRef>
-            <a:fillRef idx="0">
-              <a:schemeClr val="accent1"/>
-            </a:fillRef>
-            <a:effectRef idx="1">
-              <a:schemeClr val="accent1"/>
-            </a:effectRef>
-            <a:fontRef idx="minor">
-              <a:schemeClr val="tx1"/>
-            </a:fontRef>
-          </p:style>
-        </p:cxnSp>
-        <p:cxnSp>
-          <p:nvCxnSpPr>
-            <p:cNvPr id="35" name="Straight Arrow Connector 34">
-              <a:extLst>
-                <a:ext uri="{FF2B5EF4-FFF2-40B4-BE49-F238E27FC236}">
-                  <a16:creationId xmlns:a16="http://schemas.microsoft.com/office/drawing/2014/main" id="{8AB80F94-094C-4CE9-C275-29945A350AA8}"/>
-                </a:ext>
-              </a:extLst>
-            </p:cNvPr>
-            <p:cNvCxnSpPr>
-              <a:cxnSpLocks/>
-            </p:cNvCxnSpPr>
-            <p:nvPr/>
-          </p:nvCxnSpPr>
-          <p:spPr>
-            <a:xfrm>
-              <a:off x="6169099" y="3958185"/>
-              <a:ext cx="177808" cy="0"/>
-            </a:xfrm>
-            <a:prstGeom prst="straightConnector1">
-              <a:avLst/>
-            </a:prstGeom>
-            <a:ln>
-              <a:solidFill>
-                <a:srgbClr val="FF0000"/>
-              </a:solidFill>
-              <a:tailEnd type="triangle"/>
-            </a:ln>
-          </p:spPr>
-          <p:style>
-            <a:lnRef idx="2">
-              <a:schemeClr val="accent1"/>
-            </a:lnRef>
-            <a:fillRef idx="0">
-              <a:schemeClr val="accent1"/>
-            </a:fillRef>
-            <a:effectRef idx="1">
-              <a:schemeClr val="accent1"/>
-            </a:effectRef>
-            <a:fontRef idx="minor">
-              <a:schemeClr val="tx1"/>
-            </a:fontRef>
-          </p:style>
-        </p:cxnSp>
-      </p:grpSp>
-      <p:cxnSp>
-        <p:nvCxnSpPr>
-          <p:cNvPr id="37" name="Straight Arrow Connector 36">
-            <a:extLst>
-              <a:ext uri="{FF2B5EF4-FFF2-40B4-BE49-F238E27FC236}">
-                <a16:creationId xmlns:a16="http://schemas.microsoft.com/office/drawing/2014/main" id="{A09C37C1-E5D0-9FBA-A932-2F98BACEC0B2}"/>
-              </a:ext>
-            </a:extLst>
-          </p:cNvPr>
-          <p:cNvCxnSpPr/>
-          <p:nvPr/>
-        </p:nvCxnSpPr>
-        <p:spPr>
-          <a:xfrm>
-            <a:off x="2870131" y="3309402"/>
-            <a:ext cx="177808" cy="0"/>
-          </a:xfrm>
-          <a:prstGeom prst="straightConnector1">
-            <a:avLst/>
-          </a:prstGeom>
-          <a:ln>
-            <a:solidFill>
-              <a:srgbClr val="FF0000"/>
-            </a:solidFill>
-            <a:tailEnd type="triangle"/>
-          </a:ln>
-        </p:spPr>
-        <p:style>
-          <a:lnRef idx="2">
-            <a:schemeClr val="accent1"/>
-          </a:lnRef>
-          <a:fillRef idx="0">
-            <a:schemeClr val="accent1"/>
-          </a:fillRef>
-          <a:effectRef idx="1">
-            <a:schemeClr val="accent1"/>
-          </a:effectRef>
-          <a:fontRef idx="minor">
-            <a:schemeClr val="tx1"/>
-          </a:fontRef>
-        </p:style>
-      </p:cxnSp>
       <p:cxnSp>
         <p:nvCxnSpPr>
           <p:cNvPr id="38" name="Straight Arrow Connector 37">
@@ -9607,7 +9380,7 @@
         </p:nvCxnSpPr>
         <p:spPr>
           <a:xfrm>
-            <a:off x="2870131" y="3429000"/>
+            <a:off x="3209831" y="3381866"/>
             <a:ext cx="177808" cy="0"/>
           </a:xfrm>
           <a:prstGeom prst="straightConnector1">
@@ -10861,6 +10634,48 @@
             <a:avLst/>
           </a:prstGeom>
           <a:ln>
+            <a:tailEnd type="triangle"/>
+          </a:ln>
+        </p:spPr>
+        <p:style>
+          <a:lnRef idx="2">
+            <a:schemeClr val="accent1"/>
+          </a:lnRef>
+          <a:fillRef idx="0">
+            <a:schemeClr val="accent1"/>
+          </a:fillRef>
+          <a:effectRef idx="1">
+            <a:schemeClr val="accent1"/>
+          </a:effectRef>
+          <a:fontRef idx="minor">
+            <a:schemeClr val="tx1"/>
+          </a:fontRef>
+        </p:style>
+      </p:cxnSp>
+      <p:cxnSp>
+        <p:nvCxnSpPr>
+          <p:cNvPr id="105" name="Straight Arrow Connector 104">
+            <a:extLst>
+              <a:ext uri="{FF2B5EF4-FFF2-40B4-BE49-F238E27FC236}">
+                <a16:creationId xmlns:a16="http://schemas.microsoft.com/office/drawing/2014/main" id="{8CD91CF8-916B-D654-9E0C-D97E1D897DD5}"/>
+              </a:ext>
+            </a:extLst>
+          </p:cNvPr>
+          <p:cNvCxnSpPr/>
+          <p:nvPr/>
+        </p:nvCxnSpPr>
+        <p:spPr>
+          <a:xfrm flipV="1">
+            <a:off x="8719883" y="2434882"/>
+            <a:ext cx="0" cy="167673"/>
+          </a:xfrm>
+          <a:prstGeom prst="straightConnector1">
+            <a:avLst/>
+          </a:prstGeom>
+          <a:ln>
+            <a:solidFill>
+              <a:srgbClr val="FF0000"/>
+            </a:solidFill>
             <a:tailEnd type="triangle"/>
           </a:ln>
         </p:spPr>
